--- a/Phase2/detectives_dossier_phase2.pptx
+++ b/Phase2/detectives_dossier_phase2.pptx
@@ -4,6 +4,9 @@
   <p:sldMasterIdLst>
     <p:sldMasterId id="2147483648" r:id="rId1"/>
   </p:sldMasterIdLst>
+  <p:notesMasterIdLst>
+    <p:notesMasterId r:id="rId17"/>
+  </p:notesMasterIdLst>
   <p:sldIdLst>
     <p:sldId id="256" r:id="rId2"/>
     <p:sldId id="257" r:id="rId3"/>
@@ -21,9 +24,6 @@
     <p:sldId id="269" r:id="rId15"/>
     <p:sldId id="270" r:id="rId16"/>
   </p:sldIdLst>
-  <p:notesMasterIdLst>
-    <p:notesMasterId r:id="rId17"/>
-  </p:notesMasterIdLst>
   <p:sldSz cx="12192000" cy="6858000"/>
   <p:notesSz cx="6858000" cy="12192000"/>
   <p:defaultTextStyle>
@@ -121,7 +121,7 @@
   <p:extLst>
     <p:ext uri="{521415D9-36F7-43E2-AB2F-B90AF26B5E84}">
       <p14:sectionLst xmlns:p14="http://schemas.microsoft.com/office/powerpoint/2010/main">
-        <p14:section name="Introduction" id="{ec37acce-1510-016e-fc5d-b87e6fe60fcf}">
+        <p14:section name="Introduction" id="{EC37ACCE-1510-016E-FC5D-B87E6FE60FCF}">
           <p14:sldIdLst>
             <p14:sldId id="256"/>
             <p14:sldId id="257"/>
@@ -129,14 +129,14 @@
             <p14:sldId id="259"/>
           </p14:sldIdLst>
         </p14:section>
-        <p14:section name="Design" id="{4c72a058-edb3-0bab-7996-9ee08f468986}">
+        <p14:section name="Design" id="{4C72A058-EDB3-0BAB-7996-9EE08F468986}">
           <p14:sldIdLst>
             <p14:sldId id="260"/>
             <p14:sldId id="261"/>
             <p14:sldId id="262"/>
           </p14:sldIdLst>
         </p14:section>
-        <p14:section name="Progress" id="{659a990d-217e-ab06-d04c-20f775c8f787}">
+        <p14:section name="Progress" id="{659A990D-217E-AB06-D04C-20F775C8F787}">
           <p14:sldIdLst>
             <p14:sldId id="263"/>
             <p14:sldId id="264"/>
@@ -146,7 +146,7 @@
             <p14:sldId id="268"/>
           </p14:sldIdLst>
         </p14:section>
-        <p14:section name="Wrap-up" id="{1665a7cd-6aa1-4048-4e3b-1f9c76927033}">
+        <p14:section name="Wrap-up" id="{1665A7CD-6AA1-4048-4E3B-1F9C76927033}">
           <p14:sldIdLst>
             <p14:sldId id="269"/>
             <p14:sldId id="270"/>
@@ -183,234 +183,10 @@
           <a:chExt cx="0" cy="0"/>
         </a:xfrm>
       </p:grpSpPr>
-      <p:sp>
-        <p:nvSpPr>
-          <p:cNvPr id="2" name="Header Placeholder 1"/>
-          <p:cNvSpPr>
-            <a:spLocks noGrp="1"/>
-          </p:cNvSpPr>
-          <p:nvPr>
-            <p:ph type="hdr" sz="quarter"/>
-          </p:nvPr>
-        </p:nvSpPr>
-        <p:spPr>
-          <a:xfrm>
-            <a:off x="0" y="0"/>
-            <a:ext cx="2971800" cy="458788"/>
-          </a:xfrm>
-          <a:prstGeom prst="rect">
-            <a:avLst/>
-          </a:prstGeom>
-        </p:spPr>
-        <p:txBody>
-          <a:bodyPr vert="horz" lIns="91440" tIns="45720" rIns="91440" bIns="45720" rtlCol="0"/>
-          <a:lstStyle>
-            <a:lvl1pPr algn="l">
-              <a:defRPr sz="1200"/>
-            </a:lvl1pPr>
-          </a:lstStyle>
-          <a:p>
-            <a:endParaRPr lang="en-US"/>
-          </a:p>
-        </p:txBody>
-      </p:sp>
-      <p:sp>
-        <p:nvSpPr>
-          <p:cNvPr id="3" name="Date Placeholder 2"/>
-          <p:cNvSpPr>
-            <a:spLocks noGrp="1"/>
-          </p:cNvSpPr>
-          <p:nvPr>
-            <p:ph type="dt" idx="1"/>
-          </p:nvPr>
-        </p:nvSpPr>
-        <p:spPr>
-          <a:xfrm>
-            <a:off x="3884613" y="0"/>
-            <a:ext cx="2971800" cy="458788"/>
-          </a:xfrm>
-          <a:prstGeom prst="rect">
-            <a:avLst/>
-          </a:prstGeom>
-        </p:spPr>
-        <p:txBody>
-          <a:bodyPr vert="horz" lIns="91440" tIns="45720" rIns="91440" bIns="45720" rtlCol="0"/>
-          <a:lstStyle>
-            <a:lvl1pPr algn="r">
-              <a:defRPr sz="1200"/>
-            </a:lvl1pPr>
-          </a:lstStyle>
-          <a:p>
-            <a:fld id="{5282F153-3F37-0F45-9E97-73ACFA13230C}" type="datetimeFigureOut">
-              <a:rPr lang="en-US"/>
-              <a:t>7/23/19</a:t>
-            </a:fld>
-            <a:endParaRPr lang="en-US"/>
-          </a:p>
-        </p:txBody>
-      </p:sp>
-      <p:sp>
-        <p:nvSpPr>
-          <p:cNvPr id="4" name="Slide Image Placeholder 3"/>
-          <p:cNvSpPr>
-            <a:spLocks noGrp="1" noRot="1" noChangeAspect="1"/>
-          </p:cNvSpPr>
-          <p:nvPr>
-            <p:ph type="sldImg" idx="2"/>
-          </p:nvPr>
-        </p:nvSpPr>
-        <p:spPr>
-          <a:xfrm>
-            <a:off x="685800" y="1143000"/>
-            <a:ext cx="5486400" cy="3086100"/>
-          </a:xfrm>
-          <a:prstGeom prst="rect">
-            <a:avLst/>
-          </a:prstGeom>
-          <a:noFill/>
-          <a:ln w="12700">
-            <a:solidFill>
-              <a:prstClr val="black"/>
-            </a:solidFill>
-          </a:ln>
-        </p:spPr>
-        <p:txBody>
-          <a:bodyPr vert="horz" lIns="91440" tIns="45720" rIns="91440" bIns="45720" rtlCol="0" anchor="ctr"/>
-          <a:lstStyle/>
-          <a:p>
-            <a:endParaRPr lang="en-US"/>
-          </a:p>
-        </p:txBody>
-      </p:sp>
-      <p:sp>
-        <p:nvSpPr>
-          <p:cNvPr id="5" name="Notes Placeholder 4"/>
-          <p:cNvSpPr>
-            <a:spLocks noGrp="1"/>
-          </p:cNvSpPr>
-          <p:nvPr>
-            <p:ph type="body" sz="quarter" idx="3"/>
-          </p:nvPr>
-        </p:nvSpPr>
-        <p:spPr>
-          <a:xfrm>
-            <a:off x="685800" y="4400550"/>
-            <a:ext cx="5486400" cy="3600450"/>
-          </a:xfrm>
-          <a:prstGeom prst="rect">
-            <a:avLst/>
-          </a:prstGeom>
-        </p:spPr>
-        <p:txBody>
-          <a:bodyPr vert="horz" lIns="91440" tIns="45720" rIns="91440" bIns="45720" rtlCol="0"/>
-          <a:lstStyle/>
-          <a:p>
-            <a:pPr lvl="0"/>
-            <a:r>
-              <a:rPr lang="en-US"/>
-              <a:t>Click to edit Master text styles</a:t>
-            </a:r>
-          </a:p>
-          <a:p>
-            <a:pPr lvl="1"/>
-            <a:r>
-              <a:rPr lang="en-US"/>
-              <a:t>Second level</a:t>
-            </a:r>
-          </a:p>
-          <a:p>
-            <a:pPr lvl="2"/>
-            <a:r>
-              <a:rPr lang="en-US"/>
-              <a:t>Third level</a:t>
-            </a:r>
-          </a:p>
-          <a:p>
-            <a:pPr lvl="3"/>
-            <a:r>
-              <a:rPr lang="en-US"/>
-              <a:t>Fourth level</a:t>
-            </a:r>
-          </a:p>
-          <a:p>
-            <a:pPr lvl="4"/>
-            <a:r>
-              <a:rPr lang="en-US"/>
-              <a:t>Fifth level</a:t>
-            </a:r>
-          </a:p>
-        </p:txBody>
-      </p:sp>
-      <p:sp>
-        <p:nvSpPr>
-          <p:cNvPr id="6" name="Footer Placeholder 5"/>
-          <p:cNvSpPr>
-            <a:spLocks noGrp="1"/>
-          </p:cNvSpPr>
-          <p:nvPr>
-            <p:ph type="ftr" sz="quarter" idx="4"/>
-          </p:nvPr>
-        </p:nvSpPr>
-        <p:spPr>
-          <a:xfrm>
-            <a:off x="0" y="8685213"/>
-            <a:ext cx="2971800" cy="458787"/>
-          </a:xfrm>
-          <a:prstGeom prst="rect">
-            <a:avLst/>
-          </a:prstGeom>
-        </p:spPr>
-        <p:txBody>
-          <a:bodyPr vert="horz" lIns="91440" tIns="45720" rIns="91440" bIns="45720" rtlCol="0" anchor="b"/>
-          <a:lstStyle>
-            <a:lvl1pPr algn="l">
-              <a:defRPr sz="1200"/>
-            </a:lvl1pPr>
-          </a:lstStyle>
-          <a:p>
-            <a:endParaRPr lang="en-US"/>
-          </a:p>
-        </p:txBody>
-      </p:sp>
-      <p:sp>
-        <p:nvSpPr>
-          <p:cNvPr id="7" name="Slide Number Placeholder 6"/>
-          <p:cNvSpPr>
-            <a:spLocks noGrp="1"/>
-          </p:cNvSpPr>
-          <p:nvPr>
-            <p:ph type="sldNum" sz="quarter" idx="5"/>
-          </p:nvPr>
-        </p:nvSpPr>
-        <p:spPr>
-          <a:xfrm>
-            <a:off x="3884613" y="8685213"/>
-            <a:ext cx="2971800" cy="458787"/>
-          </a:xfrm>
-          <a:prstGeom prst="rect">
-            <a:avLst/>
-          </a:prstGeom>
-        </p:spPr>
-        <p:txBody>
-          <a:bodyPr vert="horz" lIns="91440" tIns="45720" rIns="91440" bIns="45720" rtlCol="0" anchor="b"/>
-          <a:lstStyle>
-            <a:lvl1pPr algn="r">
-              <a:defRPr sz="1200"/>
-            </a:lvl1pPr>
-          </a:lstStyle>
-          <a:p>
-            <a:fld id="{CE5E9CC1-C706-0F49-92D6-E571CC5EEA8F}" type="slidenum">
-              <a:rPr lang="en-US"/>
-              <a:t>‹#›</a:t>
-            </a:fld>
-            <a:endParaRPr lang="en-US"/>
-          </a:p>
-        </p:txBody>
-      </p:sp>
     </p:spTree>
     <p:extLst>
       <p:ext uri="{BB962C8B-B14F-4D97-AF65-F5344CB8AC3E}">
-        <p14:creationId xmlns:p14="http://schemas.microsoft.com/office/powerpoint/2010/main" val="1024086991"/>
+        <p14:creationId xmlns:p14="http://schemas.microsoft.com/office/powerpoint/2010/main" val="4126001678"/>
       </p:ext>
     </p:extLst>
   </p:cSld>
@@ -558,7 +334,6 @@
               <a:rPr lang="en-US" dirty="0"/>
               <a:t>Introduce yourselves and the project in one sentence: a 2D murder-mystery game where the player must earn every clue, cross-examine suspects and use school science, built on graphs, a DAG, hash maps and a stack. Mention the team name and ID.</a:t>
             </a:r>
-            <a:endParaRPr lang="en-US" dirty="0"/>
           </a:p>
         </p:txBody>
       </p:sp>
@@ -646,7 +421,6 @@
               <a:rPr lang="en-US" dirty="0"/>
               <a:t>Give a live demonstration (about 3 minutes): talk to Dr. Reddy in the library and press P; press L and solve the time-of-death puzzle (37 minus 29 is 8 hours before 7:15 am, so 11:15 pm); show the papers on the side table and cross-examine Rohit with them (T); show a wrong piece of evidence costing credibility. Replace the room images on this slide with real in-game screenshots from your laptop before presenting.</a:t>
             </a:r>
-            <a:endParaRPr lang="en-US" dirty="0"/>
           </a:p>
         </p:txBody>
       </p:sp>
@@ -734,7 +508,6 @@
               <a:rPr lang="en-US" dirty="0"/>
               <a:t>Show the engine_tests window saying 'All tests passed' if possible. Explain that the tests found real bugs (for example a door that placed the player inside a wall). Re-run engine_tests on your own laptop before presenting and show it. The playtest row is honestly pending.</a:t>
             </a:r>
-            <a:endParaRPr lang="en-US" dirty="0"/>
           </a:p>
         </p:txBody>
       </p:sp>
@@ -822,7 +595,6 @@
               <a:rPr lang="en-US" dirty="0"/>
               <a:t>Every team member must be a contributor and must commit individually from their own GitHub account. Before presenting: push the latest code (the dossier engine v13 project), update the README with build and run steps, add all three members as contributors, and replace every red placeholder on this slide with real facts.</a:t>
             </a:r>
-            <a:endParaRPr lang="en-US" dirty="0"/>
           </a:p>
         </p:txBody>
       </p:sp>
@@ -910,7 +682,6 @@
               <a:rPr lang="en-US" dirty="0"/>
               <a:t>Replace every red placeholder with specific, truthful work that each member can explain and that is visible in their own commits. Avoid generic statements such as 'helped in coding'. Each member should be able to explain at least one module in detail, for example the validator, the cross-examination code in Game.h, the map loader or the Qt screen.</a:t>
             </a:r>
-            <a:endParaRPr lang="en-US" dirty="0"/>
           </a:p>
         </p:txBody>
       </p:sp>
@@ -998,7 +769,6 @@
               <a:rPr lang="en-US" dirty="0"/>
               <a:t>Explain genuine technical challenges and a realistic roadmap. Be honest: SQLite, audio and playtesting are still to do. The roadmap is what you will finish before Phase-III.</a:t>
             </a:r>
-            <a:endParaRPr lang="en-US" dirty="0"/>
           </a:p>
         </p:txBody>
       </p:sp>
@@ -1086,7 +856,6 @@
               <a:rPr lang="en-US" dirty="0"/>
               <a:t>Conclude with the final outcome expected: a complete, tested investigation game that teaches reasoning. Thank the panel and invite questions. Each of you should be ready to answer questions on the code you worked on.</a:t>
             </a:r>
-            <a:endParaRPr lang="en-US" dirty="0"/>
           </a:p>
         </p:txBody>
       </p:sp>
@@ -1174,7 +943,6 @@
               <a:rPr lang="en-US" dirty="0"/>
               <a:t>Introduce each member and say who the mentor is. Section ML1, ML2, ML3; mentor Mr. Sujal Bindra; 4 interactions completed.</a:t>
             </a:r>
-            <a:endParaRPr lang="en-US" dirty="0"/>
           </a:p>
         </p:txBody>
       </p:sp>
@@ -1262,7 +1030,6 @@
               <a:rPr lang="en-US" dirty="0"/>
               <a:t>Two pieces of mentor feedback: (1) make it simpler with just one case instead of several, (2) focus more on DSA because PBL is mainly about DSA. We changed the scope to a single complete case and we made the data structures and algorithms the core of the project. The repository still holds two small extra cases, but they are used only by the automated tests to show the engine is reusable; the game itself ships one case.</a:t>
             </a:r>
-            <a:endParaRPr lang="en-US" dirty="0"/>
           </a:p>
         </p:txBody>
       </p:sp>
@@ -1350,7 +1117,6 @@
               <a:rPr lang="en-US" dirty="0"/>
               <a:t>State the finalized problem and the four measurable objectives. Objectives 1 to 3 are achieved; objective 4 (SQLite and playtesting) is planned for Phase-III. Objective 1 reflects the mentor advice to focus on DSA.</a:t>
             </a:r>
-            <a:endParaRPr lang="en-US" dirty="0"/>
           </a:p>
         </p:txBody>
       </p:sp>
@@ -1438,7 +1204,6 @@
               <a:rPr lang="en-US" dirty="0"/>
               <a:t>Walk left to right: keyboard input, the Qt screen, the engine, the (planned) database and the output. Emphasise that the engine never draws anything and the screen never decides rules. The database layer has a dashed border because it is planned, not implemented. Do not present it as done.</a:t>
             </a:r>
-            <a:endParaRPr lang="en-US" dirty="0"/>
           </a:p>
         </p:txBody>
       </p:sp>
@@ -1526,7 +1291,6 @@
               <a:rPr lang="en-US" dirty="0"/>
               <a:t>Explain each module in one sentence and how it depends on the others. The key idea: the engine is independent of Qt, which is why we can test it automatically.</a:t>
             </a:r>
-            <a:endParaRPr lang="en-US" dirty="0"/>
           </a:p>
         </p:txBody>
       </p:sp>
@@ -1614,7 +1378,6 @@
               <a:rPr lang="en-US" dirty="0"/>
               <a:t>Explain why each technology fits: C++ for the DSA and OOP course concepts; Qt for the 2D interface; Tiled for maps; SQLite because it needs no server. Be honest that SQLite is planned and not yet integrated.</a:t>
             </a:r>
-            <a:endParaRPr lang="en-US" dirty="0"/>
           </a:p>
         </p:txBody>
       </p:sp>
@@ -1702,7 +1465,6 @@
               <a:rPr lang="en-US" dirty="0"/>
               <a:t>For each concept, say where it is implemented and why. Data structures: BFS is in reachableLocations in Validator.h, Kahn's sort checks the clue DAG, hash tables are unordered_map in Case.h, the stack is the undo history in Game.h. OOP: Entity is abstract, three classes inherit from it. Only claim what is implemented: DBMS is not done yet. Be ready to explain that we use STL containers rather than writing our own.</a:t>
             </a:r>
-            <a:endParaRPr lang="en-US" dirty="0"/>
           </a:p>
         </p:txBody>
       </p:sp>
@@ -1790,7 +1552,6 @@
               <a:rPr lang="en-US" dirty="0"/>
               <a:t>Clearly separate completed, in-progress and pending work. The ~60% is our estimate: the logic and interface are done, the database, audio and user testing are not. Do not present planned work as completed. If asked why the Phase-II report describes an earlier stage, explain that the report was written before the engine, interface and maps were integrated, and that this deck shows the current state.</a:t>
             </a:r>
-            <a:endParaRPr lang="en-US" dirty="0"/>
           </a:p>
         </p:txBody>
       </p:sp>
@@ -1868,6 +1629,7 @@
         <a:solidFill>
           <a:srgbClr val="FFFFFF"/>
         </a:solidFill>
+        <a:effectLst/>
       </p:bgPr>
     </p:bg>
     <p:spTree>
@@ -1920,6 +1682,7 @@
         <a:solidFill>
           <a:srgbClr val="FFFFFF"/>
         </a:solidFill>
+        <a:effectLst/>
       </p:bgPr>
     </p:bg>
     <p:spTree>
@@ -1938,14 +1701,14 @@
       </p:grpSpPr>
       <p:pic>
         <p:nvPicPr>
-          <p:cNvPr id="2" name="University logo" descr="/tmp/deck/logo.png">    </p:cNvPr>
+          <p:cNvPr id="2" name="University logo" descr="/tmp/deck/logo.png"/>
           <p:cNvPicPr>
             <a:picLocks noChangeAspect="1"/>
           </p:cNvPicPr>
           <p:nvPr/>
         </p:nvPicPr>
         <p:blipFill>
-          <a:blip r:embed="rId1"/>
+          <a:blip r:embed="rId2"/>
           <a:stretch>
             <a:fillRect/>
           </a:stretch>
@@ -2004,7 +1767,7 @@
           <a:bodyPr wrap="square" lIns="0" tIns="0" rIns="0" bIns="0" rtlCol="0" anchor="ctr"/>
           <a:lstStyle/>
           <a:p>
-            <a:pPr indent="0" marL="0">
+            <a:pPr marL="0" indent="0">
               <a:buNone/>
             </a:pPr>
             <a:r>
@@ -2040,7 +1803,7 @@
           <a:bodyPr wrap="square" lIns="0" tIns="0" rIns="0" bIns="0" rtlCol="0" anchor="ctr"/>
           <a:lstStyle/>
           <a:p>
-            <a:pPr indent="0" marL="0">
+            <a:pPr marL="0" indent="0">
               <a:buNone/>
             </a:pPr>
             <a:r>
@@ -2058,9 +1821,11 @@
       <p:sp>
         <p:nvSpPr>
           <p:cNvPr id="6" name="Text 3"/>
-          <p:cNvSpPr/>
+          <p:cNvSpPr>
+            <a:spLocks noGrp="1"/>
+          </p:cNvSpPr>
           <p:nvPr>
-            <p:ph idx="104" type="title" hasCustomPrompt="1"/>
+            <p:ph type="title" idx="104" hasCustomPrompt="1"/>
           </p:nvPr>
         </p:nvSpPr>
         <p:spPr>
@@ -2077,7 +1842,7 @@
         <p:txBody>
           <a:bodyPr wrap="square" rtlCol="0"/>
           <a:lstStyle>
-            <a:lvl1pPr algn="l" indent="0" marL="0">
+            <a:lvl1pPr marL="0" indent="0" algn="l">
               <a:buNone/>
               <a:defRPr lang="en-US" sz="3200" b="1" dirty="0">
                 <a:solidFill>
@@ -2087,7 +1852,7 @@
             </a:lvl1pPr>
           </a:lstStyle>
           <a:p>
-            <a:pPr algn="l" indent="0" marL="0">
+            <a:pPr marL="0" indent="0" algn="l">
               <a:buNone/>
             </a:pPr>
             <a:endParaRPr lang="en-US" sz="3200" dirty="0"/>
@@ -2114,7 +1879,7 @@
           </a:prstGeom>
           <a:extLst>
             <a:ext uri="{C572A759-6A51-4108-AA02-DFA0A04FC94B}">
-              <ma14:wrappingTextBoxFlag xmlns:ma14="http://schemas.microsoft.com/office/mac/drawingml/2011/main" val="0"/>
+              <ma14:wrappingTextBoxFlag xmlns:ma14="http://schemas.microsoft.com/office/mac/drawingml/2011/main" xmlns="" val="0"/>
             </a:ext>
           </a:extLst>
         </p:spPr>
@@ -2132,8 +1897,8 @@
           <a:p>
             <a:pPr algn="r"/>
             <a:fld id="{F7021451-1387-4CA6-816F-3879F97B5CBC}" type="slidenum">
-              <a:rPr b="0" lang="en-US"/>
-              <a:t>1003</a:t>
+              <a:rPr lang="en-US" b="0"/>
+              <a:t>‹#›</a:t>
             </a:fld>
             <a:endParaRPr lang="en-US"/>
           </a:p>
@@ -2150,6 +1915,11 @@
 <file path=ppt/slideMasters/slideMaster1.xml><?xml version="1.0" encoding="utf-8"?>
 <p:sldMaster xmlns:a="http://schemas.openxmlformats.org/drawingml/2006/main" xmlns:r="http://schemas.openxmlformats.org/officeDocument/2006/relationships" xmlns:p="http://schemas.openxmlformats.org/presentationml/2006/main">
   <p:cSld>
+    <p:bg>
+      <p:bgRef idx="1001">
+        <a:schemeClr val="bg1"/>
+      </p:bgRef>
+    </p:bg>
     <p:spTree>
       <p:nvGrpSpPr>
         <p:cNvPr id="1" name=""/>
@@ -2184,7 +1954,7 @@
           </a:prstGeom>
           <a:extLst>
             <a:ext uri="{C572A759-6A51-4108-AA02-DFA0A04FC94B}">
-              <ma14:wrappingTextBoxFlag xmlns:ma14="http://schemas.microsoft.com/office/mac/drawingml/2011/main" val="0"/>
+              <ma14:wrappingTextBoxFlag xmlns:ma14="http://schemas.microsoft.com/office/mac/drawingml/2011/main" xmlns="" val="0"/>
             </a:ext>
           </a:extLst>
         </p:spPr>
@@ -2202,8 +1972,8 @@
           <a:p>
             <a:pPr algn="r"/>
             <a:fld id="{F7021451-1387-4CA6-816F-3879F97B5CBC}" type="slidenum">
-              <a:rPr b="0" lang="en-US"/>
-              <a:t>null</a:t>
+              <a:rPr lang="en-US" b="0"/>
+              <a:t>‹#›</a:t>
             </a:fld>
             <a:endParaRPr lang="en-US"/>
           </a:p>
@@ -2517,14 +2287,14 @@
       </p:sp>
       <p:pic>
         <p:nvPicPr>
-          <p:cNvPr id="3" name="University logo" descr="Graphic Era Deemed to be University Dehradun logo">    </p:cNvPr>
+          <p:cNvPr id="3" name="University logo" descr="Graphic Era Deemed to be University Dehradun logo"/>
           <p:cNvPicPr>
             <a:picLocks noChangeAspect="1"/>
           </p:cNvPicPr>
           <p:nvPr/>
         </p:nvPicPr>
         <p:blipFill>
-          <a:blip r:embed="rId1"/>
+          <a:blip r:embed="rId3"/>
           <a:stretch>
             <a:fillRect/>
           </a:stretch>
@@ -2560,11 +2330,11 @@
           <a:bodyPr wrap="square" lIns="0" tIns="0" rIns="0" bIns="0" rtlCol="0" anchor="ctr"/>
           <a:lstStyle/>
           <a:p>
-            <a:pPr indent="0" marL="0">
+            <a:pPr marL="0" indent="0">
               <a:buNone/>
             </a:pPr>
             <a:r>
-              <a:rPr lang="en-US" sz="1600" b="1" spc="400" kern="0" dirty="0">
+              <a:rPr lang="en-US" sz="1600" b="1" kern="0" spc="400" dirty="0">
                 <a:solidFill>
                   <a:schemeClr val="bg2"/>
                 </a:solidFill>
@@ -2596,7 +2366,7 @@
           <a:bodyPr wrap="square" lIns="0" tIns="0" rIns="0" bIns="0" rtlCol="0" anchor="ctr"/>
           <a:lstStyle/>
           <a:p>
-            <a:pPr indent="0" marL="0">
+            <a:pPr marL="0" indent="0">
               <a:buNone/>
             </a:pPr>
             <a:r>
@@ -2632,7 +2402,7 @@
           <a:bodyPr wrap="square" lIns="0" tIns="0" rIns="0" bIns="0" rtlCol="0" anchor="ctr"/>
           <a:lstStyle/>
           <a:p>
-            <a:pPr indent="0" marL="0">
+            <a:pPr marL="0" indent="0">
               <a:buNone/>
             </a:pPr>
             <a:r>
@@ -2668,7 +2438,7 @@
           <a:bodyPr wrap="square" lIns="0" tIns="0" rIns="0" bIns="0" rtlCol="0" anchor="ctr"/>
           <a:lstStyle/>
           <a:p>
-            <a:pPr indent="0" marL="0">
+            <a:pPr marL="0" indent="0">
               <a:buNone/>
             </a:pPr>
             <a:r>
@@ -2704,7 +2474,7 @@
           <a:bodyPr wrap="square" lIns="0" tIns="0" rIns="0" bIns="0" rtlCol="0" anchor="ctr"/>
           <a:lstStyle/>
           <a:p>
-            <a:pPr indent="0" marL="0">
+            <a:pPr marL="0" indent="0">
               <a:buNone/>
             </a:pPr>
             <a:r>
@@ -2718,7 +2488,7 @@
             <a:endParaRPr lang="en-US" sz="1800" dirty="0"/>
           </a:p>
           <a:p>
-            <a:pPr indent="0" marL="0">
+            <a:pPr marL="0" indent="0">
               <a:buNone/>
             </a:pPr>
             <a:r>
@@ -2754,7 +2524,7 @@
           <a:bodyPr wrap="square" lIns="0" tIns="0" rIns="0" bIns="0" rtlCol="0" anchor="ctr"/>
           <a:lstStyle/>
           <a:p>
-            <a:pPr indent="0" marL="0">
+            <a:pPr marL="0" indent="0">
               <a:buNone/>
             </a:pPr>
             <a:r>
@@ -2768,7 +2538,7 @@
             <a:endParaRPr lang="en-US" sz="1400" dirty="0"/>
           </a:p>
           <a:p>
-            <a:pPr indent="0" marL="0">
+            <a:pPr marL="0" indent="0">
               <a:buNone/>
             </a:pPr>
             <a:r>
@@ -2782,7 +2552,7 @@
             <a:endParaRPr lang="en-US" sz="1400" dirty="0"/>
           </a:p>
           <a:p>
-            <a:pPr indent="0" marL="0">
+            <a:pPr marL="0" indent="0">
               <a:buNone/>
             </a:pPr>
             <a:r>
@@ -2824,14 +2594,14 @@
       </p:sp>
       <p:pic>
         <p:nvPicPr>
-          <p:cNvPr id="11" name="Library room render" descr="The library room of the game, rendered from our map files">    </p:cNvPr>
+          <p:cNvPr id="11" name="Library room render" descr="The library room of the game, rendered from our map files"/>
           <p:cNvPicPr>
             <a:picLocks noChangeAspect="1"/>
           </p:cNvPicPr>
           <p:nvPr/>
         </p:nvPicPr>
         <p:blipFill>
-          <a:blip r:embed="rId2"/>
+          <a:blip r:embed="rId4"/>
           <a:stretch>
             <a:fillRect/>
           </a:stretch>
@@ -2867,7 +2637,7 @@
           <a:bodyPr wrap="square" lIns="0" tIns="0" rIns="0" bIns="0" rtlCol="0" anchor="ctr"/>
           <a:lstStyle/>
           <a:p>
-            <a:pPr indent="0" marL="0">
+            <a:pPr marL="0" indent="0">
               <a:buNone/>
             </a:pPr>
             <a:r>
@@ -2910,9 +2680,11 @@
       <p:sp>
         <p:nvSpPr>
           <p:cNvPr id="2" name="Text 3"/>
-          <p:cNvSpPr/>
+          <p:cNvSpPr>
+            <a:spLocks noGrp="1"/>
+          </p:cNvSpPr>
           <p:nvPr>
-            <p:ph idx="104" type="title" hasCustomPrompt="1"/>
+            <p:ph type="title" idx="104" hasCustomPrompt="1"/>
           </p:nvPr>
         </p:nvSpPr>
         <p:spPr>
@@ -2930,7 +2702,7 @@
           <a:bodyPr wrap="square" lIns="0" tIns="0" rIns="0" bIns="0" rtlCol="0" anchor="ctr"/>
           <a:lstStyle/>
           <a:p>
-            <a:pPr algn="l" indent="0" marL="0">
+            <a:pPr marL="0" indent="0" algn="l">
               <a:buNone/>
             </a:pPr>
             <a:r>
@@ -2966,7 +2738,7 @@
           <a:bodyPr wrap="square" lIns="0" tIns="0" rIns="0" bIns="0" rtlCol="0" anchor="ctr"/>
           <a:lstStyle/>
           <a:p>
-            <a:pPr indent="0" marL="0">
+            <a:pPr marL="0" indent="0">
               <a:buNone/>
             </a:pPr>
             <a:r>
@@ -3008,14 +2780,14 @@
       </p:sp>
       <p:pic>
         <p:nvPicPr>
-          <p:cNvPr id="5" name="Feature icon 1" descr="Feature icon 1">    </p:cNvPr>
+          <p:cNvPr id="5" name="Feature icon 1" descr="Feature icon 1"/>
           <p:cNvPicPr>
             <a:picLocks noChangeAspect="1"/>
           </p:cNvPicPr>
           <p:nvPr/>
         </p:nvPicPr>
         <p:blipFill>
-          <a:blip r:embed="rId1"/>
+          <a:blip r:embed="rId3"/>
           <a:stretch>
             <a:fillRect/>
           </a:stretch>
@@ -3051,7 +2823,7 @@
           <a:bodyPr wrap="square" lIns="0" tIns="0" rIns="0" bIns="0" rtlCol="0" anchor="ctr"/>
           <a:lstStyle/>
           <a:p>
-            <a:pPr indent="0" marL="0">
+            <a:pPr marL="0" indent="0">
               <a:buNone/>
             </a:pPr>
             <a:r>
@@ -3093,14 +2865,14 @@
       </p:sp>
       <p:pic>
         <p:nvPicPr>
-          <p:cNvPr id="8" name="Feature icon 2" descr="Feature icon 2">    </p:cNvPr>
+          <p:cNvPr id="8" name="Feature icon 2" descr="Feature icon 2"/>
           <p:cNvPicPr>
             <a:picLocks noChangeAspect="1"/>
           </p:cNvPicPr>
           <p:nvPr/>
         </p:nvPicPr>
         <p:blipFill>
-          <a:blip r:embed="rId2"/>
+          <a:blip r:embed="rId4"/>
           <a:stretch>
             <a:fillRect/>
           </a:stretch>
@@ -3136,7 +2908,7 @@
           <a:bodyPr wrap="square" lIns="0" tIns="0" rIns="0" bIns="0" rtlCol="0" anchor="ctr"/>
           <a:lstStyle/>
           <a:p>
-            <a:pPr indent="0" marL="0">
+            <a:pPr marL="0" indent="0">
               <a:buNone/>
             </a:pPr>
             <a:r>
@@ -3178,14 +2950,14 @@
       </p:sp>
       <p:pic>
         <p:nvPicPr>
-          <p:cNvPr id="11" name="Feature icon 3" descr="Feature icon 3">    </p:cNvPr>
+          <p:cNvPr id="11" name="Feature icon 3" descr="Feature icon 3"/>
           <p:cNvPicPr>
             <a:picLocks noChangeAspect="1"/>
           </p:cNvPicPr>
           <p:nvPr/>
         </p:nvPicPr>
         <p:blipFill>
-          <a:blip r:embed="rId3"/>
+          <a:blip r:embed="rId5"/>
           <a:stretch>
             <a:fillRect/>
           </a:stretch>
@@ -3221,7 +2993,7 @@
           <a:bodyPr wrap="square" lIns="0" tIns="0" rIns="0" bIns="0" rtlCol="0" anchor="ctr"/>
           <a:lstStyle/>
           <a:p>
-            <a:pPr indent="0" marL="0">
+            <a:pPr marL="0" indent="0">
               <a:buNone/>
             </a:pPr>
             <a:r>
@@ -3263,14 +3035,14 @@
       </p:sp>
       <p:pic>
         <p:nvPicPr>
-          <p:cNvPr id="14" name="Feature icon 4" descr="Feature icon 4">    </p:cNvPr>
+          <p:cNvPr id="14" name="Feature icon 4" descr="Feature icon 4"/>
           <p:cNvPicPr>
             <a:picLocks noChangeAspect="1"/>
           </p:cNvPicPr>
           <p:nvPr/>
         </p:nvPicPr>
         <p:blipFill>
-          <a:blip r:embed="rId4"/>
+          <a:blip r:embed="rId6"/>
           <a:stretch>
             <a:fillRect/>
           </a:stretch>
@@ -3306,7 +3078,7 @@
           <a:bodyPr wrap="square" lIns="0" tIns="0" rIns="0" bIns="0" rtlCol="0" anchor="ctr"/>
           <a:lstStyle/>
           <a:p>
-            <a:pPr indent="0" marL="0">
+            <a:pPr marL="0" indent="0">
               <a:buNone/>
             </a:pPr>
             <a:r>
@@ -3348,14 +3120,14 @@
       </p:sp>
       <p:pic>
         <p:nvPicPr>
-          <p:cNvPr id="17" name="Feature icon 5" descr="Feature icon 5">    </p:cNvPr>
+          <p:cNvPr id="17" name="Feature icon 5" descr="Feature icon 5"/>
           <p:cNvPicPr>
             <a:picLocks noChangeAspect="1"/>
           </p:cNvPicPr>
           <p:nvPr/>
         </p:nvPicPr>
         <p:blipFill>
-          <a:blip r:embed="rId5"/>
+          <a:blip r:embed="rId7"/>
           <a:stretch>
             <a:fillRect/>
           </a:stretch>
@@ -3391,7 +3163,7 @@
           <a:bodyPr wrap="square" lIns="0" tIns="0" rIns="0" bIns="0" rtlCol="0" anchor="ctr"/>
           <a:lstStyle/>
           <a:p>
-            <a:pPr indent="0" marL="0">
+            <a:pPr marL="0" indent="0">
               <a:buNone/>
             </a:pPr>
             <a:r>
@@ -3454,7 +3226,7 @@
           <a:bodyPr wrap="square" lIns="0" tIns="0" rIns="0" bIns="0" rtlCol="0" anchor="ctr"/>
           <a:lstStyle/>
           <a:p>
-            <a:pPr indent="0" marL="0">
+            <a:pPr marL="0" indent="0">
               <a:buNone/>
             </a:pPr>
             <a:r>
@@ -3471,14 +3243,14 @@
       </p:sp>
       <p:pic>
         <p:nvPicPr>
-          <p:cNvPr id="21" name="Hall room render" descr="The grand hall of the game with characters, rendered from our map files">    </p:cNvPr>
+          <p:cNvPr id="21" name="Hall room render" descr="The grand hall of the game with characters, rendered from our map files"/>
           <p:cNvPicPr>
             <a:picLocks noChangeAspect="1"/>
           </p:cNvPicPr>
           <p:nvPr/>
         </p:nvPicPr>
         <p:blipFill>
-          <a:blip r:embed="rId6"/>
+          <a:blip r:embed="rId8"/>
           <a:stretch>
             <a:fillRect/>
           </a:stretch>
@@ -3495,14 +3267,14 @@
       </p:pic>
       <p:pic>
         <p:nvPicPr>
-          <p:cNvPr id="22" name="Library room render" descr="The library of the game, rendered from our map files">    </p:cNvPr>
+          <p:cNvPr id="22" name="Library room render" descr="The library of the game, rendered from our map files"/>
           <p:cNvPicPr>
             <a:picLocks noChangeAspect="1"/>
           </p:cNvPicPr>
           <p:nvPr/>
         </p:nvPicPr>
         <p:blipFill>
-          <a:blip r:embed="rId7"/>
+          <a:blip r:embed="rId9"/>
           <a:stretch>
             <a:fillRect/>
           </a:stretch>
@@ -3538,7 +3310,7 @@
           <a:bodyPr wrap="square" lIns="0" tIns="0" rIns="0" bIns="0" rtlCol="0" anchor="ctr"/>
           <a:lstStyle/>
           <a:p>
-            <a:pPr indent="0" marL="0">
+            <a:pPr marL="0" indent="0">
               <a:buNone/>
             </a:pPr>
             <a:r>
@@ -3574,7 +3346,7 @@
           <a:bodyPr wrap="square" lIns="0" tIns="0" rIns="0" bIns="0" rtlCol="0" anchor="t"/>
           <a:lstStyle/>
           <a:p>
-            <a:pPr indent="0" marL="0">
+            <a:pPr marL="0" indent="0">
               <a:buNone/>
             </a:pPr>
             <a:r>
@@ -3609,7 +3381,7 @@
           </a:prstGeom>
           <a:extLst>
             <a:ext uri="{C572A759-6A51-4108-AA02-DFA0A04FC94B}">
-              <ma14:wrappingTextBoxFlag xmlns:ma14="http://schemas.microsoft.com/office/mac/drawingml/2011/main" val="0"/>
+              <ma14:wrappingTextBoxFlag xmlns:ma14="http://schemas.microsoft.com/office/mac/drawingml/2011/main" xmlns="" val="0"/>
             </a:ext>
           </a:extLst>
         </p:spPr>
@@ -3627,7 +3399,7 @@
           <a:p>
             <a:pPr algn="r"/>
             <a:fld id="{F7021451-1387-4CA6-816F-3879F97B5CBC}" type="slidenum">
-              <a:rPr b="0" lang="en-US"/>
+              <a:rPr lang="en-US" b="0"/>
               <a:t>10</a:t>
             </a:fld>
             <a:endParaRPr lang="en-US"/>
@@ -3662,9 +3434,11 @@
       <p:sp>
         <p:nvSpPr>
           <p:cNvPr id="2" name="Text 3"/>
-          <p:cNvSpPr/>
+          <p:cNvSpPr>
+            <a:spLocks noGrp="1"/>
+          </p:cNvSpPr>
           <p:nvPr>
-            <p:ph idx="104" type="title" hasCustomPrompt="1"/>
+            <p:ph type="title" idx="104" hasCustomPrompt="1"/>
           </p:nvPr>
         </p:nvSpPr>
         <p:spPr>
@@ -3682,7 +3456,7 @@
           <a:bodyPr wrap="square" lIns="0" tIns="0" rIns="0" bIns="0" rtlCol="0" anchor="ctr"/>
           <a:lstStyle/>
           <a:p>
-            <a:pPr algn="l" indent="0" marL="0">
+            <a:pPr marL="0" indent="0" algn="l">
               <a:buNone/>
             </a:pPr>
             <a:r>
@@ -3713,17 +3487,41 @@
         </p:nvGraphicFramePr>
         <p:xfrm>
           <a:off x="548640" y="1417320"/>
-          <a:ext cx="11091672" cy="914400"/>
+          <a:ext cx="11091672" cy="3566160"/>
         </p:xfrm>
         <a:graphic>
           <a:graphicData uri="http://schemas.openxmlformats.org/drawingml/2006/table">
             <a:tbl>
               <a:tblPr/>
               <a:tblGrid>
-                <a:gridCol w="2377440"/>
-                <a:gridCol w="3931920"/>
-                <a:gridCol w="3566160"/>
-                <a:gridCol w="1216152"/>
+                <a:gridCol w="2377440">
+                  <a:extLst>
+                    <a:ext uri="{9D8B030D-6E8A-4147-A177-3AD203B41FA5}">
+                      <a16:colId xmlns:a16="http://schemas.microsoft.com/office/drawing/2014/main" val="20000"/>
+                    </a:ext>
+                  </a:extLst>
+                </a:gridCol>
+                <a:gridCol w="3931920">
+                  <a:extLst>
+                    <a:ext uri="{9D8B030D-6E8A-4147-A177-3AD203B41FA5}">
+                      <a16:colId xmlns:a16="http://schemas.microsoft.com/office/drawing/2014/main" val="20001"/>
+                    </a:ext>
+                  </a:extLst>
+                </a:gridCol>
+                <a:gridCol w="3566160">
+                  <a:extLst>
+                    <a:ext uri="{9D8B030D-6E8A-4147-A177-3AD203B41FA5}">
+                      <a16:colId xmlns:a16="http://schemas.microsoft.com/office/drawing/2014/main" val="20002"/>
+                    </a:ext>
+                  </a:extLst>
+                </a:gridCol>
+                <a:gridCol w="1216152">
+                  <a:extLst>
+                    <a:ext uri="{9D8B030D-6E8A-4147-A177-3AD203B41FA5}">
+                      <a16:colId xmlns:a16="http://schemas.microsoft.com/office/drawing/2014/main" val="20003"/>
+                    </a:ext>
+                  </a:extLst>
+                </a:gridCol>
               </a:tblGrid>
               <a:tr h="411480">
                 <a:tc>
@@ -3731,7 +3529,7 @@
                     <a:bodyPr/>
                     <a:lstStyle/>
                     <a:p>
-                      <a:pPr indent="0" marL="0">
+                      <a:pPr marL="0" indent="0">
                         <a:buNone/>
                       </a:pPr>
                       <a:r>
@@ -3745,7 +3543,7 @@
                       <a:endParaRPr lang="en-US" sz="1400" dirty="0"/>
                     </a:p>
                   </a:txBody>
-                  <a:tcPr marL="91440" marR="91440" marT="45720" marB="45720" anchor="ctr">
+                  <a:tcPr anchor="ctr">
                     <a:lnL w="12700" cap="flat" cmpd="sng" algn="ctr">
                       <a:solidFill>
                         <a:srgbClr val="B9C7DA"/>
@@ -3792,7 +3590,7 @@
                     <a:bodyPr/>
                     <a:lstStyle/>
                     <a:p>
-                      <a:pPr indent="0" marL="0">
+                      <a:pPr marL="0" indent="0">
                         <a:buNone/>
                       </a:pPr>
                       <a:r>
@@ -3806,7 +3604,7 @@
                       <a:endParaRPr lang="en-US" sz="1400" dirty="0"/>
                     </a:p>
                   </a:txBody>
-                  <a:tcPr marL="91440" marR="91440" marT="45720" marB="45720" anchor="ctr">
+                  <a:tcPr anchor="ctr">
                     <a:lnL w="12700" cap="flat" cmpd="sng" algn="ctr">
                       <a:solidFill>
                         <a:srgbClr val="B9C7DA"/>
@@ -3853,7 +3651,7 @@
                     <a:bodyPr/>
                     <a:lstStyle/>
                     <a:p>
-                      <a:pPr indent="0" marL="0">
+                      <a:pPr marL="0" indent="0">
                         <a:buNone/>
                       </a:pPr>
                       <a:r>
@@ -3867,7 +3665,7 @@
                       <a:endParaRPr lang="en-US" sz="1400" dirty="0"/>
                     </a:p>
                   </a:txBody>
-                  <a:tcPr marL="91440" marR="91440" marT="45720" marB="45720" anchor="ctr">
+                  <a:tcPr anchor="ctr">
                     <a:lnL w="12700" cap="flat" cmpd="sng" algn="ctr">
                       <a:solidFill>
                         <a:srgbClr val="B9C7DA"/>
@@ -3914,7 +3712,7 @@
                     <a:bodyPr/>
                     <a:lstStyle/>
                     <a:p>
-                      <a:pPr algn="ctr" indent="0" marL="0">
+                      <a:pPr marL="0" indent="0" algn="ctr">
                         <a:buNone/>
                       </a:pPr>
                       <a:r>
@@ -3928,7 +3726,7 @@
                       <a:endParaRPr lang="en-US" sz="1400" dirty="0"/>
                     </a:p>
                   </a:txBody>
-                  <a:tcPr marL="91440" marR="91440" marT="45720" marB="45720" anchor="ctr">
+                  <a:tcPr anchor="ctr">
                     <a:lnL w="12700" cap="flat" cmpd="sng" algn="ctr">
                       <a:solidFill>
                         <a:srgbClr val="B9C7DA"/>
@@ -3970,6 +3768,11 @@
                     </a:solidFill>
                   </a:tcPr>
                 </a:tc>
+                <a:extLst>
+                  <a:ext uri="{0D108BD9-81ED-4DB2-BD59-A6C34878D82A}">
+                    <a16:rowId xmlns:a16="http://schemas.microsoft.com/office/drawing/2014/main" val="10000"/>
+                  </a:ext>
+                </a:extLst>
               </a:tr>
               <a:tr h="502920">
                 <a:tc>
@@ -3977,7 +3780,7 @@
                     <a:bodyPr/>
                     <a:lstStyle/>
                     <a:p>
-                      <a:pPr indent="0" marL="0">
+                      <a:pPr marL="0" indent="0">
                         <a:buNone/>
                       </a:pPr>
                       <a:r>
@@ -3991,7 +3794,7 @@
                       <a:endParaRPr lang="en-US" sz="1300" dirty="0"/>
                     </a:p>
                   </a:txBody>
-                  <a:tcPr marL="91440" marR="91440" marT="45720" marB="45720" anchor="ctr">
+                  <a:tcPr anchor="ctr">
                     <a:lnL w="12700" cap="flat" cmpd="sng" algn="ctr">
                       <a:solidFill>
                         <a:srgbClr val="B9C7DA"/>
@@ -4038,7 +3841,7 @@
                     <a:bodyPr/>
                     <a:lstStyle/>
                     <a:p>
-                      <a:pPr indent="0" marL="0">
+                      <a:pPr marL="0" indent="0">
                         <a:buNone/>
                       </a:pPr>
                       <a:r>
@@ -4052,7 +3855,7 @@
                       <a:endParaRPr lang="en-US" sz="1300" dirty="0"/>
                     </a:p>
                   </a:txBody>
-                  <a:tcPr marL="91440" marR="91440" marT="45720" marB="45720" anchor="ctr">
+                  <a:tcPr anchor="ctr">
                     <a:lnL w="12700" cap="flat" cmpd="sng" algn="ctr">
                       <a:solidFill>
                         <a:srgbClr val="B9C7DA"/>
@@ -4099,7 +3902,7 @@
                     <a:bodyPr/>
                     <a:lstStyle/>
                     <a:p>
-                      <a:pPr indent="0" marL="0">
+                      <a:pPr marL="0" indent="0">
                         <a:buNone/>
                       </a:pPr>
                       <a:r>
@@ -4113,7 +3916,7 @@
                       <a:endParaRPr lang="en-US" sz="1300" dirty="0"/>
                     </a:p>
                   </a:txBody>
-                  <a:tcPr marL="91440" marR="91440" marT="45720" marB="45720" anchor="ctr">
+                  <a:tcPr anchor="ctr">
                     <a:lnL w="12700" cap="flat" cmpd="sng" algn="ctr">
                       <a:solidFill>
                         <a:srgbClr val="B9C7DA"/>
@@ -4160,7 +3963,7 @@
                     <a:bodyPr/>
                     <a:lstStyle/>
                     <a:p>
-                      <a:pPr algn="ctr" indent="0" marL="0">
+                      <a:pPr marL="0" indent="0" algn="ctr">
                         <a:buNone/>
                       </a:pPr>
                       <a:r>
@@ -4174,7 +3977,7 @@
                       <a:endParaRPr lang="en-US" sz="1300" dirty="0"/>
                     </a:p>
                   </a:txBody>
-                  <a:tcPr marL="91440" marR="91440" marT="45720" marB="45720" anchor="ctr">
+                  <a:tcPr anchor="ctr">
                     <a:lnL w="12700" cap="flat" cmpd="sng" algn="ctr">
                       <a:solidFill>
                         <a:srgbClr val="B9C7DA"/>
@@ -4216,6 +4019,11 @@
                     </a:solidFill>
                   </a:tcPr>
                 </a:tc>
+                <a:extLst>
+                  <a:ext uri="{0D108BD9-81ED-4DB2-BD59-A6C34878D82A}">
+                    <a16:rowId xmlns:a16="http://schemas.microsoft.com/office/drawing/2014/main" val="10001"/>
+                  </a:ext>
+                </a:extLst>
               </a:tr>
               <a:tr h="594360">
                 <a:tc>
@@ -4223,7 +4031,7 @@
                     <a:bodyPr/>
                     <a:lstStyle/>
                     <a:p>
-                      <a:pPr indent="0" marL="0">
+                      <a:pPr marL="0" indent="0">
                         <a:buNone/>
                       </a:pPr>
                       <a:r>
@@ -4237,7 +4045,7 @@
                       <a:endParaRPr lang="en-US" sz="1300" dirty="0"/>
                     </a:p>
                   </a:txBody>
-                  <a:tcPr marL="91440" marR="91440" marT="45720" marB="45720" anchor="ctr">
+                  <a:tcPr anchor="ctr">
                     <a:lnL w="12700" cap="flat" cmpd="sng" algn="ctr">
                       <a:solidFill>
                         <a:srgbClr val="B9C7DA"/>
@@ -4284,7 +4092,7 @@
                     <a:bodyPr/>
                     <a:lstStyle/>
                     <a:p>
-                      <a:pPr indent="0" marL="0">
+                      <a:pPr marL="0" indent="0">
                         <a:buNone/>
                       </a:pPr>
                       <a:r>
@@ -4298,7 +4106,7 @@
                       <a:endParaRPr lang="en-US" sz="1300" dirty="0"/>
                     </a:p>
                   </a:txBody>
-                  <a:tcPr marL="91440" marR="91440" marT="45720" marB="45720" anchor="ctr">
+                  <a:tcPr anchor="ctr">
                     <a:lnL w="12700" cap="flat" cmpd="sng" algn="ctr">
                       <a:solidFill>
                         <a:srgbClr val="B9C7DA"/>
@@ -4345,7 +4153,7 @@
                     <a:bodyPr/>
                     <a:lstStyle/>
                     <a:p>
-                      <a:pPr indent="0" marL="0">
+                      <a:pPr marL="0" indent="0">
                         <a:buNone/>
                       </a:pPr>
                       <a:r>
@@ -4359,7 +4167,7 @@
                       <a:endParaRPr lang="en-US" sz="1300" dirty="0"/>
                     </a:p>
                   </a:txBody>
-                  <a:tcPr marL="91440" marR="91440" marT="45720" marB="45720" anchor="ctr">
+                  <a:tcPr anchor="ctr">
                     <a:lnL w="12700" cap="flat" cmpd="sng" algn="ctr">
                       <a:solidFill>
                         <a:srgbClr val="B9C7DA"/>
@@ -4406,7 +4214,7 @@
                     <a:bodyPr/>
                     <a:lstStyle/>
                     <a:p>
-                      <a:pPr algn="ctr" indent="0" marL="0">
+                      <a:pPr marL="0" indent="0" algn="ctr">
                         <a:buNone/>
                       </a:pPr>
                       <a:r>
@@ -4420,7 +4228,7 @@
                       <a:endParaRPr lang="en-US" sz="1300" dirty="0"/>
                     </a:p>
                   </a:txBody>
-                  <a:tcPr marL="91440" marR="91440" marT="45720" marB="45720" anchor="ctr">
+                  <a:tcPr anchor="ctr">
                     <a:lnL w="12700" cap="flat" cmpd="sng" algn="ctr">
                       <a:solidFill>
                         <a:srgbClr val="B9C7DA"/>
@@ -4462,6 +4270,11 @@
                     </a:solidFill>
                   </a:tcPr>
                 </a:tc>
+                <a:extLst>
+                  <a:ext uri="{0D108BD9-81ED-4DB2-BD59-A6C34878D82A}">
+                    <a16:rowId xmlns:a16="http://schemas.microsoft.com/office/drawing/2014/main" val="10002"/>
+                  </a:ext>
+                </a:extLst>
               </a:tr>
               <a:tr h="548640">
                 <a:tc>
@@ -4469,7 +4282,7 @@
                     <a:bodyPr/>
                     <a:lstStyle/>
                     <a:p>
-                      <a:pPr indent="0" marL="0">
+                      <a:pPr marL="0" indent="0">
                         <a:buNone/>
                       </a:pPr>
                       <a:r>
@@ -4483,7 +4296,7 @@
                       <a:endParaRPr lang="en-US" sz="1300" dirty="0"/>
                     </a:p>
                   </a:txBody>
-                  <a:tcPr marL="91440" marR="91440" marT="45720" marB="45720" anchor="ctr">
+                  <a:tcPr anchor="ctr">
                     <a:lnL w="12700" cap="flat" cmpd="sng" algn="ctr">
                       <a:solidFill>
                         <a:srgbClr val="B9C7DA"/>
@@ -4530,7 +4343,7 @@
                     <a:bodyPr/>
                     <a:lstStyle/>
                     <a:p>
-                      <a:pPr indent="0" marL="0">
+                      <a:pPr marL="0" indent="0">
                         <a:buNone/>
                       </a:pPr>
                       <a:r>
@@ -4544,7 +4357,7 @@
                       <a:endParaRPr lang="en-US" sz="1300" dirty="0"/>
                     </a:p>
                   </a:txBody>
-                  <a:tcPr marL="91440" marR="91440" marT="45720" marB="45720" anchor="ctr">
+                  <a:tcPr anchor="ctr">
                     <a:lnL w="12700" cap="flat" cmpd="sng" algn="ctr">
                       <a:solidFill>
                         <a:srgbClr val="B9C7DA"/>
@@ -4591,7 +4404,7 @@
                     <a:bodyPr/>
                     <a:lstStyle/>
                     <a:p>
-                      <a:pPr indent="0" marL="0">
+                      <a:pPr marL="0" indent="0">
                         <a:buNone/>
                       </a:pPr>
                       <a:r>
@@ -4605,7 +4418,7 @@
                       <a:endParaRPr lang="en-US" sz="1300" dirty="0"/>
                     </a:p>
                   </a:txBody>
-                  <a:tcPr marL="91440" marR="91440" marT="45720" marB="45720" anchor="ctr">
+                  <a:tcPr anchor="ctr">
                     <a:lnL w="12700" cap="flat" cmpd="sng" algn="ctr">
                       <a:solidFill>
                         <a:srgbClr val="B9C7DA"/>
@@ -4652,7 +4465,7 @@
                     <a:bodyPr/>
                     <a:lstStyle/>
                     <a:p>
-                      <a:pPr algn="ctr" indent="0" marL="0">
+                      <a:pPr marL="0" indent="0" algn="ctr">
                         <a:buNone/>
                       </a:pPr>
                       <a:r>
@@ -4666,7 +4479,7 @@
                       <a:endParaRPr lang="en-US" sz="1300" dirty="0"/>
                     </a:p>
                   </a:txBody>
-                  <a:tcPr marL="91440" marR="91440" marT="45720" marB="45720" anchor="ctr">
+                  <a:tcPr anchor="ctr">
                     <a:lnL w="12700" cap="flat" cmpd="sng" algn="ctr">
                       <a:solidFill>
                         <a:srgbClr val="B9C7DA"/>
@@ -4708,6 +4521,11 @@
                     </a:solidFill>
                   </a:tcPr>
                 </a:tc>
+                <a:extLst>
+                  <a:ext uri="{0D108BD9-81ED-4DB2-BD59-A6C34878D82A}">
+                    <a16:rowId xmlns:a16="http://schemas.microsoft.com/office/drawing/2014/main" val="10003"/>
+                  </a:ext>
+                </a:extLst>
               </a:tr>
               <a:tr h="502920">
                 <a:tc>
@@ -4715,7 +4533,7 @@
                     <a:bodyPr/>
                     <a:lstStyle/>
                     <a:p>
-                      <a:pPr indent="0" marL="0">
+                      <a:pPr marL="0" indent="0">
                         <a:buNone/>
                       </a:pPr>
                       <a:r>
@@ -4729,7 +4547,7 @@
                       <a:endParaRPr lang="en-US" sz="1300" dirty="0"/>
                     </a:p>
                   </a:txBody>
-                  <a:tcPr marL="91440" marR="91440" marT="45720" marB="45720" anchor="ctr">
+                  <a:tcPr anchor="ctr">
                     <a:lnL w="12700" cap="flat" cmpd="sng" algn="ctr">
                       <a:solidFill>
                         <a:srgbClr val="B9C7DA"/>
@@ -4776,7 +4594,7 @@
                     <a:bodyPr/>
                     <a:lstStyle/>
                     <a:p>
-                      <a:pPr indent="0" marL="0">
+                      <a:pPr marL="0" indent="0">
                         <a:buNone/>
                       </a:pPr>
                       <a:r>
@@ -4790,7 +4608,7 @@
                       <a:endParaRPr lang="en-US" sz="1300" dirty="0"/>
                     </a:p>
                   </a:txBody>
-                  <a:tcPr marL="91440" marR="91440" marT="45720" marB="45720" anchor="ctr">
+                  <a:tcPr anchor="ctr">
                     <a:lnL w="12700" cap="flat" cmpd="sng" algn="ctr">
                       <a:solidFill>
                         <a:srgbClr val="B9C7DA"/>
@@ -4837,7 +4655,7 @@
                     <a:bodyPr/>
                     <a:lstStyle/>
                     <a:p>
-                      <a:pPr indent="0" marL="0">
+                      <a:pPr marL="0" indent="0">
                         <a:buNone/>
                       </a:pPr>
                       <a:r>
@@ -4851,7 +4669,7 @@
                       <a:endParaRPr lang="en-US" sz="1300" dirty="0"/>
                     </a:p>
                   </a:txBody>
-                  <a:tcPr marL="91440" marR="91440" marT="45720" marB="45720" anchor="ctr">
+                  <a:tcPr anchor="ctr">
                     <a:lnL w="12700" cap="flat" cmpd="sng" algn="ctr">
                       <a:solidFill>
                         <a:srgbClr val="B9C7DA"/>
@@ -4898,7 +4716,7 @@
                     <a:bodyPr/>
                     <a:lstStyle/>
                     <a:p>
-                      <a:pPr algn="ctr" indent="0" marL="0">
+                      <a:pPr marL="0" indent="0" algn="ctr">
                         <a:buNone/>
                       </a:pPr>
                       <a:r>
@@ -4912,7 +4730,7 @@
                       <a:endParaRPr lang="en-US" sz="1300" dirty="0"/>
                     </a:p>
                   </a:txBody>
-                  <a:tcPr marL="91440" marR="91440" marT="45720" marB="45720" anchor="ctr">
+                  <a:tcPr anchor="ctr">
                     <a:lnL w="12700" cap="flat" cmpd="sng" algn="ctr">
                       <a:solidFill>
                         <a:srgbClr val="B9C7DA"/>
@@ -4954,6 +4772,11 @@
                     </a:solidFill>
                   </a:tcPr>
                 </a:tc>
+                <a:extLst>
+                  <a:ext uri="{0D108BD9-81ED-4DB2-BD59-A6C34878D82A}">
+                    <a16:rowId xmlns:a16="http://schemas.microsoft.com/office/drawing/2014/main" val="10004"/>
+                  </a:ext>
+                </a:extLst>
               </a:tr>
               <a:tr h="502920">
                 <a:tc>
@@ -4961,7 +4784,7 @@
                     <a:bodyPr/>
                     <a:lstStyle/>
                     <a:p>
-                      <a:pPr indent="0" marL="0">
+                      <a:pPr marL="0" indent="0">
                         <a:buNone/>
                       </a:pPr>
                       <a:r>
@@ -4975,7 +4798,7 @@
                       <a:endParaRPr lang="en-US" sz="1300" dirty="0"/>
                     </a:p>
                   </a:txBody>
-                  <a:tcPr marL="91440" marR="91440" marT="45720" marB="45720" anchor="ctr">
+                  <a:tcPr anchor="ctr">
                     <a:lnL w="12700" cap="flat" cmpd="sng" algn="ctr">
                       <a:solidFill>
                         <a:srgbClr val="B9C7DA"/>
@@ -5022,7 +4845,7 @@
                     <a:bodyPr/>
                     <a:lstStyle/>
                     <a:p>
-                      <a:pPr indent="0" marL="0">
+                      <a:pPr marL="0" indent="0">
                         <a:buNone/>
                       </a:pPr>
                       <a:r>
@@ -5036,7 +4859,7 @@
                       <a:endParaRPr lang="en-US" sz="1300" dirty="0"/>
                     </a:p>
                   </a:txBody>
-                  <a:tcPr marL="91440" marR="91440" marT="45720" marB="45720" anchor="ctr">
+                  <a:tcPr anchor="ctr">
                     <a:lnL w="12700" cap="flat" cmpd="sng" algn="ctr">
                       <a:solidFill>
                         <a:srgbClr val="B9C7DA"/>
@@ -5083,7 +4906,7 @@
                     <a:bodyPr/>
                     <a:lstStyle/>
                     <a:p>
-                      <a:pPr indent="0" marL="0">
+                      <a:pPr marL="0" indent="0">
                         <a:buNone/>
                       </a:pPr>
                       <a:r>
@@ -5097,7 +4920,7 @@
                       <a:endParaRPr lang="en-US" sz="1300" dirty="0"/>
                     </a:p>
                   </a:txBody>
-                  <a:tcPr marL="91440" marR="91440" marT="45720" marB="45720" anchor="ctr">
+                  <a:tcPr anchor="ctr">
                     <a:lnL w="12700" cap="flat" cmpd="sng" algn="ctr">
                       <a:solidFill>
                         <a:srgbClr val="B9C7DA"/>
@@ -5144,7 +4967,7 @@
                     <a:bodyPr/>
                     <a:lstStyle/>
                     <a:p>
-                      <a:pPr algn="ctr" indent="0" marL="0">
+                      <a:pPr marL="0" indent="0" algn="ctr">
                         <a:buNone/>
                       </a:pPr>
                       <a:r>
@@ -5158,7 +4981,7 @@
                       <a:endParaRPr lang="en-US" sz="1300" dirty="0"/>
                     </a:p>
                   </a:txBody>
-                  <a:tcPr marL="91440" marR="91440" marT="45720" marB="45720" anchor="ctr">
+                  <a:tcPr anchor="ctr">
                     <a:lnL w="12700" cap="flat" cmpd="sng" algn="ctr">
                       <a:solidFill>
                         <a:srgbClr val="B9C7DA"/>
@@ -5200,6 +5023,11 @@
                     </a:solidFill>
                   </a:tcPr>
                 </a:tc>
+                <a:extLst>
+                  <a:ext uri="{0D108BD9-81ED-4DB2-BD59-A6C34878D82A}">
+                    <a16:rowId xmlns:a16="http://schemas.microsoft.com/office/drawing/2014/main" val="10005"/>
+                  </a:ext>
+                </a:extLst>
               </a:tr>
               <a:tr h="502920">
                 <a:tc>
@@ -5207,7 +5035,7 @@
                     <a:bodyPr/>
                     <a:lstStyle/>
                     <a:p>
-                      <a:pPr indent="0" marL="0">
+                      <a:pPr marL="0" indent="0">
                         <a:buNone/>
                       </a:pPr>
                       <a:r>
@@ -5221,7 +5049,7 @@
                       <a:endParaRPr lang="en-US" sz="1300" dirty="0"/>
                     </a:p>
                   </a:txBody>
-                  <a:tcPr marL="91440" marR="91440" marT="45720" marB="45720" anchor="ctr">
+                  <a:tcPr anchor="ctr">
                     <a:lnL w="12700" cap="flat" cmpd="sng" algn="ctr">
                       <a:solidFill>
                         <a:srgbClr val="B9C7DA"/>
@@ -5268,7 +5096,7 @@
                     <a:bodyPr/>
                     <a:lstStyle/>
                     <a:p>
-                      <a:pPr indent="0" marL="0">
+                      <a:pPr marL="0" indent="0">
                         <a:buNone/>
                       </a:pPr>
                       <a:r>
@@ -5282,7 +5110,7 @@
                       <a:endParaRPr lang="en-US" sz="1300" dirty="0"/>
                     </a:p>
                   </a:txBody>
-                  <a:tcPr marL="91440" marR="91440" marT="45720" marB="45720" anchor="ctr">
+                  <a:tcPr anchor="ctr">
                     <a:lnL w="12700" cap="flat" cmpd="sng" algn="ctr">
                       <a:solidFill>
                         <a:srgbClr val="B9C7DA"/>
@@ -5329,7 +5157,7 @@
                     <a:bodyPr/>
                     <a:lstStyle/>
                     <a:p>
-                      <a:pPr indent="0" marL="0">
+                      <a:pPr marL="0" indent="0">
                         <a:buNone/>
                       </a:pPr>
                       <a:r>
@@ -5343,7 +5171,7 @@
                       <a:endParaRPr lang="en-US" sz="1300" dirty="0"/>
                     </a:p>
                   </a:txBody>
-                  <a:tcPr marL="91440" marR="91440" marT="45720" marB="45720" anchor="ctr">
+                  <a:tcPr anchor="ctr">
                     <a:lnL w="12700" cap="flat" cmpd="sng" algn="ctr">
                       <a:solidFill>
                         <a:srgbClr val="B9C7DA"/>
@@ -5390,7 +5218,7 @@
                     <a:bodyPr/>
                     <a:lstStyle/>
                     <a:p>
-                      <a:pPr algn="ctr" indent="0" marL="0">
+                      <a:pPr marL="0" indent="0" algn="ctr">
                         <a:buNone/>
                       </a:pPr>
                       <a:r>
@@ -5404,7 +5232,7 @@
                       <a:endParaRPr lang="en-US" sz="1300" dirty="0"/>
                     </a:p>
                   </a:txBody>
-                  <a:tcPr marL="91440" marR="91440" marT="45720" marB="45720" anchor="ctr">
+                  <a:tcPr anchor="ctr">
                     <a:lnL w="12700" cap="flat" cmpd="sng" algn="ctr">
                       <a:solidFill>
                         <a:srgbClr val="B9C7DA"/>
@@ -5446,6 +5274,11 @@
                     </a:solidFill>
                   </a:tcPr>
                 </a:tc>
+                <a:extLst>
+                  <a:ext uri="{0D108BD9-81ED-4DB2-BD59-A6C34878D82A}">
+                    <a16:rowId xmlns:a16="http://schemas.microsoft.com/office/drawing/2014/main" val="10006"/>
+                  </a:ext>
+                </a:extLst>
               </a:tr>
             </a:tbl>
           </a:graphicData>
@@ -5499,7 +5332,7 @@
           <a:bodyPr wrap="square" lIns="0" tIns="0" rIns="0" bIns="0" rtlCol="0" anchor="ctr"/>
           <a:lstStyle/>
           <a:p>
-            <a:pPr indent="0" marL="0">
+            <a:pPr marL="0" indent="0">
               <a:buNone/>
             </a:pPr>
             <a:r>
@@ -5535,7 +5368,7 @@
           <a:bodyPr wrap="square" lIns="0" tIns="0" rIns="0" bIns="0" rtlCol="0" anchor="t"/>
           <a:lstStyle/>
           <a:p>
-            <a:pPr indent="0" marL="0">
+            <a:pPr marL="0" indent="0">
               <a:buNone/>
             </a:pPr>
             <a:r>
@@ -5570,7 +5403,7 @@
           </a:prstGeom>
           <a:extLst>
             <a:ext uri="{C572A759-6A51-4108-AA02-DFA0A04FC94B}">
-              <ma14:wrappingTextBoxFlag xmlns:ma14="http://schemas.microsoft.com/office/mac/drawingml/2011/main" val="0"/>
+              <ma14:wrappingTextBoxFlag xmlns:ma14="http://schemas.microsoft.com/office/mac/drawingml/2011/main" xmlns="" val="0"/>
             </a:ext>
           </a:extLst>
         </p:spPr>
@@ -5588,7 +5421,7 @@
           <a:p>
             <a:pPr algn="r"/>
             <a:fld id="{F7021451-1387-4CA6-816F-3879F97B5CBC}" type="slidenum">
-              <a:rPr b="0" lang="en-US"/>
+              <a:rPr lang="en-US" b="0"/>
               <a:t>11</a:t>
             </a:fld>
             <a:endParaRPr lang="en-US"/>
@@ -5623,9 +5456,11 @@
       <p:sp>
         <p:nvSpPr>
           <p:cNvPr id="2" name="Text 3"/>
-          <p:cNvSpPr/>
+          <p:cNvSpPr>
+            <a:spLocks noGrp="1"/>
+          </p:cNvSpPr>
           <p:nvPr>
-            <p:ph idx="104" type="title" hasCustomPrompt="1"/>
+            <p:ph type="title" idx="104" hasCustomPrompt="1"/>
           </p:nvPr>
         </p:nvSpPr>
         <p:spPr>
@@ -5643,7 +5478,7 @@
           <a:bodyPr wrap="square" lIns="0" tIns="0" rIns="0" bIns="0" rtlCol="0" anchor="ctr"/>
           <a:lstStyle/>
           <a:p>
-            <a:pPr algn="l" indent="0" marL="0">
+            <a:pPr marL="0" indent="0" algn="l">
               <a:buNone/>
             </a:pPr>
             <a:r>
@@ -5706,7 +5541,7 @@
           <a:bodyPr wrap="square" lIns="0" tIns="0" rIns="0" bIns="0" rtlCol="0" anchor="ctr"/>
           <a:lstStyle/>
           <a:p>
-            <a:pPr indent="0" marL="0">
+            <a:pPr marL="0" indent="0">
               <a:buNone/>
             </a:pPr>
             <a:r>
@@ -5767,7 +5602,7 @@
           <a:bodyPr wrap="square" lIns="0" tIns="0" rIns="0" bIns="0" rtlCol="0" anchor="ctr"/>
           <a:lstStyle/>
           <a:p>
-            <a:pPr indent="0" marL="0">
+            <a:pPr marL="0" indent="0">
               <a:buNone/>
             </a:pPr>
             <a:r>
@@ -5803,7 +5638,7 @@
           <a:bodyPr wrap="square" lIns="0" tIns="0" rIns="0" bIns="0" rtlCol="0" anchor="ctr"/>
           <a:lstStyle/>
           <a:p>
-            <a:pPr indent="0" marL="0">
+            <a:pPr marL="0" indent="0">
               <a:buNone/>
             </a:pPr>
             <a:r>
@@ -5864,7 +5699,7 @@
           <a:bodyPr wrap="square" lIns="0" tIns="0" rIns="0" bIns="0" rtlCol="0" anchor="ctr"/>
           <a:lstStyle/>
           <a:p>
-            <a:pPr indent="0" marL="0">
+            <a:pPr marL="0" indent="0">
               <a:buNone/>
             </a:pPr>
             <a:r>
@@ -5900,7 +5735,7 @@
           <a:bodyPr wrap="square" lIns="0" tIns="0" rIns="0" bIns="0" rtlCol="0" anchor="ctr"/>
           <a:lstStyle/>
           <a:p>
-            <a:pPr indent="0" marL="0">
+            <a:pPr marL="0" indent="0">
               <a:buNone/>
             </a:pPr>
             <a:r>
@@ -5909,7 +5744,7 @@
                   <a:schemeClr val="accent2"/>
                 </a:solidFill>
               </a:rPr>
-              <a:t>[Updated? yes / no]</a:t>
+              <a:t>Updated -&gt; yes</a:t>
             </a:r>
             <a:endParaRPr lang="en-US" sz="1500" dirty="0"/>
           </a:p>
@@ -5961,7 +5796,7 @@
           <a:bodyPr wrap="square" lIns="0" tIns="0" rIns="0" bIns="0" rtlCol="0" anchor="ctr"/>
           <a:lstStyle/>
           <a:p>
-            <a:pPr indent="0" marL="0">
+            <a:pPr marL="0" indent="0">
               <a:buNone/>
             </a:pPr>
             <a:r>
@@ -5997,7 +5832,7 @@
           <a:bodyPr wrap="square" lIns="0" tIns="0" rIns="0" bIns="0" rtlCol="0" anchor="ctr"/>
           <a:lstStyle/>
           <a:p>
-            <a:pPr indent="0" marL="0">
+            <a:pPr marL="0" indent="0">
               <a:buNone/>
             </a:pPr>
             <a:r>
@@ -6006,7 +5841,24 @@
                   <a:schemeClr val="accent2"/>
                 </a:solidFill>
               </a:rPr>
-              <a:t>[All 3 members added?]</a:t>
+              <a:t>[All 3 members added? </a:t>
+            </a:r>
+            <a:r>
+              <a:rPr lang="en-US" sz="1500" b="1" i="1" dirty="0">
+                <a:solidFill>
+                  <a:schemeClr val="accent2"/>
+                </a:solidFill>
+                <a:sym typeface="Wingdings" panose="05000000000000000000" pitchFamily="2" charset="2"/>
+              </a:rPr>
+              <a:t></a:t>
+            </a:r>
+            <a:r>
+              <a:rPr lang="en-US" sz="1500" b="1" i="1" dirty="0">
+                <a:solidFill>
+                  <a:schemeClr val="accent2"/>
+                </a:solidFill>
+              </a:rPr>
+              <a:t>YES]</a:t>
             </a:r>
             <a:endParaRPr lang="en-US" sz="1500" dirty="0"/>
           </a:p>
@@ -6058,7 +5910,7 @@
           <a:bodyPr wrap="square" lIns="0" tIns="0" rIns="0" bIns="0" rtlCol="0" anchor="ctr"/>
           <a:lstStyle/>
           <a:p>
-            <a:pPr indent="0" marL="0">
+            <a:pPr marL="0" indent="0">
               <a:buNone/>
             </a:pPr>
             <a:r>
@@ -6094,7 +5946,7 @@
           <a:bodyPr wrap="square" lIns="0" tIns="0" rIns="0" bIns="0" rtlCol="0" anchor="ctr"/>
           <a:lstStyle/>
           <a:p>
-            <a:pPr indent="0" marL="0">
+            <a:pPr marL="0" indent="0">
               <a:buNone/>
             </a:pPr>
             <a:r>
@@ -6103,7 +5955,24 @@
                   <a:schemeClr val="accent2"/>
                 </a:solidFill>
               </a:rPr>
-              <a:t>[Latest code pushed?]</a:t>
+              <a:t>[Latest code pushed?</a:t>
+            </a:r>
+            <a:r>
+              <a:rPr lang="en-US" sz="1500" b="1" i="1" dirty="0">
+                <a:solidFill>
+                  <a:schemeClr val="accent2"/>
+                </a:solidFill>
+                <a:sym typeface="Wingdings" panose="05000000000000000000" pitchFamily="2" charset="2"/>
+              </a:rPr>
+              <a:t> YES</a:t>
+            </a:r>
+            <a:r>
+              <a:rPr lang="en-US" sz="1500" b="1" i="1" dirty="0">
+                <a:solidFill>
+                  <a:schemeClr val="accent2"/>
+                </a:solidFill>
+              </a:rPr>
+              <a:t>]</a:t>
             </a:r>
             <a:endParaRPr lang="en-US" sz="1500" dirty="0"/>
           </a:p>
@@ -6155,7 +6024,7 @@
           <a:bodyPr wrap="square" lIns="0" tIns="0" rIns="0" bIns="0" rtlCol="0" anchor="ctr"/>
           <a:lstStyle/>
           <a:p>
-            <a:pPr indent="0" marL="0">
+            <a:pPr marL="0" indent="0">
               <a:buNone/>
             </a:pPr>
             <a:r>
@@ -6191,7 +6060,7 @@
           <a:bodyPr wrap="square" lIns="0" tIns="0" rIns="0" bIns="0" rtlCol="0" anchor="ctr"/>
           <a:lstStyle/>
           <a:p>
-            <a:pPr indent="0" marL="0">
+            <a:pPr marL="0" indent="0">
               <a:buNone/>
             </a:pPr>
             <a:r>
@@ -6200,7 +6069,7 @@
                   <a:schemeClr val="accent2"/>
                 </a:solidFill>
               </a:rPr>
-              <a:t>[main / others]</a:t>
+              <a:t>[main (1)]</a:t>
             </a:r>
             <a:endParaRPr lang="en-US" sz="1500" dirty="0"/>
           </a:p>
@@ -6254,7 +6123,7 @@
           <a:bodyPr wrap="square" lIns="0" tIns="0" rIns="0" bIns="0" rtlCol="0" anchor="ctr"/>
           <a:lstStyle/>
           <a:p>
-            <a:pPr indent="0" marL="0">
+            <a:pPr marL="0" indent="0">
               <a:buNone/>
             </a:pPr>
             <a:r>
@@ -6315,7 +6184,7 @@
           <a:bodyPr wrap="square" lIns="0" tIns="0" rIns="0" bIns="0" rtlCol="0" anchor="ctr"/>
           <a:lstStyle/>
           <a:p>
-            <a:pPr indent="0" marL="0">
+            <a:pPr marL="0" indent="0">
               <a:buNone/>
             </a:pPr>
             <a:r>
@@ -6351,7 +6220,7 @@
           <a:bodyPr wrap="square" lIns="0" tIns="0" rIns="0" bIns="0" rtlCol="0" anchor="ctr"/>
           <a:lstStyle/>
           <a:p>
-            <a:pPr indent="0" marL="0">
+            <a:pPr marL="0" indent="0">
               <a:buNone/>
             </a:pPr>
             <a:r>
@@ -6360,7 +6229,7 @@
                   <a:schemeClr val="accent2"/>
                 </a:solidFill>
               </a:rPr>
-              <a:t>[number]</a:t>
+              <a:t>[35]</a:t>
             </a:r>
             <a:endParaRPr lang="en-US" sz="1500" dirty="0"/>
           </a:p>
@@ -6412,7 +6281,7 @@
           <a:bodyPr wrap="square" lIns="0" tIns="0" rIns="0" bIns="0" rtlCol="0" anchor="ctr"/>
           <a:lstStyle/>
           <a:p>
-            <a:pPr indent="0" marL="0">
+            <a:pPr marL="0" indent="0">
               <a:buNone/>
             </a:pPr>
             <a:r>
@@ -6436,7 +6305,7 @@
         <p:spPr>
           <a:xfrm>
             <a:off x="8769096" y="2807208"/>
-            <a:ext cx="2651760" cy="731520"/>
+            <a:ext cx="2651760" cy="841248"/>
           </a:xfrm>
           <a:prstGeom prst="rect">
             <a:avLst/>
@@ -6448,7 +6317,7 @@
           <a:bodyPr wrap="square" lIns="0" tIns="0" rIns="0" bIns="0" rtlCol="0" anchor="ctr"/>
           <a:lstStyle/>
           <a:p>
-            <a:pPr indent="0" marL="0">
+            <a:pPr marL="0" indent="0">
               <a:buNone/>
             </a:pPr>
             <a:r>
@@ -6457,7 +6326,33 @@
                   <a:schemeClr val="accent2"/>
                 </a:solidFill>
               </a:rPr>
-              <a:t>[each member, own account]</a:t>
+              <a:t>[@AshutoshBahuguna206  : 20 commits</a:t>
+            </a:r>
+          </a:p>
+          <a:p>
+            <a:pPr marL="0" indent="0">
+              <a:buNone/>
+            </a:pPr>
+            <a:r>
+              <a:rPr lang="en-US" sz="1500" b="1" i="1" dirty="0">
+                <a:solidFill>
+                  <a:schemeClr val="accent2"/>
+                </a:solidFill>
+              </a:rPr>
+              <a:t>@snehal1pun : 12 commits</a:t>
+            </a:r>
+          </a:p>
+          <a:p>
+            <a:pPr marL="0" indent="0">
+              <a:buNone/>
+            </a:pPr>
+            <a:r>
+              <a:rPr lang="en-US" sz="1500" b="1" i="1" dirty="0">
+                <a:solidFill>
+                  <a:schemeClr val="accent2"/>
+                </a:solidFill>
+              </a:rPr>
+              <a:t>@vidhisomraan-dot : 4 commits ]</a:t>
             </a:r>
             <a:endParaRPr lang="en-US" sz="1500" dirty="0"/>
           </a:p>
@@ -6509,7 +6404,7 @@
           <a:bodyPr wrap="square" lIns="0" tIns="0" rIns="0" bIns="0" rtlCol="0" anchor="ctr"/>
           <a:lstStyle/>
           <a:p>
-            <a:pPr indent="0" marL="0">
+            <a:pPr marL="0" indent="0">
               <a:buNone/>
             </a:pPr>
             <a:r>
@@ -6545,7 +6440,7 @@
           <a:bodyPr wrap="square" lIns="0" tIns="0" rIns="0" bIns="0" rtlCol="0" anchor="ctr"/>
           <a:lstStyle/>
           <a:p>
-            <a:pPr indent="0" marL="0">
+            <a:pPr marL="0" indent="0">
               <a:buNone/>
             </a:pPr>
             <a:r>
@@ -6554,7 +6449,7 @@
                   <a:schemeClr val="accent2"/>
                 </a:solidFill>
               </a:rPr>
-              <a:t>[date]</a:t>
+              <a:t>[22-10-2026]</a:t>
             </a:r>
             <a:endParaRPr lang="en-US" sz="1500" dirty="0"/>
           </a:p>
@@ -6606,7 +6501,7 @@
           <a:bodyPr wrap="square" lIns="0" tIns="0" rIns="0" bIns="0" rtlCol="0" anchor="ctr"/>
           <a:lstStyle/>
           <a:p>
-            <a:pPr indent="0" marL="0">
+            <a:pPr marL="0" indent="0">
               <a:buNone/>
             </a:pPr>
             <a:r>
@@ -6642,7 +6537,7 @@
           <a:bodyPr wrap="square" lIns="0" tIns="0" rIns="0" bIns="0" rtlCol="0" anchor="ctr"/>
           <a:lstStyle/>
           <a:p>
-            <a:pPr indent="0" marL="0">
+            <a:pPr marL="0" indent="0">
               <a:buNone/>
             </a:pPr>
             <a:r>
@@ -6651,7 +6546,7 @@
                   <a:schemeClr val="accent2"/>
                 </a:solidFill>
               </a:rPr>
-              <a:t>[README, report, notes]</a:t>
+              <a:t>[README.md, phase1, phase 2]</a:t>
             </a:r>
             <a:endParaRPr lang="en-US" sz="1500" dirty="0"/>
           </a:p>
@@ -6659,7 +6554,7 @@
       </p:sp>
       <p:sp>
         <p:nvSpPr>
-          <p:cNvPr id="25" name="Slide Number Placeholder 0"/>
+          <p:cNvPr id="34" name="Slide Number Placeholder 0"/>
           <p:cNvSpPr>
             <a:spLocks noGrp="1"/>
           </p:cNvSpPr>
@@ -6677,7 +6572,7 @@
           </a:prstGeom>
           <a:extLst>
             <a:ext uri="{C572A759-6A51-4108-AA02-DFA0A04FC94B}">
-              <ma14:wrappingTextBoxFlag xmlns:ma14="http://schemas.microsoft.com/office/mac/drawingml/2011/main" val="0"/>
+              <ma14:wrappingTextBoxFlag xmlns:ma14="http://schemas.microsoft.com/office/mac/drawingml/2011/main" xmlns="" val="0"/>
             </a:ext>
           </a:extLst>
         </p:spPr>
@@ -6695,7 +6590,7 @@
           <a:p>
             <a:pPr algn="r"/>
             <a:fld id="{F7021451-1387-4CA6-816F-3879F97B5CBC}" type="slidenum">
-              <a:rPr b="0" lang="en-US"/>
+              <a:rPr lang="en-US" b="0"/>
               <a:t>12</a:t>
             </a:fld>
             <a:endParaRPr lang="en-US"/>
@@ -6730,9 +6625,11 @@
       <p:sp>
         <p:nvSpPr>
           <p:cNvPr id="2" name="Text 3"/>
-          <p:cNvSpPr/>
+          <p:cNvSpPr>
+            <a:spLocks noGrp="1"/>
+          </p:cNvSpPr>
           <p:nvPr>
-            <p:ph idx="104" type="title" hasCustomPrompt="1"/>
+            <p:ph type="title" idx="104" hasCustomPrompt="1"/>
           </p:nvPr>
         </p:nvSpPr>
         <p:spPr>
@@ -6750,7 +6647,7 @@
           <a:bodyPr wrap="square" lIns="0" tIns="0" rIns="0" bIns="0" rtlCol="0" anchor="ctr"/>
           <a:lstStyle/>
           <a:p>
-            <a:pPr algn="l" indent="0" marL="0">
+            <a:pPr marL="0" indent="0" algn="l">
               <a:buNone/>
             </a:pPr>
             <a:r>
@@ -6774,24 +6671,48 @@
           <p:nvPr>
             <p:extLst>
               <p:ext uri="{D42A27DB-BD31-4B8C-83A1-F6EECF244321}">
-                <p14:modId xmlns:p14="http://schemas.microsoft.com/office/powerpoint/2010/main" val="1579011935"/>
+                <p14:modId xmlns:p14="http://schemas.microsoft.com/office/powerpoint/2010/main" val="713126398"/>
               </p:ext>
             </p:extLst>
           </p:nvPr>
         </p:nvGraphicFramePr>
         <p:xfrm>
           <a:off x="548640" y="1463040"/>
-          <a:ext cx="11091672" cy="914400"/>
+          <a:ext cx="11091672" cy="3279648"/>
         </p:xfrm>
         <a:graphic>
           <a:graphicData uri="http://schemas.openxmlformats.org/drawingml/2006/table">
             <a:tbl>
               <a:tblPr/>
               <a:tblGrid>
-                <a:gridCol w="2194560"/>
-                <a:gridCol w="1645920"/>
-                <a:gridCol w="6035040"/>
-                <a:gridCol w="1216152"/>
+                <a:gridCol w="2194560">
+                  <a:extLst>
+                    <a:ext uri="{9D8B030D-6E8A-4147-A177-3AD203B41FA5}">
+                      <a16:colId xmlns:a16="http://schemas.microsoft.com/office/drawing/2014/main" val="20000"/>
+                    </a:ext>
+                  </a:extLst>
+                </a:gridCol>
+                <a:gridCol w="1645920">
+                  <a:extLst>
+                    <a:ext uri="{9D8B030D-6E8A-4147-A177-3AD203B41FA5}">
+                      <a16:colId xmlns:a16="http://schemas.microsoft.com/office/drawing/2014/main" val="20001"/>
+                    </a:ext>
+                  </a:extLst>
+                </a:gridCol>
+                <a:gridCol w="6035040">
+                  <a:extLst>
+                    <a:ext uri="{9D8B030D-6E8A-4147-A177-3AD203B41FA5}">
+                      <a16:colId xmlns:a16="http://schemas.microsoft.com/office/drawing/2014/main" val="20002"/>
+                    </a:ext>
+                  </a:extLst>
+                </a:gridCol>
+                <a:gridCol w="1216152">
+                  <a:extLst>
+                    <a:ext uri="{9D8B030D-6E8A-4147-A177-3AD203B41FA5}">
+                      <a16:colId xmlns:a16="http://schemas.microsoft.com/office/drawing/2014/main" val="20003"/>
+                    </a:ext>
+                  </a:extLst>
+                </a:gridCol>
               </a:tblGrid>
               <a:tr h="457200">
                 <a:tc>
@@ -6799,7 +6720,7 @@
                     <a:bodyPr/>
                     <a:lstStyle/>
                     <a:p>
-                      <a:pPr indent="0" marL="0">
+                      <a:pPr marL="0" indent="0">
                         <a:buNone/>
                       </a:pPr>
                       <a:r>
@@ -6813,7 +6734,7 @@
                       <a:endParaRPr lang="en-US" sz="1400" dirty="0"/>
                     </a:p>
                   </a:txBody>
-                  <a:tcPr marL="91440" marR="91440" marT="54864" marB="54864" anchor="ctr">
+                  <a:tcPr marT="54864" marB="54864" anchor="ctr">
                     <a:lnL w="12700" cap="flat" cmpd="sng" algn="ctr">
                       <a:solidFill>
                         <a:srgbClr val="B9C7DA"/>
@@ -6860,7 +6781,7 @@
                     <a:bodyPr/>
                     <a:lstStyle/>
                     <a:p>
-                      <a:pPr indent="0" marL="0">
+                      <a:pPr marL="0" indent="0">
                         <a:buNone/>
                       </a:pPr>
                       <a:r>
@@ -6874,7 +6795,7 @@
                       <a:endParaRPr lang="en-US" sz="1400" dirty="0"/>
                     </a:p>
                   </a:txBody>
-                  <a:tcPr marL="91440" marR="91440" marT="54864" marB="54864" anchor="ctr">
+                  <a:tcPr marT="54864" marB="54864" anchor="ctr">
                     <a:lnL w="12700" cap="flat" cmpd="sng" algn="ctr">
                       <a:solidFill>
                         <a:srgbClr val="B9C7DA"/>
@@ -6921,7 +6842,7 @@
                     <a:bodyPr/>
                     <a:lstStyle/>
                     <a:p>
-                      <a:pPr indent="0" marL="0">
+                      <a:pPr marL="0" indent="0">
                         <a:buNone/>
                       </a:pPr>
                       <a:r>
@@ -6935,7 +6856,7 @@
                       <a:endParaRPr lang="en-US" sz="1400" dirty="0"/>
                     </a:p>
                   </a:txBody>
-                  <a:tcPr marL="91440" marR="91440" marT="54864" marB="54864" anchor="ctr">
+                  <a:tcPr marT="54864" marB="54864" anchor="ctr">
                     <a:lnL w="12700" cap="flat" cmpd="sng" algn="ctr">
                       <a:solidFill>
                         <a:srgbClr val="B9C7DA"/>
@@ -6982,7 +6903,7 @@
                     <a:bodyPr/>
                     <a:lstStyle/>
                     <a:p>
-                      <a:pPr algn="ctr" indent="0" marL="0">
+                      <a:pPr marL="0" indent="0" algn="ctr">
                         <a:buNone/>
                       </a:pPr>
                       <a:r>
@@ -6996,7 +6917,7 @@
                       <a:endParaRPr lang="en-US" sz="1400" dirty="0"/>
                     </a:p>
                   </a:txBody>
-                  <a:tcPr marL="91440" marR="91440" marT="54864" marB="54864" anchor="ctr">
+                  <a:tcPr marT="54864" marB="54864" anchor="ctr">
                     <a:lnL w="12700" cap="flat" cmpd="sng" algn="ctr">
                       <a:solidFill>
                         <a:srgbClr val="B9C7DA"/>
@@ -7038,6 +6959,11 @@
                     </a:solidFill>
                   </a:tcPr>
                 </a:tc>
+                <a:extLst>
+                  <a:ext uri="{0D108BD9-81ED-4DB2-BD59-A6C34878D82A}">
+                    <a16:rowId xmlns:a16="http://schemas.microsoft.com/office/drawing/2014/main" val="10000"/>
+                  </a:ext>
+                </a:extLst>
               </a:tr>
               <a:tr h="914400">
                 <a:tc>
@@ -7045,7 +6971,7 @@
                     <a:bodyPr/>
                     <a:lstStyle/>
                     <a:p>
-                      <a:pPr indent="0" marL="0">
+                      <a:pPr marL="0" indent="0">
                         <a:buNone/>
                       </a:pPr>
                       <a:r>
@@ -7059,7 +6985,7 @@
                       <a:endParaRPr lang="en-US" sz="1300" dirty="0"/>
                     </a:p>
                   </a:txBody>
-                  <a:tcPr marL="91440" marR="91440" marT="54864" marB="54864" anchor="ctr">
+                  <a:tcPr marT="54864" marB="54864" anchor="ctr">
                     <a:lnL w="12700" cap="flat" cmpd="sng" algn="ctr">
                       <a:solidFill>
                         <a:srgbClr val="B9C7DA"/>
@@ -7106,7 +7032,7 @@
                     <a:bodyPr/>
                     <a:lstStyle/>
                     <a:p>
-                      <a:pPr indent="0" marL="0">
+                      <a:pPr marL="0" indent="0">
                         <a:buNone/>
                       </a:pPr>
                       <a:r>
@@ -7120,7 +7046,7 @@
                       <a:endParaRPr lang="en-US" sz="1300" dirty="0"/>
                     </a:p>
                   </a:txBody>
-                  <a:tcPr marL="91440" marR="91440" marT="54864" marB="54864" anchor="ctr">
+                  <a:tcPr marT="54864" marB="54864" anchor="ctr">
                     <a:lnL w="12700" cap="flat" cmpd="sng" algn="ctr">
                       <a:solidFill>
                         <a:srgbClr val="B9C7DA"/>
@@ -7167,7 +7093,7 @@
                     <a:bodyPr/>
                     <a:lstStyle/>
                     <a:p>
-                      <a:pPr indent="0" marL="0">
+                      <a:pPr marL="0" indent="0">
                         <a:buNone/>
                       </a:pPr>
                       <a:r>
@@ -7181,7 +7107,7 @@
                       <a:endParaRPr lang="en-US" sz="1200" dirty="0"/>
                     </a:p>
                     <a:p>
-                      <a:pPr indent="0" marL="0">
+                      <a:pPr marL="0" indent="0">
                         <a:buNone/>
                       </a:pPr>
                       <a:r>
@@ -7195,7 +7121,7 @@
                       <a:endParaRPr lang="en-US" sz="1200" dirty="0"/>
                     </a:p>
                   </a:txBody>
-                  <a:tcPr marL="91440" marR="91440" marT="54864" marB="54864" anchor="ctr">
+                  <a:tcPr marT="54864" marB="54864" anchor="ctr">
                     <a:lnL w="12700" cap="flat" cmpd="sng" algn="ctr">
                       <a:solidFill>
                         <a:srgbClr val="B9C7DA"/>
@@ -7242,7 +7168,7 @@
                     <a:bodyPr/>
                     <a:lstStyle/>
                     <a:p>
-                      <a:pPr algn="ctr" indent="0" marL="0">
+                      <a:pPr marL="0" indent="0" algn="ctr">
                         <a:buNone/>
                       </a:pPr>
                       <a:r>
@@ -7251,12 +7177,12 @@
                             <a:srgbClr val="C8102E"/>
                           </a:solidFill>
                         </a:rPr>
-                        <a:t>[XX]</a:t>
+                        <a:t>20</a:t>
                       </a:r>
                       <a:endParaRPr lang="en-US" sz="1300" dirty="0"/>
                     </a:p>
                   </a:txBody>
-                  <a:tcPr marL="91440" marR="91440" marT="54864" marB="54864" anchor="ctr">
+                  <a:tcPr marT="54864" marB="54864" anchor="ctr">
                     <a:lnL w="12700" cap="flat" cmpd="sng" algn="ctr">
                       <a:solidFill>
                         <a:srgbClr val="B9C7DA"/>
@@ -7298,6 +7224,11 @@
                     </a:solidFill>
                   </a:tcPr>
                 </a:tc>
+                <a:extLst>
+                  <a:ext uri="{0D108BD9-81ED-4DB2-BD59-A6C34878D82A}">
+                    <a16:rowId xmlns:a16="http://schemas.microsoft.com/office/drawing/2014/main" val="10001"/>
+                  </a:ext>
+                </a:extLst>
               </a:tr>
               <a:tr h="914400">
                 <a:tc>
@@ -7305,7 +7236,7 @@
                     <a:bodyPr/>
                     <a:lstStyle/>
                     <a:p>
-                      <a:pPr indent="0" marL="0">
+                      <a:pPr marL="0" indent="0">
                         <a:buNone/>
                       </a:pPr>
                       <a:r>
@@ -7319,7 +7250,7 @@
                       <a:endParaRPr lang="en-US" sz="1300" dirty="0"/>
                     </a:p>
                   </a:txBody>
-                  <a:tcPr marL="91440" marR="91440" marT="54864" marB="54864" anchor="ctr">
+                  <a:tcPr marT="54864" marB="54864" anchor="ctr">
                     <a:lnL w="12700" cap="flat" cmpd="sng" algn="ctr">
                       <a:solidFill>
                         <a:srgbClr val="B9C7DA"/>
@@ -7366,7 +7297,7 @@
                     <a:bodyPr/>
                     <a:lstStyle/>
                     <a:p>
-                      <a:pPr indent="0" marL="0">
+                      <a:pPr marL="0" indent="0">
                         <a:buNone/>
                       </a:pPr>
                       <a:r>
@@ -7380,7 +7311,7 @@
                       <a:endParaRPr lang="en-US" sz="1300" dirty="0"/>
                     </a:p>
                   </a:txBody>
-                  <a:tcPr marL="91440" marR="91440" marT="54864" marB="54864" anchor="ctr">
+                  <a:tcPr marT="54864" marB="54864" anchor="ctr">
                     <a:lnL w="12700" cap="flat" cmpd="sng" algn="ctr">
                       <a:solidFill>
                         <a:srgbClr val="B9C7DA"/>
@@ -7427,7 +7358,7 @@
                     <a:bodyPr/>
                     <a:lstStyle/>
                     <a:p>
-                      <a:pPr indent="0" marL="0">
+                      <a:pPr marL="0" indent="0">
                         <a:buNone/>
                       </a:pPr>
                       <a:r>
@@ -7441,7 +7372,7 @@
                       <a:endParaRPr lang="en-US" sz="1200" dirty="0"/>
                     </a:p>
                     <a:p>
-                      <a:pPr indent="0" marL="0">
+                      <a:pPr marL="0" indent="0">
                         <a:buNone/>
                       </a:pPr>
                       <a:r>
@@ -7455,7 +7386,7 @@
                       <a:endParaRPr lang="en-US" sz="1200" dirty="0"/>
                     </a:p>
                   </a:txBody>
-                  <a:tcPr marL="91440" marR="91440" marT="54864" marB="54864" anchor="ctr">
+                  <a:tcPr marT="54864" marB="54864" anchor="ctr">
                     <a:lnL w="12700" cap="flat" cmpd="sng" algn="ctr">
                       <a:solidFill>
                         <a:srgbClr val="B9C7DA"/>
@@ -7502,7 +7433,7 @@
                     <a:bodyPr/>
                     <a:lstStyle/>
                     <a:p>
-                      <a:pPr algn="ctr" indent="0" marL="0">
+                      <a:pPr marL="0" indent="0" algn="ctr">
                         <a:buNone/>
                       </a:pPr>
                       <a:r>
@@ -7511,12 +7442,12 @@
                             <a:srgbClr val="C8102E"/>
                           </a:solidFill>
                         </a:rPr>
-                        <a:t>[XX]</a:t>
+                        <a:t>12</a:t>
                       </a:r>
                       <a:endParaRPr lang="en-US" sz="1300" dirty="0"/>
                     </a:p>
                   </a:txBody>
-                  <a:tcPr marL="91440" marR="91440" marT="54864" marB="54864" anchor="ctr">
+                  <a:tcPr marT="54864" marB="54864" anchor="ctr">
                     <a:lnL w="12700" cap="flat" cmpd="sng" algn="ctr">
                       <a:solidFill>
                         <a:srgbClr val="B9C7DA"/>
@@ -7558,6 +7489,11 @@
                     </a:solidFill>
                   </a:tcPr>
                 </a:tc>
+                <a:extLst>
+                  <a:ext uri="{0D108BD9-81ED-4DB2-BD59-A6C34878D82A}">
+                    <a16:rowId xmlns:a16="http://schemas.microsoft.com/office/drawing/2014/main" val="10002"/>
+                  </a:ext>
+                </a:extLst>
               </a:tr>
               <a:tr h="914400">
                 <a:tc>
@@ -7565,7 +7501,7 @@
                     <a:bodyPr/>
                     <a:lstStyle/>
                     <a:p>
-                      <a:pPr indent="0" marL="0">
+                      <a:pPr marL="0" indent="0">
                         <a:buNone/>
                       </a:pPr>
                       <a:r>
@@ -7579,7 +7515,7 @@
                       <a:endParaRPr lang="en-US" sz="1300" dirty="0"/>
                     </a:p>
                   </a:txBody>
-                  <a:tcPr marL="91440" marR="91440" marT="54864" marB="54864" anchor="ctr">
+                  <a:tcPr marT="54864" marB="54864" anchor="ctr">
                     <a:lnL w="12700" cap="flat" cmpd="sng" algn="ctr">
                       <a:solidFill>
                         <a:srgbClr val="B9C7DA"/>
@@ -7626,7 +7562,7 @@
                     <a:bodyPr/>
                     <a:lstStyle/>
                     <a:p>
-                      <a:pPr indent="0" marL="0">
+                      <a:pPr marL="0" indent="0">
                         <a:buNone/>
                       </a:pPr>
                       <a:r>
@@ -7640,7 +7576,7 @@
                       <a:endParaRPr lang="en-US" sz="1300" dirty="0"/>
                     </a:p>
                   </a:txBody>
-                  <a:tcPr marL="91440" marR="91440" marT="54864" marB="54864" anchor="ctr">
+                  <a:tcPr marT="54864" marB="54864" anchor="ctr">
                     <a:lnL w="12700" cap="flat" cmpd="sng" algn="ctr">
                       <a:solidFill>
                         <a:srgbClr val="B9C7DA"/>
@@ -7687,7 +7623,7 @@
                     <a:bodyPr/>
                     <a:lstStyle/>
                     <a:p>
-                      <a:pPr indent="0" marL="0">
+                      <a:pPr marL="0" indent="0">
                         <a:buNone/>
                       </a:pPr>
                       <a:r>
@@ -7701,7 +7637,7 @@
                       <a:endParaRPr lang="en-US" sz="1200" dirty="0"/>
                     </a:p>
                     <a:p>
-                      <a:pPr indent="0" marL="0">
+                      <a:pPr marL="0" indent="0">
                         <a:buNone/>
                       </a:pPr>
                       <a:r>
@@ -7715,7 +7651,7 @@
                       <a:endParaRPr lang="en-US" sz="1200" dirty="0"/>
                     </a:p>
                   </a:txBody>
-                  <a:tcPr marL="91440" marR="91440" marT="54864" marB="54864" anchor="ctr">
+                  <a:tcPr marT="54864" marB="54864" anchor="ctr">
                     <a:lnL w="12700" cap="flat" cmpd="sng" algn="ctr">
                       <a:solidFill>
                         <a:srgbClr val="B9C7DA"/>
@@ -7762,7 +7698,7 @@
                     <a:bodyPr/>
                     <a:lstStyle/>
                     <a:p>
-                      <a:pPr algn="ctr" indent="0" marL="0">
+                      <a:pPr marL="0" indent="0" algn="ctr">
                         <a:buNone/>
                       </a:pPr>
                       <a:r>
@@ -7771,12 +7707,12 @@
                             <a:srgbClr val="C8102E"/>
                           </a:solidFill>
                         </a:rPr>
-                        <a:t>[XX]</a:t>
+                        <a:t>4</a:t>
                       </a:r>
                       <a:endParaRPr lang="en-US" sz="1300" dirty="0"/>
                     </a:p>
                   </a:txBody>
-                  <a:tcPr marL="91440" marR="91440" marT="54864" marB="54864" anchor="ctr">
+                  <a:tcPr marT="54864" marB="54864" anchor="ctr">
                     <a:lnL w="12700" cap="flat" cmpd="sng" algn="ctr">
                       <a:solidFill>
                         <a:srgbClr val="B9C7DA"/>
@@ -7818,6 +7754,11 @@
                     </a:solidFill>
                   </a:tcPr>
                 </a:tc>
+                <a:extLst>
+                  <a:ext uri="{0D108BD9-81ED-4DB2-BD59-A6C34878D82A}">
+                    <a16:rowId xmlns:a16="http://schemas.microsoft.com/office/drawing/2014/main" val="10003"/>
+                  </a:ext>
+                </a:extLst>
               </a:tr>
             </a:tbl>
           </a:graphicData>
@@ -7871,7 +7812,7 @@
           <a:bodyPr wrap="square" lIns="0" tIns="0" rIns="0" bIns="0" rtlCol="0" anchor="ctr"/>
           <a:lstStyle/>
           <a:p>
-            <a:pPr indent="0" marL="0">
+            <a:pPr marL="0" indent="0">
               <a:buNone/>
             </a:pPr>
             <a:r>
@@ -7907,7 +7848,7 @@
           <a:bodyPr wrap="square" lIns="0" tIns="0" rIns="0" bIns="0" rtlCol="0" anchor="t"/>
           <a:lstStyle/>
           <a:p>
-            <a:pPr indent="0" marL="0">
+            <a:pPr marL="0" indent="0">
               <a:buNone/>
             </a:pPr>
             <a:r>
@@ -7942,7 +7883,7 @@
           </a:prstGeom>
           <a:extLst>
             <a:ext uri="{C572A759-6A51-4108-AA02-DFA0A04FC94B}">
-              <ma14:wrappingTextBoxFlag xmlns:ma14="http://schemas.microsoft.com/office/mac/drawingml/2011/main" val="0"/>
+              <ma14:wrappingTextBoxFlag xmlns:ma14="http://schemas.microsoft.com/office/mac/drawingml/2011/main" xmlns="" val="0"/>
             </a:ext>
           </a:extLst>
         </p:spPr>
@@ -7960,7 +7901,7 @@
           <a:p>
             <a:pPr algn="r"/>
             <a:fld id="{F7021451-1387-4CA6-816F-3879F97B5CBC}" type="slidenum">
-              <a:rPr b="0" lang="en-US"/>
+              <a:rPr lang="en-US" b="0"/>
               <a:t>13</a:t>
             </a:fld>
             <a:endParaRPr lang="en-US"/>
@@ -7995,9 +7936,11 @@
       <p:sp>
         <p:nvSpPr>
           <p:cNvPr id="2" name="Text 3"/>
-          <p:cNvSpPr/>
+          <p:cNvSpPr>
+            <a:spLocks noGrp="1"/>
+          </p:cNvSpPr>
           <p:nvPr>
-            <p:ph idx="104" type="title" hasCustomPrompt="1"/>
+            <p:ph type="title" idx="104" hasCustomPrompt="1"/>
           </p:nvPr>
         </p:nvSpPr>
         <p:spPr>
@@ -8015,7 +7958,7 @@
           <a:bodyPr wrap="square" lIns="0" tIns="0" rIns="0" bIns="0" rtlCol="0" anchor="ctr"/>
           <a:lstStyle/>
           <a:p>
-            <a:pPr algn="l" indent="0" marL="0">
+            <a:pPr marL="0" indent="0" algn="l">
               <a:buNone/>
             </a:pPr>
             <a:r>
@@ -8078,7 +8021,7 @@
           <a:bodyPr wrap="square" lIns="0" tIns="0" rIns="0" bIns="0" rtlCol="0" anchor="ctr"/>
           <a:lstStyle/>
           <a:p>
-            <a:pPr indent="0" marL="0">
+            <a:pPr marL="0" indent="0">
               <a:buNone/>
             </a:pPr>
             <a:r>
@@ -8235,7 +8178,7 @@
           <a:bodyPr wrap="square" lIns="0" tIns="0" rIns="0" bIns="0" rtlCol="0" anchor="ctr"/>
           <a:lstStyle/>
           <a:p>
-            <a:pPr indent="0" marL="0">
+            <a:pPr marL="0" indent="0">
               <a:buNone/>
             </a:pPr>
             <a:r>
@@ -8392,7 +8335,7 @@
           <a:bodyPr wrap="square" lIns="0" tIns="0" rIns="0" bIns="0" rtlCol="0" anchor="ctr"/>
           <a:lstStyle/>
           <a:p>
-            <a:pPr indent="0" marL="0">
+            <a:pPr marL="0" indent="0">
               <a:buNone/>
             </a:pPr>
             <a:r>
@@ -8434,7 +8377,7 @@
               </a:spcAft>
               <a:buSzPct val="100000"/>
               <a:buFont typeface="+mj-lt"/>
-              <a:buAutoNum type="arabicPeriod" startAt="1"/>
+              <a:buAutoNum type="arabicPeriod"/>
             </a:pPr>
             <a:r>
               <a:rPr lang="en-US" sz="1600" dirty="0">
@@ -8453,7 +8396,7 @@
               </a:spcAft>
               <a:buSzPct val="100000"/>
               <a:buFont typeface="+mj-lt"/>
-              <a:buAutoNum type="arabicPeriod" startAt="1"/>
+              <a:buAutoNum type="arabicPeriod"/>
             </a:pPr>
             <a:r>
               <a:rPr lang="en-US" sz="1600" dirty="0">
@@ -8472,7 +8415,7 @@
               </a:spcAft>
               <a:buSzPct val="100000"/>
               <a:buFont typeface="+mj-lt"/>
-              <a:buAutoNum type="arabicPeriod" startAt="1"/>
+              <a:buAutoNum type="arabicPeriod"/>
             </a:pPr>
             <a:r>
               <a:rPr lang="en-US" sz="1600" dirty="0">
@@ -8491,7 +8434,7 @@
               </a:spcAft>
               <a:buSzPct val="100000"/>
               <a:buFont typeface="+mj-lt"/>
-              <a:buAutoNum type="arabicPeriod" startAt="1"/>
+              <a:buAutoNum type="arabicPeriod"/>
             </a:pPr>
             <a:r>
               <a:rPr lang="en-US" sz="1600" dirty="0">
@@ -8510,7 +8453,7 @@
               </a:spcAft>
               <a:buSzPct val="100000"/>
               <a:buFont typeface="+mj-lt"/>
-              <a:buAutoNum type="arabicPeriod" startAt="1"/>
+              <a:buAutoNum type="arabicPeriod"/>
             </a:pPr>
             <a:r>
               <a:rPr lang="en-US" sz="1600" dirty="0">
@@ -8544,7 +8487,7 @@
           </a:prstGeom>
           <a:extLst>
             <a:ext uri="{C572A759-6A51-4108-AA02-DFA0A04FC94B}">
-              <ma14:wrappingTextBoxFlag xmlns:ma14="http://schemas.microsoft.com/office/mac/drawingml/2011/main" val="0"/>
+              <ma14:wrappingTextBoxFlag xmlns:ma14="http://schemas.microsoft.com/office/mac/drawingml/2011/main" xmlns="" val="0"/>
             </a:ext>
           </a:extLst>
         </p:spPr>
@@ -8562,7 +8505,7 @@
           <a:p>
             <a:pPr algn="r"/>
             <a:fld id="{F7021451-1387-4CA6-816F-3879F97B5CBC}" type="slidenum">
-              <a:rPr b="0" lang="en-US"/>
+              <a:rPr lang="en-US" b="0"/>
               <a:t>14</a:t>
             </a:fld>
             <a:endParaRPr lang="en-US"/>
@@ -8597,9 +8540,11 @@
       <p:sp>
         <p:nvSpPr>
           <p:cNvPr id="2" name="Text 3"/>
-          <p:cNvSpPr/>
+          <p:cNvSpPr>
+            <a:spLocks noGrp="1"/>
+          </p:cNvSpPr>
           <p:nvPr>
-            <p:ph idx="104" type="title" hasCustomPrompt="1"/>
+            <p:ph type="title" idx="104" hasCustomPrompt="1"/>
           </p:nvPr>
         </p:nvSpPr>
         <p:spPr>
@@ -8617,7 +8562,7 @@
           <a:bodyPr wrap="square" lIns="0" tIns="0" rIns="0" bIns="0" rtlCol="0" anchor="ctr"/>
           <a:lstStyle/>
           <a:p>
-            <a:pPr algn="l" indent="0" marL="0">
+            <a:pPr marL="0" indent="0" algn="l">
               <a:buNone/>
             </a:pPr>
             <a:r>
@@ -8653,7 +8598,7 @@
           <a:bodyPr wrap="square" lIns="0" tIns="0" rIns="0" bIns="0" rtlCol="0" anchor="ctr"/>
           <a:lstStyle/>
           <a:p>
-            <a:pPr indent="0" marL="0">
+            <a:pPr marL="0" indent="0">
               <a:buNone/>
             </a:pPr>
             <a:r>
@@ -8801,7 +8746,7 @@
           <a:bodyPr wrap="square" lIns="0" tIns="0" rIns="0" bIns="0" rtlCol="0" anchor="ctr"/>
           <a:lstStyle/>
           <a:p>
-            <a:pPr indent="0" marL="0">
+            <a:pPr marL="0" indent="0">
               <a:buNone/>
             </a:pPr>
             <a:r>
@@ -8843,7 +8788,7 @@
               </a:spcAft>
               <a:buSzPct val="100000"/>
               <a:buFont typeface="+mj-lt"/>
-              <a:buAutoNum type="arabicPeriod" startAt="1"/>
+              <a:buAutoNum type="arabicPeriod"/>
             </a:pPr>
             <a:r>
               <a:rPr lang="en-US" sz="1400" dirty="0">
@@ -8862,7 +8807,7 @@
               </a:spcAft>
               <a:buSzPct val="100000"/>
               <a:buFont typeface="+mj-lt"/>
-              <a:buAutoNum type="arabicPeriod" startAt="1"/>
+              <a:buAutoNum type="arabicPeriod"/>
             </a:pPr>
             <a:r>
               <a:rPr lang="en-US" sz="1400" dirty="0">
@@ -8881,7 +8826,7 @@
               </a:spcAft>
               <a:buSzPct val="100000"/>
               <a:buFont typeface="+mj-lt"/>
-              <a:buAutoNum type="arabicPeriod" startAt="1"/>
+              <a:buAutoNum type="arabicPeriod"/>
             </a:pPr>
             <a:r>
               <a:rPr lang="en-US" sz="1400" dirty="0">
@@ -8900,7 +8845,7 @@
               </a:spcAft>
               <a:buSzPct val="100000"/>
               <a:buFont typeface="+mj-lt"/>
-              <a:buAutoNum type="arabicPeriod" startAt="1"/>
+              <a:buAutoNum type="arabicPeriod"/>
             </a:pPr>
             <a:r>
               <a:rPr lang="en-US" sz="1400" dirty="0">
@@ -8919,7 +8864,7 @@
               </a:spcAft>
               <a:buSzPct val="100000"/>
               <a:buFont typeface="+mj-lt"/>
-              <a:buAutoNum type="arabicPeriod" startAt="1"/>
+              <a:buAutoNum type="arabicPeriod"/>
             </a:pPr>
             <a:r>
               <a:rPr lang="en-US" sz="1400" dirty="0">
@@ -8981,7 +8926,7 @@
           <a:bodyPr wrap="square" lIns="0" tIns="0" rIns="0" bIns="0" rtlCol="0" anchor="ctr"/>
           <a:lstStyle/>
           <a:p>
-            <a:pPr algn="ctr" indent="0" marL="0">
+            <a:pPr marL="0" indent="0" algn="ctr">
               <a:buNone/>
             </a:pPr>
             <a:r>
@@ -8995,7 +8940,7 @@
             <a:endParaRPr lang="en-US" sz="2800" dirty="0"/>
           </a:p>
           <a:p>
-            <a:pPr algn="ctr" indent="0" marL="0">
+            <a:pPr marL="0" indent="0" algn="ctr">
               <a:buNone/>
             </a:pPr>
             <a:r>
@@ -9030,7 +8975,7 @@
           </a:prstGeom>
           <a:extLst>
             <a:ext uri="{C572A759-6A51-4108-AA02-DFA0A04FC94B}">
-              <ma14:wrappingTextBoxFlag xmlns:ma14="http://schemas.microsoft.com/office/mac/drawingml/2011/main" val="0"/>
+              <ma14:wrappingTextBoxFlag xmlns:ma14="http://schemas.microsoft.com/office/mac/drawingml/2011/main" xmlns="" val="0"/>
             </a:ext>
           </a:extLst>
         </p:spPr>
@@ -9048,7 +8993,7 @@
           <a:p>
             <a:pPr algn="r"/>
             <a:fld id="{F7021451-1387-4CA6-816F-3879F97B5CBC}" type="slidenum">
-              <a:rPr b="0" lang="en-US"/>
+              <a:rPr lang="en-US" b="0"/>
               <a:t>15</a:t>
             </a:fld>
             <a:endParaRPr lang="en-US"/>
@@ -9083,9 +9028,11 @@
       <p:sp>
         <p:nvSpPr>
           <p:cNvPr id="2" name="Text 3"/>
-          <p:cNvSpPr/>
+          <p:cNvSpPr>
+            <a:spLocks noGrp="1"/>
+          </p:cNvSpPr>
           <p:nvPr>
-            <p:ph idx="104" type="title" hasCustomPrompt="1"/>
+            <p:ph type="title" idx="104" hasCustomPrompt="1"/>
           </p:nvPr>
         </p:nvSpPr>
         <p:spPr>
@@ -9103,7 +9050,7 @@
           <a:bodyPr wrap="square" lIns="0" tIns="0" rIns="0" bIns="0" rtlCol="0" anchor="ctr"/>
           <a:lstStyle/>
           <a:p>
-            <a:pPr algn="l" indent="0" marL="0">
+            <a:pPr marL="0" indent="0" algn="l">
               <a:buNone/>
             </a:pPr>
             <a:r>
@@ -9166,7 +9113,7 @@
           <a:bodyPr wrap="square" lIns="0" tIns="0" rIns="0" bIns="0" rtlCol="0" anchor="ctr"/>
           <a:lstStyle/>
           <a:p>
-            <a:pPr indent="0" marL="0">
+            <a:pPr marL="0" indent="0">
               <a:buNone/>
             </a:pPr>
             <a:r>
@@ -9202,7 +9149,7 @@
           <a:bodyPr wrap="square" lIns="0" tIns="0" rIns="0" bIns="0" rtlCol="0" anchor="ctr"/>
           <a:lstStyle/>
           <a:p>
-            <a:pPr indent="0" marL="0">
+            <a:pPr marL="0" indent="0">
               <a:buNone/>
             </a:pPr>
             <a:r>
@@ -9238,7 +9185,7 @@
           <a:bodyPr wrap="square" lIns="0" tIns="0" rIns="0" bIns="0" rtlCol="0" anchor="ctr"/>
           <a:lstStyle/>
           <a:p>
-            <a:pPr indent="0" marL="0">
+            <a:pPr marL="0" indent="0">
               <a:buNone/>
             </a:pPr>
             <a:r>
@@ -9274,7 +9221,7 @@
           <a:bodyPr wrap="square" lIns="0" tIns="0" rIns="0" bIns="0" rtlCol="0" anchor="ctr"/>
           <a:lstStyle/>
           <a:p>
-            <a:pPr indent="0" marL="0">
+            <a:pPr marL="0" indent="0">
               <a:buNone/>
             </a:pPr>
             <a:r>
@@ -9310,7 +9257,7 @@
           <a:bodyPr wrap="square" lIns="0" tIns="0" rIns="0" bIns="0" rtlCol="0" anchor="ctr"/>
           <a:lstStyle/>
           <a:p>
-            <a:pPr indent="0" marL="0">
+            <a:pPr marL="0" indent="0">
               <a:buNone/>
             </a:pPr>
             <a:r>
@@ -9346,7 +9293,7 @@
           <a:bodyPr wrap="square" lIns="0" tIns="0" rIns="0" bIns="0" rtlCol="0" anchor="ctr"/>
           <a:lstStyle/>
           <a:p>
-            <a:pPr indent="0" marL="0">
+            <a:pPr marL="0" indent="0">
               <a:buNone/>
             </a:pPr>
             <a:r>
@@ -9382,7 +9329,7 @@
           <a:bodyPr wrap="square" lIns="0" tIns="0" rIns="0" bIns="0" rtlCol="0" anchor="ctr"/>
           <a:lstStyle/>
           <a:p>
-            <a:pPr indent="0" marL="0">
+            <a:pPr marL="0" indent="0">
               <a:buNone/>
             </a:pPr>
             <a:r>
@@ -9418,7 +9365,7 @@
           <a:bodyPr wrap="square" lIns="0" tIns="0" rIns="0" bIns="0" rtlCol="0" anchor="ctr"/>
           <a:lstStyle/>
           <a:p>
-            <a:pPr indent="0" marL="0">
+            <a:pPr marL="0" indent="0">
               <a:buNone/>
             </a:pPr>
             <a:r>
@@ -9454,7 +9401,7 @@
           <a:bodyPr wrap="square" lIns="0" tIns="0" rIns="0" bIns="0" rtlCol="0" anchor="ctr"/>
           <a:lstStyle/>
           <a:p>
-            <a:pPr indent="0" marL="0">
+            <a:pPr marL="0" indent="0">
               <a:buNone/>
             </a:pPr>
             <a:r>
@@ -9490,7 +9437,7 @@
           <a:bodyPr wrap="square" lIns="0" tIns="0" rIns="0" bIns="0" rtlCol="0" anchor="ctr"/>
           <a:lstStyle/>
           <a:p>
-            <a:pPr indent="0" marL="0">
+            <a:pPr marL="0" indent="0">
               <a:buNone/>
             </a:pPr>
             <a:r>
@@ -9526,7 +9473,7 @@
           <a:bodyPr wrap="square" lIns="0" tIns="0" rIns="0" bIns="0" rtlCol="0" anchor="ctr"/>
           <a:lstStyle/>
           <a:p>
-            <a:pPr indent="0" marL="0">
+            <a:pPr marL="0" indent="0">
               <a:buNone/>
             </a:pPr>
             <a:r>
@@ -9589,7 +9536,7 @@
           <a:bodyPr wrap="square" lIns="0" tIns="0" rIns="0" bIns="0" rtlCol="0" anchor="ctr"/>
           <a:lstStyle/>
           <a:p>
-            <a:pPr indent="0" marL="0">
+            <a:pPr marL="0" indent="0">
               <a:buNone/>
             </a:pPr>
             <a:r>
@@ -9631,7 +9578,7 @@
               </a:spcAft>
               <a:buSzPct val="100000"/>
               <a:buFont typeface="+mj-lt"/>
-              <a:buAutoNum type="arabicPeriod" startAt="1"/>
+              <a:buAutoNum type="arabicPeriod"/>
             </a:pPr>
             <a:r>
               <a:rPr lang="en-US" sz="1700" dirty="0">
@@ -9650,7 +9597,7 @@
               </a:spcAft>
               <a:buSzPct val="100000"/>
               <a:buFont typeface="+mj-lt"/>
-              <a:buAutoNum type="arabicPeriod" startAt="1"/>
+              <a:buAutoNum type="arabicPeriod"/>
             </a:pPr>
             <a:r>
               <a:rPr lang="en-US" sz="1700" dirty="0">
@@ -9669,7 +9616,7 @@
               </a:spcAft>
               <a:buSzPct val="100000"/>
               <a:buFont typeface="+mj-lt"/>
-              <a:buAutoNum type="arabicPeriod" startAt="1"/>
+              <a:buAutoNum type="arabicPeriod"/>
             </a:pPr>
             <a:r>
               <a:rPr lang="en-US" sz="1700" dirty="0">
@@ -9731,7 +9678,7 @@
           <a:bodyPr wrap="square" lIns="0" tIns="0" rIns="0" bIns="0" rtlCol="0" anchor="ctr"/>
           <a:lstStyle/>
           <a:p>
-            <a:pPr indent="0" marL="0">
+            <a:pPr marL="0" indent="0">
               <a:buNone/>
             </a:pPr>
             <a:r>
@@ -9767,7 +9714,7 @@
           <a:bodyPr wrap="square" lIns="0" tIns="0" rIns="0" bIns="0" rtlCol="0" anchor="ctr"/>
           <a:lstStyle/>
           <a:p>
-            <a:pPr indent="0" marL="0">
+            <a:pPr marL="0" indent="0">
               <a:buNone/>
             </a:pPr>
             <a:r>
@@ -9803,7 +9750,7 @@
           <a:bodyPr wrap="square" lIns="0" tIns="0" rIns="0" bIns="0" rtlCol="0" anchor="ctr"/>
           <a:lstStyle/>
           <a:p>
-            <a:pPr algn="r" indent="0" marL="0">
+            <a:pPr marL="0" indent="0" algn="r">
               <a:buNone/>
             </a:pPr>
             <a:r>
@@ -9839,16 +9786,12 @@
           <a:bodyPr wrap="square" lIns="0" tIns="0" rIns="0" bIns="0" rtlCol="0" anchor="ctr"/>
           <a:lstStyle/>
           <a:p>
-            <a:pPr algn="l" indent="0" marL="0">
+            <a:pPr marL="0" indent="0" algn="l">
               <a:buNone/>
             </a:pPr>
             <a:r>
-              <a:rPr lang="en-US" sz="2000" b="1" dirty="0">
-                <a:solidFill>
-                  <a:schemeClr val="tx1"/>
-                </a:solidFill>
-              </a:rPr>
-              <a:t>4</a:t>
+              <a:rPr lang="en-US" sz="2000" b="1" dirty="0"/>
+              <a:t>7</a:t>
             </a:r>
             <a:endParaRPr lang="en-US" sz="2000" dirty="0"/>
           </a:p>
@@ -9874,7 +9817,7 @@
           </a:prstGeom>
           <a:extLst>
             <a:ext uri="{C572A759-6A51-4108-AA02-DFA0A04FC94B}">
-              <ma14:wrappingTextBoxFlag xmlns:ma14="http://schemas.microsoft.com/office/mac/drawingml/2011/main" val="0"/>
+              <ma14:wrappingTextBoxFlag xmlns:ma14="http://schemas.microsoft.com/office/mac/drawingml/2011/main" xmlns="" val="0"/>
             </a:ext>
           </a:extLst>
         </p:spPr>
@@ -9892,7 +9835,7 @@
           <a:p>
             <a:pPr algn="r"/>
             <a:fld id="{F7021451-1387-4CA6-816F-3879F97B5CBC}" type="slidenum">
-              <a:rPr b="0" lang="en-US"/>
+              <a:rPr lang="en-US" b="0"/>
               <a:t>2</a:t>
             </a:fld>
             <a:endParaRPr lang="en-US"/>
@@ -9927,9 +9870,11 @@
       <p:sp>
         <p:nvSpPr>
           <p:cNvPr id="2" name="Text 3"/>
-          <p:cNvSpPr/>
+          <p:cNvSpPr>
+            <a:spLocks noGrp="1"/>
+          </p:cNvSpPr>
           <p:nvPr>
-            <p:ph idx="104" type="title" hasCustomPrompt="1"/>
+            <p:ph type="title" idx="104" hasCustomPrompt="1"/>
           </p:nvPr>
         </p:nvSpPr>
         <p:spPr>
@@ -9947,7 +9892,7 @@
           <a:bodyPr wrap="square" lIns="0" tIns="0" rIns="0" bIns="0" rtlCol="0" anchor="ctr"/>
           <a:lstStyle/>
           <a:p>
-            <a:pPr algn="l" indent="0" marL="0">
+            <a:pPr marL="0" indent="0" algn="l">
               <a:buNone/>
             </a:pPr>
             <a:r>
@@ -10010,7 +9955,7 @@
           <a:bodyPr wrap="square" lIns="0" tIns="0" rIns="0" bIns="0" rtlCol="0" anchor="ctr"/>
           <a:lstStyle/>
           <a:p>
-            <a:pPr indent="0" marL="0">
+            <a:pPr marL="0" indent="0">
               <a:buNone/>
             </a:pPr>
             <a:r>
@@ -10046,7 +9991,7 @@
           <a:bodyPr wrap="square" lIns="0" tIns="0" rIns="0" bIns="0" rtlCol="0" anchor="ctr"/>
           <a:lstStyle/>
           <a:p>
-            <a:pPr indent="0" marL="0">
+            <a:pPr marL="0" indent="0">
               <a:buNone/>
             </a:pPr>
             <a:r>
@@ -10082,7 +10027,7 @@
           <a:bodyPr wrap="square" lIns="0" tIns="0" rIns="0" bIns="0" rtlCol="0" anchor="ctr"/>
           <a:lstStyle/>
           <a:p>
-            <a:pPr indent="0" marL="0">
+            <a:pPr marL="0" indent="0">
               <a:buNone/>
             </a:pPr>
             <a:r>
@@ -10118,7 +10063,7 @@
           <a:bodyPr wrap="square" lIns="0" tIns="0" rIns="0" bIns="0" rtlCol="0" anchor="ctr"/>
           <a:lstStyle/>
           <a:p>
-            <a:pPr indent="0" marL="0">
+            <a:pPr marL="0" indent="0">
               <a:buNone/>
             </a:pPr>
             <a:r>
@@ -10154,7 +10099,7 @@
           <a:bodyPr wrap="square" lIns="0" tIns="0" rIns="0" bIns="0" rtlCol="0" anchor="ctr"/>
           <a:lstStyle/>
           <a:p>
-            <a:pPr indent="0" marL="0">
+            <a:pPr marL="0" indent="0">
               <a:buNone/>
             </a:pPr>
             <a:r>
@@ -10190,7 +10135,7 @@
           <a:bodyPr wrap="square" lIns="0" tIns="0" rIns="0" bIns="0" rtlCol="0" anchor="ctr"/>
           <a:lstStyle/>
           <a:p>
-            <a:pPr indent="0" marL="0">
+            <a:pPr marL="0" indent="0">
               <a:buNone/>
             </a:pPr>
             <a:r>
@@ -10284,7 +10229,7 @@
           <a:bodyPr wrap="square" lIns="0" tIns="0" rIns="0" bIns="0" rtlCol="0" anchor="ctr"/>
           <a:lstStyle/>
           <a:p>
-            <a:pPr indent="0" marL="0">
+            <a:pPr marL="0" indent="0">
               <a:buNone/>
             </a:pPr>
             <a:r>
@@ -10395,7 +10340,7 @@
           </a:prstGeom>
           <a:extLst>
             <a:ext uri="{C572A759-6A51-4108-AA02-DFA0A04FC94B}">
-              <ma14:wrappingTextBoxFlag xmlns:ma14="http://schemas.microsoft.com/office/mac/drawingml/2011/main" val="0"/>
+              <ma14:wrappingTextBoxFlag xmlns:ma14="http://schemas.microsoft.com/office/mac/drawingml/2011/main" xmlns="" val="0"/>
             </a:ext>
           </a:extLst>
         </p:spPr>
@@ -10413,7 +10358,7 @@
           <a:p>
             <a:pPr algn="r"/>
             <a:fld id="{F7021451-1387-4CA6-816F-3879F97B5CBC}" type="slidenum">
-              <a:rPr b="0" lang="en-US"/>
+              <a:rPr lang="en-US" b="0"/>
               <a:t>3</a:t>
             </a:fld>
             <a:endParaRPr lang="en-US"/>
@@ -10448,9 +10393,11 @@
       <p:sp>
         <p:nvSpPr>
           <p:cNvPr id="2" name="Text 3"/>
-          <p:cNvSpPr/>
+          <p:cNvSpPr>
+            <a:spLocks noGrp="1"/>
+          </p:cNvSpPr>
           <p:nvPr>
-            <p:ph idx="104" type="title" hasCustomPrompt="1"/>
+            <p:ph type="title" idx="104" hasCustomPrompt="1"/>
           </p:nvPr>
         </p:nvSpPr>
         <p:spPr>
@@ -10468,7 +10415,7 @@
           <a:bodyPr wrap="square" lIns="0" tIns="0" rIns="0" bIns="0" rtlCol="0" anchor="ctr"/>
           <a:lstStyle/>
           <a:p>
-            <a:pPr algn="l" indent="0" marL="0">
+            <a:pPr marL="0" indent="0" algn="l">
               <a:buNone/>
             </a:pPr>
             <a:r>
@@ -10531,7 +10478,7 @@
           <a:bodyPr wrap="square" lIns="0" tIns="0" rIns="0" bIns="0" rtlCol="0" anchor="ctr"/>
           <a:lstStyle/>
           <a:p>
-            <a:pPr indent="0" marL="0">
+            <a:pPr marL="0" indent="0">
               <a:buNone/>
             </a:pPr>
             <a:r>
@@ -10567,7 +10514,7 @@
           <a:bodyPr wrap="square" lIns="0" tIns="0" rIns="0" bIns="0" rtlCol="0" anchor="t"/>
           <a:lstStyle/>
           <a:p>
-            <a:pPr indent="0" marL="0">
+            <a:pPr marL="0" indent="0">
               <a:buNone/>
             </a:pPr>
             <a:r>
@@ -10603,7 +10550,7 @@
           <a:bodyPr wrap="square" lIns="0" tIns="0" rIns="0" bIns="0" rtlCol="0" anchor="ctr"/>
           <a:lstStyle/>
           <a:p>
-            <a:pPr indent="0" marL="0">
+            <a:pPr marL="0" indent="0">
               <a:buNone/>
             </a:pPr>
             <a:r>
@@ -10691,7 +10638,7 @@
           <a:bodyPr wrap="square" lIns="0" tIns="0" rIns="0" bIns="0" rtlCol="0" anchor="ctr"/>
           <a:lstStyle/>
           <a:p>
-            <a:pPr algn="ctr" indent="0" marL="0">
+            <a:pPr marL="0" indent="0" algn="ctr">
               <a:buNone/>
             </a:pPr>
             <a:r>
@@ -10727,7 +10674,7 @@
           <a:bodyPr wrap="square" lIns="0" tIns="0" rIns="0" bIns="0" rtlCol="0" anchor="t"/>
           <a:lstStyle/>
           <a:p>
-            <a:pPr indent="0" marL="0">
+            <a:pPr marL="0" indent="0">
               <a:buNone/>
             </a:pPr>
             <a:r>
@@ -10815,7 +10762,7 @@
           <a:bodyPr wrap="square" lIns="0" tIns="0" rIns="0" bIns="0" rtlCol="0" anchor="ctr"/>
           <a:lstStyle/>
           <a:p>
-            <a:pPr algn="ctr" indent="0" marL="0">
+            <a:pPr marL="0" indent="0" algn="ctr">
               <a:buNone/>
             </a:pPr>
             <a:r>
@@ -10851,7 +10798,7 @@
           <a:bodyPr wrap="square" lIns="0" tIns="0" rIns="0" bIns="0" rtlCol="0" anchor="t"/>
           <a:lstStyle/>
           <a:p>
-            <a:pPr indent="0" marL="0">
+            <a:pPr marL="0" indent="0">
               <a:buNone/>
             </a:pPr>
             <a:r>
@@ -10939,7 +10886,7 @@
           <a:bodyPr wrap="square" lIns="0" tIns="0" rIns="0" bIns="0" rtlCol="0" anchor="ctr"/>
           <a:lstStyle/>
           <a:p>
-            <a:pPr algn="ctr" indent="0" marL="0">
+            <a:pPr marL="0" indent="0" algn="ctr">
               <a:buNone/>
             </a:pPr>
             <a:r>
@@ -10975,7 +10922,7 @@
           <a:bodyPr wrap="square" lIns="0" tIns="0" rIns="0" bIns="0" rtlCol="0" anchor="t"/>
           <a:lstStyle/>
           <a:p>
-            <a:pPr indent="0" marL="0">
+            <a:pPr marL="0" indent="0">
               <a:buNone/>
             </a:pPr>
             <a:r>
@@ -11063,7 +11010,7 @@
           <a:bodyPr wrap="square" lIns="0" tIns="0" rIns="0" bIns="0" rtlCol="0" anchor="ctr"/>
           <a:lstStyle/>
           <a:p>
-            <a:pPr algn="ctr" indent="0" marL="0">
+            <a:pPr marL="0" indent="0" algn="ctr">
               <a:buNone/>
             </a:pPr>
             <a:r>
@@ -11099,7 +11046,7 @@
           <a:bodyPr wrap="square" lIns="0" tIns="0" rIns="0" bIns="0" rtlCol="0" anchor="t"/>
           <a:lstStyle/>
           <a:p>
-            <a:pPr indent="0" marL="0">
+            <a:pPr marL="0" indent="0">
               <a:buNone/>
             </a:pPr>
             <a:r>
@@ -11134,7 +11081,7 @@
           </a:prstGeom>
           <a:extLst>
             <a:ext uri="{C572A759-6A51-4108-AA02-DFA0A04FC94B}">
-              <ma14:wrappingTextBoxFlag xmlns:ma14="http://schemas.microsoft.com/office/mac/drawingml/2011/main" val="0"/>
+              <ma14:wrappingTextBoxFlag xmlns:ma14="http://schemas.microsoft.com/office/mac/drawingml/2011/main" xmlns="" val="0"/>
             </a:ext>
           </a:extLst>
         </p:spPr>
@@ -11152,7 +11099,7 @@
           <a:p>
             <a:pPr algn="r"/>
             <a:fld id="{F7021451-1387-4CA6-816F-3879F97B5CBC}" type="slidenum">
-              <a:rPr b="0" lang="en-US"/>
+              <a:rPr lang="en-US" b="0"/>
               <a:t>4</a:t>
             </a:fld>
             <a:endParaRPr lang="en-US"/>
@@ -11187,9 +11134,11 @@
       <p:sp>
         <p:nvSpPr>
           <p:cNvPr id="2" name="Text 3"/>
-          <p:cNvSpPr/>
+          <p:cNvSpPr>
+            <a:spLocks noGrp="1"/>
+          </p:cNvSpPr>
           <p:nvPr>
-            <p:ph idx="104" type="title" hasCustomPrompt="1"/>
+            <p:ph type="title" idx="104" hasCustomPrompt="1"/>
           </p:nvPr>
         </p:nvSpPr>
         <p:spPr>
@@ -11207,7 +11156,7 @@
           <a:bodyPr wrap="square" lIns="0" tIns="0" rIns="0" bIns="0" rtlCol="0" anchor="ctr"/>
           <a:lstStyle/>
           <a:p>
-            <a:pPr algn="l" indent="0" marL="0">
+            <a:pPr marL="0" indent="0" algn="l">
               <a:buNone/>
             </a:pPr>
             <a:r>
@@ -11276,14 +11225,14 @@
       </p:sp>
       <p:pic>
         <p:nvPicPr>
-          <p:cNvPr id="5" name="Input Layer icon" descr="Input Layer icon">    </p:cNvPr>
+          <p:cNvPr id="5" name="Input Layer icon" descr="Input Layer icon"/>
           <p:cNvPicPr>
             <a:picLocks noChangeAspect="1"/>
           </p:cNvPicPr>
           <p:nvPr/>
         </p:nvPicPr>
         <p:blipFill>
-          <a:blip r:embed="rId1"/>
+          <a:blip r:embed="rId3"/>
           <a:stretch>
             <a:fillRect/>
           </a:stretch>
@@ -11319,7 +11268,7 @@
           <a:bodyPr wrap="square" lIns="0" tIns="0" rIns="0" bIns="0" rtlCol="0" anchor="ctr"/>
           <a:lstStyle/>
           <a:p>
-            <a:pPr algn="ctr" indent="0" marL="0">
+            <a:pPr marL="0" indent="0" algn="ctr">
               <a:buNone/>
             </a:pPr>
             <a:r>
@@ -11355,7 +11304,7 @@
           <a:bodyPr wrap="square" lIns="0" tIns="0" rIns="0" bIns="0" rtlCol="0" anchor="t"/>
           <a:lstStyle/>
           <a:p>
-            <a:pPr algn="l" indent="0" marL="0">
+            <a:pPr marL="0" indent="0" algn="l">
               <a:buNone/>
             </a:pPr>
             <a:r>
@@ -11449,14 +11398,14 @@
       </p:sp>
       <p:pic>
         <p:nvPicPr>
-          <p:cNvPr id="11" name="Processing Layer icon" descr="Processing Layer icon">    </p:cNvPr>
+          <p:cNvPr id="11" name="Processing Layer icon" descr="Processing Layer icon"/>
           <p:cNvPicPr>
             <a:picLocks noChangeAspect="1"/>
           </p:cNvPicPr>
           <p:nvPr/>
         </p:nvPicPr>
         <p:blipFill>
-          <a:blip r:embed="rId2"/>
+          <a:blip r:embed="rId4"/>
           <a:stretch>
             <a:fillRect/>
           </a:stretch>
@@ -11492,7 +11441,7 @@
           <a:bodyPr wrap="square" lIns="0" tIns="0" rIns="0" bIns="0" rtlCol="0" anchor="ctr"/>
           <a:lstStyle/>
           <a:p>
-            <a:pPr algn="ctr" indent="0" marL="0">
+            <a:pPr marL="0" indent="0" algn="ctr">
               <a:buNone/>
             </a:pPr>
             <a:r>
@@ -11528,7 +11477,7 @@
           <a:bodyPr wrap="square" lIns="0" tIns="0" rIns="0" bIns="0" rtlCol="0" anchor="t"/>
           <a:lstStyle/>
           <a:p>
-            <a:pPr algn="l" indent="0" marL="0">
+            <a:pPr marL="0" indent="0" algn="l">
               <a:buNone/>
             </a:pPr>
             <a:r>
@@ -11622,14 +11571,14 @@
       </p:sp>
       <p:pic>
         <p:nvPicPr>
-          <p:cNvPr id="17" name="Core Logic icon" descr="Core Logic icon">    </p:cNvPr>
+          <p:cNvPr id="17" name="Core Logic icon" descr="Core Logic icon"/>
           <p:cNvPicPr>
             <a:picLocks noChangeAspect="1"/>
           </p:cNvPicPr>
           <p:nvPr/>
         </p:nvPicPr>
         <p:blipFill>
-          <a:blip r:embed="rId3"/>
+          <a:blip r:embed="rId5"/>
           <a:stretch>
             <a:fillRect/>
           </a:stretch>
@@ -11665,7 +11614,7 @@
           <a:bodyPr wrap="square" lIns="0" tIns="0" rIns="0" bIns="0" rtlCol="0" anchor="ctr"/>
           <a:lstStyle/>
           <a:p>
-            <a:pPr algn="ctr" indent="0" marL="0">
+            <a:pPr marL="0" indent="0" algn="ctr">
               <a:buNone/>
             </a:pPr>
             <a:r>
@@ -11701,7 +11650,7 @@
           <a:bodyPr wrap="square" lIns="0" tIns="0" rIns="0" bIns="0" rtlCol="0" anchor="t"/>
           <a:lstStyle/>
           <a:p>
-            <a:pPr algn="l" indent="0" marL="0">
+            <a:pPr marL="0" indent="0" algn="l">
               <a:buNone/>
             </a:pPr>
             <a:r>
@@ -11795,14 +11744,14 @@
       </p:sp>
       <p:pic>
         <p:nvPicPr>
-          <p:cNvPr id="23" name="Database Layer icon" descr="Database Layer icon">    </p:cNvPr>
+          <p:cNvPr id="23" name="Database Layer icon" descr="Database Layer icon"/>
           <p:cNvPicPr>
             <a:picLocks noChangeAspect="1"/>
           </p:cNvPicPr>
           <p:nvPr/>
         </p:nvPicPr>
         <p:blipFill>
-          <a:blip r:embed="rId4"/>
+          <a:blip r:embed="rId6"/>
           <a:stretch>
             <a:fillRect/>
           </a:stretch>
@@ -11838,7 +11787,7 @@
           <a:bodyPr wrap="square" lIns="0" tIns="0" rIns="0" bIns="0" rtlCol="0" anchor="ctr"/>
           <a:lstStyle/>
           <a:p>
-            <a:pPr algn="ctr" indent="0" marL="0">
+            <a:pPr marL="0" indent="0" algn="ctr">
               <a:buNone/>
             </a:pPr>
             <a:r>
@@ -11874,7 +11823,7 @@
           <a:bodyPr wrap="square" lIns="0" tIns="0" rIns="0" bIns="0" rtlCol="0" anchor="t"/>
           <a:lstStyle/>
           <a:p>
-            <a:pPr algn="l" indent="0" marL="0">
+            <a:pPr marL="0" indent="0" algn="l">
               <a:buNone/>
             </a:pPr>
             <a:r>
@@ -11968,14 +11917,14 @@
       </p:sp>
       <p:pic>
         <p:nvPicPr>
-          <p:cNvPr id="29" name="Output Layer icon" descr="Output Layer icon">    </p:cNvPr>
+          <p:cNvPr id="29" name="Output Layer icon" descr="Output Layer icon"/>
           <p:cNvPicPr>
             <a:picLocks noChangeAspect="1"/>
           </p:cNvPicPr>
           <p:nvPr/>
         </p:nvPicPr>
         <p:blipFill>
-          <a:blip r:embed="rId5"/>
+          <a:blip r:embed="rId7"/>
           <a:stretch>
             <a:fillRect/>
           </a:stretch>
@@ -12011,7 +11960,7 @@
           <a:bodyPr wrap="square" lIns="0" tIns="0" rIns="0" bIns="0" rtlCol="0" anchor="ctr"/>
           <a:lstStyle/>
           <a:p>
-            <a:pPr algn="ctr" indent="0" marL="0">
+            <a:pPr marL="0" indent="0" algn="ctr">
               <a:buNone/>
             </a:pPr>
             <a:r>
@@ -12047,7 +11996,7 @@
           <a:bodyPr wrap="square" lIns="0" tIns="0" rIns="0" bIns="0" rtlCol="0" anchor="t"/>
           <a:lstStyle/>
           <a:p>
-            <a:pPr algn="l" indent="0" marL="0">
+            <a:pPr marL="0" indent="0" algn="l">
               <a:buNone/>
             </a:pPr>
             <a:r>
@@ -12083,7 +12032,7 @@
           <a:bodyPr wrap="square" lIns="0" tIns="0" rIns="0" bIns="0" rtlCol="0" anchor="ctr"/>
           <a:lstStyle/>
           <a:p>
-            <a:pPr indent="0" marL="0">
+            <a:pPr marL="0" indent="0">
               <a:buNone/>
             </a:pPr>
             <a:r>
@@ -12195,7 +12144,7 @@
           <a:bodyPr wrap="square" lIns="0" tIns="0" rIns="0" bIns="0" rtlCol="0" anchor="ctr"/>
           <a:lstStyle/>
           <a:p>
-            <a:pPr indent="0" marL="0">
+            <a:pPr marL="0" indent="0">
               <a:buNone/>
             </a:pPr>
             <a:r>
@@ -12288,7 +12237,7 @@
       </p:sp>
       <p:sp>
         <p:nvSpPr>
-          <p:cNvPr id="25" name="Slide Number Placeholder 0"/>
+          <p:cNvPr id="36" name="Slide Number Placeholder 0"/>
           <p:cNvSpPr>
             <a:spLocks noGrp="1"/>
           </p:cNvSpPr>
@@ -12306,7 +12255,7 @@
           </a:prstGeom>
           <a:extLst>
             <a:ext uri="{C572A759-6A51-4108-AA02-DFA0A04FC94B}">
-              <ma14:wrappingTextBoxFlag xmlns:ma14="http://schemas.microsoft.com/office/mac/drawingml/2011/main" val="0"/>
+              <ma14:wrappingTextBoxFlag xmlns:ma14="http://schemas.microsoft.com/office/mac/drawingml/2011/main" xmlns="" val="0"/>
             </a:ext>
           </a:extLst>
         </p:spPr>
@@ -12324,7 +12273,7 @@
           <a:p>
             <a:pPr algn="r"/>
             <a:fld id="{F7021451-1387-4CA6-816F-3879F97B5CBC}" type="slidenum">
-              <a:rPr b="0" lang="en-US"/>
+              <a:rPr lang="en-US" b="0"/>
               <a:t>5</a:t>
             </a:fld>
             <a:endParaRPr lang="en-US"/>
@@ -12359,9 +12308,11 @@
       <p:sp>
         <p:nvSpPr>
           <p:cNvPr id="2" name="Text 3"/>
-          <p:cNvSpPr/>
+          <p:cNvSpPr>
+            <a:spLocks noGrp="1"/>
+          </p:cNvSpPr>
           <p:nvPr>
-            <p:ph idx="104" type="title" hasCustomPrompt="1"/>
+            <p:ph type="title" idx="104" hasCustomPrompt="1"/>
           </p:nvPr>
         </p:nvSpPr>
         <p:spPr>
@@ -12379,7 +12330,7 @@
           <a:bodyPr wrap="square" lIns="0" tIns="0" rIns="0" bIns="0" rtlCol="0" anchor="ctr"/>
           <a:lstStyle/>
           <a:p>
-            <a:pPr algn="l" indent="0" marL="0">
+            <a:pPr marL="0" indent="0" algn="l">
               <a:buNone/>
             </a:pPr>
             <a:r>
@@ -12415,7 +12366,7 @@
           <a:bodyPr wrap="square" lIns="0" tIns="0" rIns="0" bIns="0" rtlCol="0" anchor="ctr"/>
           <a:lstStyle/>
           <a:p>
-            <a:pPr indent="0" marL="0">
+            <a:pPr marL="0" indent="0">
               <a:buNone/>
             </a:pPr>
             <a:r>
@@ -12457,14 +12408,14 @@
       </p:sp>
       <p:pic>
         <p:nvPicPr>
-          <p:cNvPr id="5" name="Module icon 1" descr="Module icon 1">    </p:cNvPr>
+          <p:cNvPr id="5" name="Module icon 1" descr="Module icon 1"/>
           <p:cNvPicPr>
             <a:picLocks noChangeAspect="1"/>
           </p:cNvPicPr>
           <p:nvPr/>
         </p:nvPicPr>
         <p:blipFill>
-          <a:blip r:embed="rId1"/>
+          <a:blip r:embed="rId3"/>
           <a:stretch>
             <a:fillRect/>
           </a:stretch>
@@ -12500,7 +12451,7 @@
           <a:bodyPr wrap="square" lIns="0" tIns="0" rIns="0" bIns="0" rtlCol="0" anchor="ctr"/>
           <a:lstStyle/>
           <a:p>
-            <a:pPr indent="0" marL="0">
+            <a:pPr marL="0" indent="0">
               <a:buNone/>
             </a:pPr>
             <a:r>
@@ -12542,14 +12493,14 @@
       </p:sp>
       <p:pic>
         <p:nvPicPr>
-          <p:cNvPr id="8" name="Module icon 2" descr="Module icon 2">    </p:cNvPr>
+          <p:cNvPr id="8" name="Module icon 2" descr="Module icon 2"/>
           <p:cNvPicPr>
             <a:picLocks noChangeAspect="1"/>
           </p:cNvPicPr>
           <p:nvPr/>
         </p:nvPicPr>
         <p:blipFill>
-          <a:blip r:embed="rId2"/>
+          <a:blip r:embed="rId4"/>
           <a:stretch>
             <a:fillRect/>
           </a:stretch>
@@ -12585,7 +12536,7 @@
           <a:bodyPr wrap="square" lIns="0" tIns="0" rIns="0" bIns="0" rtlCol="0" anchor="ctr"/>
           <a:lstStyle/>
           <a:p>
-            <a:pPr indent="0" marL="0">
+            <a:pPr marL="0" indent="0">
               <a:buNone/>
             </a:pPr>
             <a:r>
@@ -12627,14 +12578,14 @@
       </p:sp>
       <p:pic>
         <p:nvPicPr>
-          <p:cNvPr id="11" name="Module icon 3" descr="Module icon 3">    </p:cNvPr>
+          <p:cNvPr id="11" name="Module icon 3" descr="Module icon 3"/>
           <p:cNvPicPr>
             <a:picLocks noChangeAspect="1"/>
           </p:cNvPicPr>
           <p:nvPr/>
         </p:nvPicPr>
         <p:blipFill>
-          <a:blip r:embed="rId3"/>
+          <a:blip r:embed="rId5"/>
           <a:stretch>
             <a:fillRect/>
           </a:stretch>
@@ -12670,7 +12621,7 @@
           <a:bodyPr wrap="square" lIns="0" tIns="0" rIns="0" bIns="0" rtlCol="0" anchor="ctr"/>
           <a:lstStyle/>
           <a:p>
-            <a:pPr indent="0" marL="0">
+            <a:pPr marL="0" indent="0">
               <a:buNone/>
             </a:pPr>
             <a:r>
@@ -12712,14 +12663,14 @@
       </p:sp>
       <p:pic>
         <p:nvPicPr>
-          <p:cNvPr id="14" name="Module icon 4" descr="Module icon 4">    </p:cNvPr>
+          <p:cNvPr id="14" name="Module icon 4" descr="Module icon 4"/>
           <p:cNvPicPr>
             <a:picLocks noChangeAspect="1"/>
           </p:cNvPicPr>
           <p:nvPr/>
         </p:nvPicPr>
         <p:blipFill>
-          <a:blip r:embed="rId4"/>
+          <a:blip r:embed="rId6"/>
           <a:stretch>
             <a:fillRect/>
           </a:stretch>
@@ -12755,7 +12706,7 @@
           <a:bodyPr wrap="square" lIns="0" tIns="0" rIns="0" bIns="0" rtlCol="0" anchor="ctr"/>
           <a:lstStyle/>
           <a:p>
-            <a:pPr indent="0" marL="0">
+            <a:pPr marL="0" indent="0">
               <a:buNone/>
             </a:pPr>
             <a:r>
@@ -12797,14 +12748,14 @@
       </p:sp>
       <p:pic>
         <p:nvPicPr>
-          <p:cNvPr id="17" name="Module icon 5" descr="Module icon 5">    </p:cNvPr>
+          <p:cNvPr id="17" name="Module icon 5" descr="Module icon 5"/>
           <p:cNvPicPr>
             <a:picLocks noChangeAspect="1"/>
           </p:cNvPicPr>
           <p:nvPr/>
         </p:nvPicPr>
         <p:blipFill>
-          <a:blip r:embed="rId5"/>
+          <a:blip r:embed="rId7"/>
           <a:stretch>
             <a:fillRect/>
           </a:stretch>
@@ -12840,7 +12791,7 @@
           <a:bodyPr wrap="square" lIns="0" tIns="0" rIns="0" bIns="0" rtlCol="0" anchor="ctr"/>
           <a:lstStyle/>
           <a:p>
-            <a:pPr indent="0" marL="0">
+            <a:pPr marL="0" indent="0">
               <a:buNone/>
             </a:pPr>
             <a:r>
@@ -12876,7 +12827,7 @@
           <a:bodyPr wrap="square" lIns="0" tIns="0" rIns="0" bIns="0" rtlCol="0" anchor="ctr"/>
           <a:lstStyle/>
           <a:p>
-            <a:pPr indent="0" marL="0">
+            <a:pPr marL="0" indent="0">
               <a:buNone/>
             </a:pPr>
             <a:r>
@@ -13069,7 +13020,7 @@
           <a:bodyPr wrap="square" lIns="0" tIns="0" rIns="0" bIns="0" rtlCol="0" anchor="ctr"/>
           <a:lstStyle/>
           <a:p>
-            <a:pPr indent="0" marL="0">
+            <a:pPr marL="0" indent="0">
               <a:buNone/>
             </a:pPr>
             <a:r>
@@ -13105,7 +13056,7 @@
           <a:bodyPr wrap="square" lIns="0" tIns="0" rIns="0" bIns="0" rtlCol="0" anchor="t"/>
           <a:lstStyle/>
           <a:p>
-            <a:pPr indent="0" marL="0">
+            <a:pPr marL="0" indent="0">
               <a:buNone/>
             </a:pPr>
             <a:r>
@@ -13140,7 +13091,7 @@
           </a:prstGeom>
           <a:extLst>
             <a:ext uri="{C572A759-6A51-4108-AA02-DFA0A04FC94B}">
-              <ma14:wrappingTextBoxFlag xmlns:ma14="http://schemas.microsoft.com/office/mac/drawingml/2011/main" val="0"/>
+              <ma14:wrappingTextBoxFlag xmlns:ma14="http://schemas.microsoft.com/office/mac/drawingml/2011/main" xmlns="" val="0"/>
             </a:ext>
           </a:extLst>
         </p:spPr>
@@ -13158,7 +13109,7 @@
           <a:p>
             <a:pPr algn="r"/>
             <a:fld id="{F7021451-1387-4CA6-816F-3879F97B5CBC}" type="slidenum">
-              <a:rPr b="0" lang="en-US"/>
+              <a:rPr lang="en-US" b="0"/>
               <a:t>6</a:t>
             </a:fld>
             <a:endParaRPr lang="en-US"/>
@@ -13193,9 +13144,11 @@
       <p:sp>
         <p:nvSpPr>
           <p:cNvPr id="2" name="Text 3"/>
-          <p:cNvSpPr/>
+          <p:cNvSpPr>
+            <a:spLocks noGrp="1"/>
+          </p:cNvSpPr>
           <p:nvPr>
-            <p:ph idx="104" type="title" hasCustomPrompt="1"/>
+            <p:ph type="title" idx="104" hasCustomPrompt="1"/>
           </p:nvPr>
         </p:nvSpPr>
         <p:spPr>
@@ -13213,7 +13166,7 @@
           <a:bodyPr wrap="square" lIns="0" tIns="0" rIns="0" bIns="0" rtlCol="0" anchor="ctr"/>
           <a:lstStyle/>
           <a:p>
-            <a:pPr algn="l" indent="0" marL="0">
+            <a:pPr marL="0" indent="0" algn="l">
               <a:buNone/>
             </a:pPr>
             <a:r>
@@ -13276,7 +13229,7 @@
           <a:bodyPr wrap="square" lIns="0" tIns="0" rIns="0" bIns="0" rtlCol="0" anchor="ctr"/>
           <a:lstStyle/>
           <a:p>
-            <a:pPr indent="0" marL="0">
+            <a:pPr marL="0" indent="0">
               <a:buNone/>
             </a:pPr>
             <a:r>
@@ -13337,7 +13290,7 @@
           <a:bodyPr wrap="square" lIns="0" tIns="0" rIns="0" bIns="0" rtlCol="0" anchor="ctr"/>
           <a:lstStyle/>
           <a:p>
-            <a:pPr indent="0" marL="0">
+            <a:pPr marL="0" indent="0">
               <a:buNone/>
             </a:pPr>
             <a:r>
@@ -13373,7 +13326,7 @@
           <a:bodyPr wrap="square" lIns="0" tIns="0" rIns="0" bIns="0" rtlCol="0" anchor="ctr"/>
           <a:lstStyle/>
           <a:p>
-            <a:pPr indent="0" marL="0">
+            <a:pPr marL="0" indent="0">
               <a:buNone/>
             </a:pPr>
             <a:r>
@@ -13434,7 +13387,7 @@
           <a:bodyPr wrap="square" lIns="0" tIns="0" rIns="0" bIns="0" rtlCol="0" anchor="ctr"/>
           <a:lstStyle/>
           <a:p>
-            <a:pPr indent="0" marL="0">
+            <a:pPr marL="0" indent="0">
               <a:buNone/>
             </a:pPr>
             <a:r>
@@ -13470,7 +13423,7 @@
           <a:bodyPr wrap="square" lIns="0" tIns="0" rIns="0" bIns="0" rtlCol="0" anchor="ctr"/>
           <a:lstStyle/>
           <a:p>
-            <a:pPr indent="0" marL="0">
+            <a:pPr marL="0" indent="0">
               <a:buNone/>
             </a:pPr>
             <a:r>
@@ -13531,7 +13484,7 @@
           <a:bodyPr wrap="square" lIns="0" tIns="0" rIns="0" bIns="0" rtlCol="0" anchor="ctr"/>
           <a:lstStyle/>
           <a:p>
-            <a:pPr indent="0" marL="0">
+            <a:pPr marL="0" indent="0">
               <a:buNone/>
             </a:pPr>
             <a:r>
@@ -13567,7 +13520,7 @@
           <a:bodyPr wrap="square" lIns="0" tIns="0" rIns="0" bIns="0" rtlCol="0" anchor="ctr"/>
           <a:lstStyle/>
           <a:p>
-            <a:pPr indent="0" marL="0">
+            <a:pPr marL="0" indent="0">
               <a:buNone/>
             </a:pPr>
             <a:r>
@@ -13628,7 +13581,7 @@
           <a:bodyPr wrap="square" lIns="0" tIns="0" rIns="0" bIns="0" rtlCol="0" anchor="ctr"/>
           <a:lstStyle/>
           <a:p>
-            <a:pPr indent="0" marL="0">
+            <a:pPr marL="0" indent="0">
               <a:buNone/>
             </a:pPr>
             <a:r>
@@ -13664,7 +13617,7 @@
           <a:bodyPr wrap="square" lIns="0" tIns="0" rIns="0" bIns="0" rtlCol="0" anchor="ctr"/>
           <a:lstStyle/>
           <a:p>
-            <a:pPr indent="0" marL="0">
+            <a:pPr marL="0" indent="0">
               <a:buNone/>
             </a:pPr>
             <a:r>
@@ -13725,7 +13678,7 @@
           <a:bodyPr wrap="square" lIns="0" tIns="0" rIns="0" bIns="0" rtlCol="0" anchor="ctr"/>
           <a:lstStyle/>
           <a:p>
-            <a:pPr indent="0" marL="0">
+            <a:pPr marL="0" indent="0">
               <a:buNone/>
             </a:pPr>
             <a:r>
@@ -13761,7 +13714,7 @@
           <a:bodyPr wrap="square" lIns="0" tIns="0" rIns="0" bIns="0" rtlCol="0" anchor="ctr"/>
           <a:lstStyle/>
           <a:p>
-            <a:pPr indent="0" marL="0">
+            <a:pPr marL="0" indent="0">
               <a:buNone/>
             </a:pPr>
             <a:r>
@@ -13824,7 +13777,7 @@
           <a:bodyPr wrap="square" lIns="0" tIns="0" rIns="0" bIns="0" rtlCol="0" anchor="ctr"/>
           <a:lstStyle/>
           <a:p>
-            <a:pPr indent="0" marL="0">
+            <a:pPr marL="0" indent="0">
               <a:buNone/>
             </a:pPr>
             <a:r>
@@ -13866,7 +13819,7 @@
               </a:spcAft>
               <a:buSzPct val="100000"/>
               <a:buFont typeface="+mj-lt"/>
-              <a:buAutoNum type="arabicPeriod" startAt="1"/>
+              <a:buAutoNum type="arabicPeriod"/>
             </a:pPr>
             <a:r>
               <a:rPr lang="en-US" sz="1600" dirty="0">
@@ -13885,7 +13838,7 @@
               </a:spcAft>
               <a:buSzPct val="100000"/>
               <a:buFont typeface="+mj-lt"/>
-              <a:buAutoNum type="arabicPeriod" startAt="1"/>
+              <a:buAutoNum type="arabicPeriod"/>
             </a:pPr>
             <a:r>
               <a:rPr lang="en-US" sz="1600" dirty="0">
@@ -13904,7 +13857,7 @@
               </a:spcAft>
               <a:buSzPct val="100000"/>
               <a:buFont typeface="+mj-lt"/>
-              <a:buAutoNum type="arabicPeriod" startAt="1"/>
+              <a:buAutoNum type="arabicPeriod"/>
             </a:pPr>
             <a:r>
               <a:rPr lang="en-US" sz="1600" dirty="0">
@@ -13923,7 +13876,7 @@
               </a:spcAft>
               <a:buSzPct val="100000"/>
               <a:buFont typeface="+mj-lt"/>
-              <a:buAutoNum type="arabicPeriod" startAt="1"/>
+              <a:buAutoNum type="arabicPeriod"/>
             </a:pPr>
             <a:r>
               <a:rPr lang="en-US" sz="1600" dirty="0">
@@ -13942,7 +13895,7 @@
               </a:spcAft>
               <a:buSzPct val="100000"/>
               <a:buFont typeface="+mj-lt"/>
-              <a:buAutoNum type="arabicPeriod" startAt="1"/>
+              <a:buAutoNum type="arabicPeriod"/>
             </a:pPr>
             <a:r>
               <a:rPr lang="en-US" sz="1600" dirty="0">
@@ -13977,7 +13930,7 @@
           <a:bodyPr wrap="square" lIns="0" tIns="0" rIns="0" bIns="0" rtlCol="0" anchor="ctr"/>
           <a:lstStyle/>
           <a:p>
-            <a:pPr indent="0" marL="0">
+            <a:pPr marL="0" indent="0">
               <a:buNone/>
             </a:pPr>
             <a:r>
@@ -14012,7 +13965,7 @@
           </a:prstGeom>
           <a:extLst>
             <a:ext uri="{C572A759-6A51-4108-AA02-DFA0A04FC94B}">
-              <ma14:wrappingTextBoxFlag xmlns:ma14="http://schemas.microsoft.com/office/mac/drawingml/2011/main" val="0"/>
+              <ma14:wrappingTextBoxFlag xmlns:ma14="http://schemas.microsoft.com/office/mac/drawingml/2011/main" xmlns="" val="0"/>
             </a:ext>
           </a:extLst>
         </p:spPr>
@@ -14030,7 +13983,7 @@
           <a:p>
             <a:pPr algn="r"/>
             <a:fld id="{F7021451-1387-4CA6-816F-3879F97B5CBC}" type="slidenum">
-              <a:rPr b="0" lang="en-US"/>
+              <a:rPr lang="en-US" b="0"/>
               <a:t>7</a:t>
             </a:fld>
             <a:endParaRPr lang="en-US"/>
@@ -14065,9 +14018,11 @@
       <p:sp>
         <p:nvSpPr>
           <p:cNvPr id="2" name="Text 3"/>
-          <p:cNvSpPr/>
+          <p:cNvSpPr>
+            <a:spLocks noGrp="1"/>
+          </p:cNvSpPr>
           <p:nvPr>
-            <p:ph idx="104" type="title" hasCustomPrompt="1"/>
+            <p:ph type="title" idx="104" hasCustomPrompt="1"/>
           </p:nvPr>
         </p:nvSpPr>
         <p:spPr>
@@ -14085,7 +14040,7 @@
           <a:bodyPr wrap="square" lIns="0" tIns="0" rIns="0" bIns="0" rtlCol="0" anchor="ctr"/>
           <a:lstStyle/>
           <a:p>
-            <a:pPr algn="l" indent="0" marL="0">
+            <a:pPr marL="0" indent="0" algn="l">
               <a:buNone/>
             </a:pPr>
             <a:r>
@@ -14116,16 +14071,34 @@
         </p:nvGraphicFramePr>
         <p:xfrm>
           <a:off x="548640" y="1371600"/>
-          <a:ext cx="11091672" cy="914400"/>
+          <a:ext cx="11091672" cy="3858768"/>
         </p:xfrm>
         <a:graphic>
           <a:graphicData uri="http://schemas.openxmlformats.org/drawingml/2006/table">
             <a:tbl>
               <a:tblPr/>
               <a:tblGrid>
-                <a:gridCol w="2331720"/>
-                <a:gridCol w="6035040"/>
-                <a:gridCol w="2724912"/>
+                <a:gridCol w="2331720">
+                  <a:extLst>
+                    <a:ext uri="{9D8B030D-6E8A-4147-A177-3AD203B41FA5}">
+                      <a16:colId xmlns:a16="http://schemas.microsoft.com/office/drawing/2014/main" val="20000"/>
+                    </a:ext>
+                  </a:extLst>
+                </a:gridCol>
+                <a:gridCol w="6035040">
+                  <a:extLst>
+                    <a:ext uri="{9D8B030D-6E8A-4147-A177-3AD203B41FA5}">
+                      <a16:colId xmlns:a16="http://schemas.microsoft.com/office/drawing/2014/main" val="20001"/>
+                    </a:ext>
+                  </a:extLst>
+                </a:gridCol>
+                <a:gridCol w="2724912">
+                  <a:extLst>
+                    <a:ext uri="{9D8B030D-6E8A-4147-A177-3AD203B41FA5}">
+                      <a16:colId xmlns:a16="http://schemas.microsoft.com/office/drawing/2014/main" val="20002"/>
+                    </a:ext>
+                  </a:extLst>
+                </a:gridCol>
               </a:tblGrid>
               <a:tr h="384048">
                 <a:tc>
@@ -14133,7 +14106,7 @@
                     <a:bodyPr/>
                     <a:lstStyle/>
                     <a:p>
-                      <a:pPr indent="0" marL="0">
+                      <a:pPr marL="0" indent="0">
                         <a:buNone/>
                       </a:pPr>
                       <a:r>
@@ -14147,7 +14120,7 @@
                       <a:endParaRPr lang="en-US" sz="1400" dirty="0"/>
                     </a:p>
                   </a:txBody>
-                  <a:tcPr marL="91440" marR="91440" marT="36576" marB="36576" anchor="ctr">
+                  <a:tcPr marT="36576" marB="36576" anchor="ctr">
                     <a:lnL w="12700" cap="flat" cmpd="sng" algn="ctr">
                       <a:solidFill>
                         <a:srgbClr val="B9C7DA"/>
@@ -14194,7 +14167,7 @@
                     <a:bodyPr/>
                     <a:lstStyle/>
                     <a:p>
-                      <a:pPr indent="0" marL="0">
+                      <a:pPr marL="0" indent="0">
                         <a:buNone/>
                       </a:pPr>
                       <a:r>
@@ -14208,7 +14181,7 @@
                       <a:endParaRPr lang="en-US" sz="1400" dirty="0"/>
                     </a:p>
                   </a:txBody>
-                  <a:tcPr marL="91440" marR="91440" marT="36576" marB="36576" anchor="ctr">
+                  <a:tcPr marT="36576" marB="36576" anchor="ctr">
                     <a:lnL w="12700" cap="flat" cmpd="sng" algn="ctr">
                       <a:solidFill>
                         <a:srgbClr val="B9C7DA"/>
@@ -14255,7 +14228,7 @@
                     <a:bodyPr/>
                     <a:lstStyle/>
                     <a:p>
-                      <a:pPr indent="0" marL="0">
+                      <a:pPr marL="0" indent="0">
                         <a:buNone/>
                       </a:pPr>
                       <a:r>
@@ -14269,7 +14242,7 @@
                       <a:endParaRPr lang="en-US" sz="1400" dirty="0"/>
                     </a:p>
                   </a:txBody>
-                  <a:tcPr marL="91440" marR="91440" marT="36576" marB="36576" anchor="ctr">
+                  <a:tcPr marT="36576" marB="36576" anchor="ctr">
                     <a:lnL w="12700" cap="flat" cmpd="sng" algn="ctr">
                       <a:solidFill>
                         <a:srgbClr val="B9C7DA"/>
@@ -14311,6 +14284,11 @@
                     </a:solidFill>
                   </a:tcPr>
                 </a:tc>
+                <a:extLst>
+                  <a:ext uri="{0D108BD9-81ED-4DB2-BD59-A6C34878D82A}">
+                    <a16:rowId xmlns:a16="http://schemas.microsoft.com/office/drawing/2014/main" val="10000"/>
+                  </a:ext>
+                </a:extLst>
               </a:tr>
               <a:tr h="749808">
                 <a:tc>
@@ -14318,7 +14296,7 @@
                     <a:bodyPr/>
                     <a:lstStyle/>
                     <a:p>
-                      <a:pPr indent="0" marL="0">
+                      <a:pPr marL="0" indent="0">
                         <a:buNone/>
                       </a:pPr>
                       <a:r>
@@ -14332,7 +14310,7 @@
                       <a:endParaRPr lang="en-US" sz="1300" dirty="0"/>
                     </a:p>
                   </a:txBody>
-                  <a:tcPr marL="91440" marR="91440" marT="36576" marB="36576" anchor="ctr">
+                  <a:tcPr marT="36576" marB="36576" anchor="ctr">
                     <a:lnL w="12700" cap="flat" cmpd="sng" algn="ctr">
                       <a:solidFill>
                         <a:srgbClr val="B9C7DA"/>
@@ -14379,7 +14357,7 @@
                     <a:bodyPr/>
                     <a:lstStyle/>
                     <a:p>
-                      <a:pPr indent="0" marL="0">
+                      <a:pPr marL="0" indent="0">
                         <a:buNone/>
                       </a:pPr>
                       <a:r>
@@ -14393,7 +14371,7 @@
                       <a:endParaRPr lang="en-US" sz="1300" dirty="0"/>
                     </a:p>
                   </a:txBody>
-                  <a:tcPr marL="91440" marR="91440" marT="36576" marB="36576" anchor="ctr">
+                  <a:tcPr marT="36576" marB="36576" anchor="ctr">
                     <a:lnL w="12700" cap="flat" cmpd="sng" algn="ctr">
                       <a:solidFill>
                         <a:srgbClr val="B9C7DA"/>
@@ -14440,7 +14418,7 @@
                     <a:bodyPr/>
                     <a:lstStyle/>
                     <a:p>
-                      <a:pPr indent="0" marL="0">
+                      <a:pPr marL="0" indent="0">
                         <a:buNone/>
                       </a:pPr>
                       <a:r>
@@ -14454,7 +14432,7 @@
                       <a:endParaRPr lang="en-US" sz="1300" dirty="0"/>
                     </a:p>
                   </a:txBody>
-                  <a:tcPr marL="91440" marR="91440" marT="36576" marB="36576" anchor="ctr">
+                  <a:tcPr marT="36576" marB="36576" anchor="ctr">
                     <a:lnL w="12700" cap="flat" cmpd="sng" algn="ctr">
                       <a:solidFill>
                         <a:srgbClr val="B9C7DA"/>
@@ -14496,6 +14474,11 @@
                     </a:solidFill>
                   </a:tcPr>
                 </a:tc>
+                <a:extLst>
+                  <a:ext uri="{0D108BD9-81ED-4DB2-BD59-A6C34878D82A}">
+                    <a16:rowId xmlns:a16="http://schemas.microsoft.com/office/drawing/2014/main" val="10001"/>
+                  </a:ext>
+                </a:extLst>
               </a:tr>
               <a:tr h="530352">
                 <a:tc>
@@ -14503,7 +14486,7 @@
                     <a:bodyPr/>
                     <a:lstStyle/>
                     <a:p>
-                      <a:pPr indent="0" marL="0">
+                      <a:pPr marL="0" indent="0">
                         <a:buNone/>
                       </a:pPr>
                       <a:r>
@@ -14517,7 +14500,7 @@
                       <a:endParaRPr lang="en-US" sz="1300" dirty="0"/>
                     </a:p>
                   </a:txBody>
-                  <a:tcPr marL="91440" marR="91440" marT="36576" marB="36576" anchor="ctr">
+                  <a:tcPr marT="36576" marB="36576" anchor="ctr">
                     <a:lnL w="12700" cap="flat" cmpd="sng" algn="ctr">
                       <a:solidFill>
                         <a:srgbClr val="B9C7DA"/>
@@ -14564,7 +14547,7 @@
                     <a:bodyPr/>
                     <a:lstStyle/>
                     <a:p>
-                      <a:pPr indent="0" marL="0">
+                      <a:pPr marL="0" indent="0">
                         <a:buNone/>
                       </a:pPr>
                       <a:r>
@@ -14578,7 +14561,7 @@
                       <a:endParaRPr lang="en-US" sz="1300" dirty="0"/>
                     </a:p>
                   </a:txBody>
-                  <a:tcPr marL="91440" marR="91440" marT="36576" marB="36576" anchor="ctr">
+                  <a:tcPr marT="36576" marB="36576" anchor="ctr">
                     <a:lnL w="12700" cap="flat" cmpd="sng" algn="ctr">
                       <a:solidFill>
                         <a:srgbClr val="B9C7DA"/>
@@ -14625,7 +14608,7 @@
                     <a:bodyPr/>
                     <a:lstStyle/>
                     <a:p>
-                      <a:pPr indent="0" marL="0">
+                      <a:pPr marL="0" indent="0">
                         <a:buNone/>
                       </a:pPr>
                       <a:r>
@@ -14639,7 +14622,7 @@
                       <a:endParaRPr lang="en-US" sz="1300" dirty="0"/>
                     </a:p>
                   </a:txBody>
-                  <a:tcPr marL="91440" marR="91440" marT="36576" marB="36576" anchor="ctr">
+                  <a:tcPr marT="36576" marB="36576" anchor="ctr">
                     <a:lnL w="12700" cap="flat" cmpd="sng" algn="ctr">
                       <a:solidFill>
                         <a:srgbClr val="B9C7DA"/>
@@ -14681,6 +14664,11 @@
                     </a:solidFill>
                   </a:tcPr>
                 </a:tc>
+                <a:extLst>
+                  <a:ext uri="{0D108BD9-81ED-4DB2-BD59-A6C34878D82A}">
+                    <a16:rowId xmlns:a16="http://schemas.microsoft.com/office/drawing/2014/main" val="10002"/>
+                  </a:ext>
+                </a:extLst>
               </a:tr>
               <a:tr h="457200">
                 <a:tc>
@@ -14688,7 +14676,7 @@
                     <a:bodyPr/>
                     <a:lstStyle/>
                     <a:p>
-                      <a:pPr indent="0" marL="0">
+                      <a:pPr marL="0" indent="0">
                         <a:buNone/>
                       </a:pPr>
                       <a:r>
@@ -14702,7 +14690,7 @@
                       <a:endParaRPr lang="en-US" sz="1300" dirty="0"/>
                     </a:p>
                   </a:txBody>
-                  <a:tcPr marL="91440" marR="91440" marT="36576" marB="36576" anchor="ctr">
+                  <a:tcPr marT="36576" marB="36576" anchor="ctr">
                     <a:lnL w="12700" cap="flat" cmpd="sng" algn="ctr">
                       <a:solidFill>
                         <a:srgbClr val="B9C7DA"/>
@@ -14749,7 +14737,7 @@
                     <a:bodyPr/>
                     <a:lstStyle/>
                     <a:p>
-                      <a:pPr indent="0" marL="0">
+                      <a:pPr marL="0" indent="0">
                         <a:buNone/>
                       </a:pPr>
                       <a:r>
@@ -14763,7 +14751,7 @@
                       <a:endParaRPr lang="en-US" sz="1300" dirty="0"/>
                     </a:p>
                   </a:txBody>
-                  <a:tcPr marL="91440" marR="91440" marT="36576" marB="36576" anchor="ctr">
+                  <a:tcPr marT="36576" marB="36576" anchor="ctr">
                     <a:lnL w="12700" cap="flat" cmpd="sng" algn="ctr">
                       <a:solidFill>
                         <a:srgbClr val="B9C7DA"/>
@@ -14810,7 +14798,7 @@
                     <a:bodyPr/>
                     <a:lstStyle/>
                     <a:p>
-                      <a:pPr indent="0" marL="0">
+                      <a:pPr marL="0" indent="0">
                         <a:buNone/>
                       </a:pPr>
                       <a:r>
@@ -14824,7 +14812,7 @@
                       <a:endParaRPr lang="en-US" sz="1300" dirty="0"/>
                     </a:p>
                   </a:txBody>
-                  <a:tcPr marL="91440" marR="91440" marT="36576" marB="36576" anchor="ctr">
+                  <a:tcPr marT="36576" marB="36576" anchor="ctr">
                     <a:lnL w="12700" cap="flat" cmpd="sng" algn="ctr">
                       <a:solidFill>
                         <a:srgbClr val="B9C7DA"/>
@@ -14866,6 +14854,11 @@
                     </a:solidFill>
                   </a:tcPr>
                 </a:tc>
+                <a:extLst>
+                  <a:ext uri="{0D108BD9-81ED-4DB2-BD59-A6C34878D82A}">
+                    <a16:rowId xmlns:a16="http://schemas.microsoft.com/office/drawing/2014/main" val="10003"/>
+                  </a:ext>
+                </a:extLst>
               </a:tr>
               <a:tr h="457200">
                 <a:tc>
@@ -14873,7 +14866,7 @@
                     <a:bodyPr/>
                     <a:lstStyle/>
                     <a:p>
-                      <a:pPr indent="0" marL="0">
+                      <a:pPr marL="0" indent="0">
                         <a:buNone/>
                       </a:pPr>
                       <a:r>
@@ -14887,7 +14880,7 @@
                       <a:endParaRPr lang="en-US" sz="1300" dirty="0"/>
                     </a:p>
                   </a:txBody>
-                  <a:tcPr marL="91440" marR="91440" marT="36576" marB="36576" anchor="ctr">
+                  <a:tcPr marT="36576" marB="36576" anchor="ctr">
                     <a:lnL w="12700" cap="flat" cmpd="sng" algn="ctr">
                       <a:solidFill>
                         <a:srgbClr val="B9C7DA"/>
@@ -14934,7 +14927,7 @@
                     <a:bodyPr/>
                     <a:lstStyle/>
                     <a:p>
-                      <a:pPr indent="0" marL="0">
+                      <a:pPr marL="0" indent="0">
                         <a:buNone/>
                       </a:pPr>
                       <a:r>
@@ -14948,7 +14941,7 @@
                       <a:endParaRPr lang="en-US" sz="1300" dirty="0"/>
                     </a:p>
                   </a:txBody>
-                  <a:tcPr marL="91440" marR="91440" marT="36576" marB="36576" anchor="ctr">
+                  <a:tcPr marT="36576" marB="36576" anchor="ctr">
                     <a:lnL w="12700" cap="flat" cmpd="sng" algn="ctr">
                       <a:solidFill>
                         <a:srgbClr val="B9C7DA"/>
@@ -14995,7 +14988,7 @@
                     <a:bodyPr/>
                     <a:lstStyle/>
                     <a:p>
-                      <a:pPr indent="0" marL="0">
+                      <a:pPr marL="0" indent="0">
                         <a:buNone/>
                       </a:pPr>
                       <a:r>
@@ -15009,7 +15002,7 @@
                       <a:endParaRPr lang="en-US" sz="1300" dirty="0"/>
                     </a:p>
                   </a:txBody>
-                  <a:tcPr marL="91440" marR="91440" marT="36576" marB="36576" anchor="ctr">
+                  <a:tcPr marT="36576" marB="36576" anchor="ctr">
                     <a:lnL w="12700" cap="flat" cmpd="sng" algn="ctr">
                       <a:solidFill>
                         <a:srgbClr val="B9C7DA"/>
@@ -15051,6 +15044,11 @@
                     </a:solidFill>
                   </a:tcPr>
                 </a:tc>
+                <a:extLst>
+                  <a:ext uri="{0D108BD9-81ED-4DB2-BD59-A6C34878D82A}">
+                    <a16:rowId xmlns:a16="http://schemas.microsoft.com/office/drawing/2014/main" val="10004"/>
+                  </a:ext>
+                </a:extLst>
               </a:tr>
               <a:tr h="530352">
                 <a:tc>
@@ -15058,7 +15056,7 @@
                     <a:bodyPr/>
                     <a:lstStyle/>
                     <a:p>
-                      <a:pPr indent="0" marL="0">
+                      <a:pPr marL="0" indent="0">
                         <a:buNone/>
                       </a:pPr>
                       <a:r>
@@ -15072,7 +15070,7 @@
                       <a:endParaRPr lang="en-US" sz="1300" dirty="0"/>
                     </a:p>
                   </a:txBody>
-                  <a:tcPr marL="91440" marR="91440" marT="36576" marB="36576" anchor="ctr">
+                  <a:tcPr marT="36576" marB="36576" anchor="ctr">
                     <a:lnL w="12700" cap="flat" cmpd="sng" algn="ctr">
                       <a:solidFill>
                         <a:srgbClr val="B9C7DA"/>
@@ -15119,7 +15117,7 @@
                     <a:bodyPr/>
                     <a:lstStyle/>
                     <a:p>
-                      <a:pPr indent="0" marL="0">
+                      <a:pPr marL="0" indent="0">
                         <a:buNone/>
                       </a:pPr>
                       <a:r>
@@ -15133,7 +15131,7 @@
                       <a:endParaRPr lang="en-US" sz="1300" dirty="0"/>
                     </a:p>
                   </a:txBody>
-                  <a:tcPr marL="91440" marR="91440" marT="36576" marB="36576" anchor="ctr">
+                  <a:tcPr marT="36576" marB="36576" anchor="ctr">
                     <a:lnL w="12700" cap="flat" cmpd="sng" algn="ctr">
                       <a:solidFill>
                         <a:srgbClr val="B9C7DA"/>
@@ -15180,7 +15178,7 @@
                     <a:bodyPr/>
                     <a:lstStyle/>
                     <a:p>
-                      <a:pPr indent="0" marL="0">
+                      <a:pPr marL="0" indent="0">
                         <a:buNone/>
                       </a:pPr>
                       <a:r>
@@ -15194,7 +15192,7 @@
                       <a:endParaRPr lang="en-US" sz="1300" dirty="0"/>
                     </a:p>
                   </a:txBody>
-                  <a:tcPr marL="91440" marR="91440" marT="36576" marB="36576" anchor="ctr">
+                  <a:tcPr marT="36576" marB="36576" anchor="ctr">
                     <a:lnL w="12700" cap="flat" cmpd="sng" algn="ctr">
                       <a:solidFill>
                         <a:srgbClr val="B9C7DA"/>
@@ -15236,6 +15234,11 @@
                     </a:solidFill>
                   </a:tcPr>
                 </a:tc>
+                <a:extLst>
+                  <a:ext uri="{0D108BD9-81ED-4DB2-BD59-A6C34878D82A}">
+                    <a16:rowId xmlns:a16="http://schemas.microsoft.com/office/drawing/2014/main" val="10005"/>
+                  </a:ext>
+                </a:extLst>
               </a:tr>
               <a:tr h="749808">
                 <a:tc>
@@ -15243,7 +15246,7 @@
                     <a:bodyPr/>
                     <a:lstStyle/>
                     <a:p>
-                      <a:pPr indent="0" marL="0">
+                      <a:pPr marL="0" indent="0">
                         <a:buNone/>
                       </a:pPr>
                       <a:r>
@@ -15257,7 +15260,7 @@
                       <a:endParaRPr lang="en-US" sz="1300" dirty="0"/>
                     </a:p>
                   </a:txBody>
-                  <a:tcPr marL="91440" marR="91440" marT="36576" marB="36576" anchor="ctr">
+                  <a:tcPr marT="36576" marB="36576" anchor="ctr">
                     <a:lnL w="12700" cap="flat" cmpd="sng" algn="ctr">
                       <a:solidFill>
                         <a:srgbClr val="B9C7DA"/>
@@ -15304,7 +15307,7 @@
                     <a:bodyPr/>
                     <a:lstStyle/>
                     <a:p>
-                      <a:pPr indent="0" marL="0">
+                      <a:pPr marL="0" indent="0">
                         <a:buNone/>
                       </a:pPr>
                       <a:r>
@@ -15318,7 +15321,7 @@
                       <a:endParaRPr lang="en-US" sz="1300" dirty="0"/>
                     </a:p>
                   </a:txBody>
-                  <a:tcPr marL="91440" marR="91440" marT="36576" marB="36576" anchor="ctr">
+                  <a:tcPr marT="36576" marB="36576" anchor="ctr">
                     <a:lnL w="12700" cap="flat" cmpd="sng" algn="ctr">
                       <a:solidFill>
                         <a:srgbClr val="B9C7DA"/>
@@ -15365,7 +15368,7 @@
                     <a:bodyPr/>
                     <a:lstStyle/>
                     <a:p>
-                      <a:pPr indent="0" marL="0">
+                      <a:pPr marL="0" indent="0">
                         <a:buNone/>
                       </a:pPr>
                       <a:r>
@@ -15379,7 +15382,7 @@
                       <a:endParaRPr lang="en-US" sz="1300" dirty="0"/>
                     </a:p>
                   </a:txBody>
-                  <a:tcPr marL="91440" marR="91440" marT="36576" marB="36576" anchor="ctr">
+                  <a:tcPr marT="36576" marB="36576" anchor="ctr">
                     <a:lnL w="12700" cap="flat" cmpd="sng" algn="ctr">
                       <a:solidFill>
                         <a:srgbClr val="B9C7DA"/>
@@ -15421,6 +15424,11 @@
                     </a:solidFill>
                   </a:tcPr>
                 </a:tc>
+                <a:extLst>
+                  <a:ext uri="{0D108BD9-81ED-4DB2-BD59-A6C34878D82A}">
+                    <a16:rowId xmlns:a16="http://schemas.microsoft.com/office/drawing/2014/main" val="10006"/>
+                  </a:ext>
+                </a:extLst>
               </a:tr>
             </a:tbl>
           </a:graphicData>
@@ -15531,7 +15539,7 @@
           </a:prstGeom>
           <a:extLst>
             <a:ext uri="{C572A759-6A51-4108-AA02-DFA0A04FC94B}">
-              <ma14:wrappingTextBoxFlag xmlns:ma14="http://schemas.microsoft.com/office/mac/drawingml/2011/main" val="0"/>
+              <ma14:wrappingTextBoxFlag xmlns:ma14="http://schemas.microsoft.com/office/mac/drawingml/2011/main" xmlns="" val="0"/>
             </a:ext>
           </a:extLst>
         </p:spPr>
@@ -15549,7 +15557,7 @@
           <a:p>
             <a:pPr algn="r"/>
             <a:fld id="{F7021451-1387-4CA6-816F-3879F97B5CBC}" type="slidenum">
-              <a:rPr b="0" lang="en-US"/>
+              <a:rPr lang="en-US" b="0"/>
               <a:t>8</a:t>
             </a:fld>
             <a:endParaRPr lang="en-US"/>
@@ -15584,9 +15592,11 @@
       <p:sp>
         <p:nvSpPr>
           <p:cNvPr id="2" name="Text 3"/>
-          <p:cNvSpPr/>
+          <p:cNvSpPr>
+            <a:spLocks noGrp="1"/>
+          </p:cNvSpPr>
           <p:nvPr>
-            <p:ph idx="104" type="title" hasCustomPrompt="1"/>
+            <p:ph type="title" idx="104" hasCustomPrompt="1"/>
           </p:nvPr>
         </p:nvSpPr>
         <p:spPr>
@@ -15604,7 +15614,7 @@
           <a:bodyPr wrap="square" lIns="0" tIns="0" rIns="0" bIns="0" rtlCol="0" anchor="ctr"/>
           <a:lstStyle/>
           <a:p>
-            <a:pPr algn="l" indent="0" marL="0">
+            <a:pPr marL="0" indent="0" algn="l">
               <a:buNone/>
             </a:pPr>
             <a:r>
@@ -15635,16 +15645,34 @@
         </p:nvGraphicFramePr>
         <p:xfrm>
           <a:off x="548640" y="1463040"/>
-          <a:ext cx="8183880" cy="914400"/>
+          <a:ext cx="8183880" cy="4379976"/>
         </p:xfrm>
         <a:graphic>
           <a:graphicData uri="http://schemas.openxmlformats.org/drawingml/2006/table">
             <a:tbl>
               <a:tblPr/>
               <a:tblGrid>
-                <a:gridCol w="2011680"/>
-                <a:gridCol w="1783080"/>
-                <a:gridCol w="4389120"/>
+                <a:gridCol w="2011680">
+                  <a:extLst>
+                    <a:ext uri="{9D8B030D-6E8A-4147-A177-3AD203B41FA5}">
+                      <a16:colId xmlns:a16="http://schemas.microsoft.com/office/drawing/2014/main" val="20000"/>
+                    </a:ext>
+                  </a:extLst>
+                </a:gridCol>
+                <a:gridCol w="1783080">
+                  <a:extLst>
+                    <a:ext uri="{9D8B030D-6E8A-4147-A177-3AD203B41FA5}">
+                      <a16:colId xmlns:a16="http://schemas.microsoft.com/office/drawing/2014/main" val="20001"/>
+                    </a:ext>
+                  </a:extLst>
+                </a:gridCol>
+                <a:gridCol w="4389120">
+                  <a:extLst>
+                    <a:ext uri="{9D8B030D-6E8A-4147-A177-3AD203B41FA5}">
+                      <a16:colId xmlns:a16="http://schemas.microsoft.com/office/drawing/2014/main" val="20002"/>
+                    </a:ext>
+                  </a:extLst>
+                </a:gridCol>
               </a:tblGrid>
               <a:tr h="411480">
                 <a:tc>
@@ -15652,7 +15680,7 @@
                     <a:bodyPr/>
                     <a:lstStyle/>
                     <a:p>
-                      <a:pPr indent="0" marL="0">
+                      <a:pPr marL="0" indent="0">
                         <a:buNone/>
                       </a:pPr>
                       <a:r>
@@ -15666,7 +15694,7 @@
                       <a:endParaRPr lang="en-US" sz="1400" dirty="0"/>
                     </a:p>
                   </a:txBody>
-                  <a:tcPr marL="91440" marR="91440" marT="45720" marB="45720" anchor="ctr">
+                  <a:tcPr anchor="ctr">
                     <a:lnL w="12700" cap="flat" cmpd="sng" algn="ctr">
                       <a:solidFill>
                         <a:srgbClr val="B9C7DA"/>
@@ -15713,7 +15741,7 @@
                     <a:bodyPr/>
                     <a:lstStyle/>
                     <a:p>
-                      <a:pPr indent="0" marL="0">
+                      <a:pPr marL="0" indent="0">
                         <a:buNone/>
                       </a:pPr>
                       <a:r>
@@ -15727,7 +15755,7 @@
                       <a:endParaRPr lang="en-US" sz="1400" dirty="0"/>
                     </a:p>
                   </a:txBody>
-                  <a:tcPr marL="91440" marR="91440" marT="45720" marB="45720" anchor="ctr">
+                  <a:tcPr anchor="ctr">
                     <a:lnL w="12700" cap="flat" cmpd="sng" algn="ctr">
                       <a:solidFill>
                         <a:srgbClr val="B9C7DA"/>
@@ -15774,7 +15802,7 @@
                     <a:bodyPr/>
                     <a:lstStyle/>
                     <a:p>
-                      <a:pPr indent="0" marL="0">
+                      <a:pPr marL="0" indent="0">
                         <a:buNone/>
                       </a:pPr>
                       <a:r>
@@ -15788,7 +15816,7 @@
                       <a:endParaRPr lang="en-US" sz="1400" dirty="0"/>
                     </a:p>
                   </a:txBody>
-                  <a:tcPr marL="91440" marR="91440" marT="45720" marB="45720" anchor="ctr">
+                  <a:tcPr anchor="ctr">
                     <a:lnL w="12700" cap="flat" cmpd="sng" algn="ctr">
                       <a:solidFill>
                         <a:srgbClr val="B9C7DA"/>
@@ -15830,6 +15858,11 @@
                     </a:solidFill>
                   </a:tcPr>
                 </a:tc>
+                <a:extLst>
+                  <a:ext uri="{0D108BD9-81ED-4DB2-BD59-A6C34878D82A}">
+                    <a16:rowId xmlns:a16="http://schemas.microsoft.com/office/drawing/2014/main" val="10000"/>
+                  </a:ext>
+                </a:extLst>
               </a:tr>
               <a:tr h="566928">
                 <a:tc>
@@ -15837,7 +15870,7 @@
                     <a:bodyPr/>
                     <a:lstStyle/>
                     <a:p>
-                      <a:pPr indent="0" marL="0">
+                      <a:pPr marL="0" indent="0">
                         <a:buNone/>
                       </a:pPr>
                       <a:r>
@@ -15851,7 +15884,7 @@
                       <a:endParaRPr lang="en-US" sz="1300" dirty="0"/>
                     </a:p>
                   </a:txBody>
-                  <a:tcPr marL="91440" marR="91440" marT="45720" marB="45720" anchor="ctr">
+                  <a:tcPr anchor="ctr">
                     <a:lnL w="12700" cap="flat" cmpd="sng" algn="ctr">
                       <a:solidFill>
                         <a:srgbClr val="B9C7DA"/>
@@ -15898,7 +15931,7 @@
                     <a:bodyPr/>
                     <a:lstStyle/>
                     <a:p>
-                      <a:pPr indent="0" marL="0">
+                      <a:pPr marL="0" indent="0">
                         <a:buNone/>
                       </a:pPr>
                       <a:r>
@@ -15912,7 +15945,7 @@
                       <a:endParaRPr lang="en-US" sz="1300" dirty="0"/>
                     </a:p>
                   </a:txBody>
-                  <a:tcPr marL="91440" marR="91440" marT="45720" marB="45720" anchor="ctr">
+                  <a:tcPr anchor="ctr">
                     <a:lnL w="12700" cap="flat" cmpd="sng" algn="ctr">
                       <a:solidFill>
                         <a:srgbClr val="B9C7DA"/>
@@ -15959,7 +15992,7 @@
                     <a:bodyPr/>
                     <a:lstStyle/>
                     <a:p>
-                      <a:pPr indent="0" marL="0">
+                      <a:pPr marL="0" indent="0">
                         <a:buNone/>
                       </a:pPr>
                       <a:r>
@@ -15973,7 +16006,7 @@
                       <a:endParaRPr lang="en-US" sz="1300" dirty="0"/>
                     </a:p>
                   </a:txBody>
-                  <a:tcPr marL="91440" marR="91440" marT="45720" marB="45720" anchor="ctr">
+                  <a:tcPr anchor="ctr">
                     <a:lnL w="12700" cap="flat" cmpd="sng" algn="ctr">
                       <a:solidFill>
                         <a:srgbClr val="B9C7DA"/>
@@ -16015,6 +16048,11 @@
                     </a:solidFill>
                   </a:tcPr>
                 </a:tc>
+                <a:extLst>
+                  <a:ext uri="{0D108BD9-81ED-4DB2-BD59-A6C34878D82A}">
+                    <a16:rowId xmlns:a16="http://schemas.microsoft.com/office/drawing/2014/main" val="10001"/>
+                  </a:ext>
+                </a:extLst>
               </a:tr>
               <a:tr h="566928">
                 <a:tc>
@@ -16022,7 +16060,7 @@
                     <a:bodyPr/>
                     <a:lstStyle/>
                     <a:p>
-                      <a:pPr indent="0" marL="0">
+                      <a:pPr marL="0" indent="0">
                         <a:buNone/>
                       </a:pPr>
                       <a:r>
@@ -16036,7 +16074,7 @@
                       <a:endParaRPr lang="en-US" sz="1300" dirty="0"/>
                     </a:p>
                   </a:txBody>
-                  <a:tcPr marL="91440" marR="91440" marT="45720" marB="45720" anchor="ctr">
+                  <a:tcPr anchor="ctr">
                     <a:lnL w="12700" cap="flat" cmpd="sng" algn="ctr">
                       <a:solidFill>
                         <a:srgbClr val="B9C7DA"/>
@@ -16083,7 +16121,7 @@
                     <a:bodyPr/>
                     <a:lstStyle/>
                     <a:p>
-                      <a:pPr indent="0" marL="0">
+                      <a:pPr marL="0" indent="0">
                         <a:buNone/>
                       </a:pPr>
                       <a:r>
@@ -16097,7 +16135,7 @@
                       <a:endParaRPr lang="en-US" sz="1300" dirty="0"/>
                     </a:p>
                   </a:txBody>
-                  <a:tcPr marL="91440" marR="91440" marT="45720" marB="45720" anchor="ctr">
+                  <a:tcPr anchor="ctr">
                     <a:lnL w="12700" cap="flat" cmpd="sng" algn="ctr">
                       <a:solidFill>
                         <a:srgbClr val="B9C7DA"/>
@@ -16144,7 +16182,7 @@
                     <a:bodyPr/>
                     <a:lstStyle/>
                     <a:p>
-                      <a:pPr indent="0" marL="0">
+                      <a:pPr marL="0" indent="0">
                         <a:buNone/>
                       </a:pPr>
                       <a:r>
@@ -16158,7 +16196,7 @@
                       <a:endParaRPr lang="en-US" sz="1300" dirty="0"/>
                     </a:p>
                   </a:txBody>
-                  <a:tcPr marL="91440" marR="91440" marT="45720" marB="45720" anchor="ctr">
+                  <a:tcPr anchor="ctr">
                     <a:lnL w="12700" cap="flat" cmpd="sng" algn="ctr">
                       <a:solidFill>
                         <a:srgbClr val="B9C7DA"/>
@@ -16200,6 +16238,11 @@
                     </a:solidFill>
                   </a:tcPr>
                 </a:tc>
+                <a:extLst>
+                  <a:ext uri="{0D108BD9-81ED-4DB2-BD59-A6C34878D82A}">
+                    <a16:rowId xmlns:a16="http://schemas.microsoft.com/office/drawing/2014/main" val="10002"/>
+                  </a:ext>
+                </a:extLst>
               </a:tr>
               <a:tr h="566928">
                 <a:tc>
@@ -16207,7 +16250,7 @@
                     <a:bodyPr/>
                     <a:lstStyle/>
                     <a:p>
-                      <a:pPr indent="0" marL="0">
+                      <a:pPr marL="0" indent="0">
                         <a:buNone/>
                       </a:pPr>
                       <a:r>
@@ -16221,7 +16264,7 @@
                       <a:endParaRPr lang="en-US" sz="1300" dirty="0"/>
                     </a:p>
                   </a:txBody>
-                  <a:tcPr marL="91440" marR="91440" marT="45720" marB="45720" anchor="ctr">
+                  <a:tcPr anchor="ctr">
                     <a:lnL w="12700" cap="flat" cmpd="sng" algn="ctr">
                       <a:solidFill>
                         <a:srgbClr val="B9C7DA"/>
@@ -16268,7 +16311,7 @@
                     <a:bodyPr/>
                     <a:lstStyle/>
                     <a:p>
-                      <a:pPr indent="0" marL="0">
+                      <a:pPr marL="0" indent="0">
                         <a:buNone/>
                       </a:pPr>
                       <a:r>
@@ -16282,7 +16325,7 @@
                       <a:endParaRPr lang="en-US" sz="1300" dirty="0"/>
                     </a:p>
                   </a:txBody>
-                  <a:tcPr marL="91440" marR="91440" marT="45720" marB="45720" anchor="ctr">
+                  <a:tcPr anchor="ctr">
                     <a:lnL w="12700" cap="flat" cmpd="sng" algn="ctr">
                       <a:solidFill>
                         <a:srgbClr val="B9C7DA"/>
@@ -16329,7 +16372,7 @@
                     <a:bodyPr/>
                     <a:lstStyle/>
                     <a:p>
-                      <a:pPr indent="0" marL="0">
+                      <a:pPr marL="0" indent="0">
                         <a:buNone/>
                       </a:pPr>
                       <a:r>
@@ -16343,7 +16386,7 @@
                       <a:endParaRPr lang="en-US" sz="1300" dirty="0"/>
                     </a:p>
                   </a:txBody>
-                  <a:tcPr marL="91440" marR="91440" marT="45720" marB="45720" anchor="ctr">
+                  <a:tcPr anchor="ctr">
                     <a:lnL w="12700" cap="flat" cmpd="sng" algn="ctr">
                       <a:solidFill>
                         <a:srgbClr val="B9C7DA"/>
@@ -16385,6 +16428,11 @@
                     </a:solidFill>
                   </a:tcPr>
                 </a:tc>
+                <a:extLst>
+                  <a:ext uri="{0D108BD9-81ED-4DB2-BD59-A6C34878D82A}">
+                    <a16:rowId xmlns:a16="http://schemas.microsoft.com/office/drawing/2014/main" val="10003"/>
+                  </a:ext>
+                </a:extLst>
               </a:tr>
               <a:tr h="566928">
                 <a:tc>
@@ -16392,7 +16440,7 @@
                     <a:bodyPr/>
                     <a:lstStyle/>
                     <a:p>
-                      <a:pPr indent="0" marL="0">
+                      <a:pPr marL="0" indent="0">
                         <a:buNone/>
                       </a:pPr>
                       <a:r>
@@ -16406,7 +16454,7 @@
                       <a:endParaRPr lang="en-US" sz="1300" dirty="0"/>
                     </a:p>
                   </a:txBody>
-                  <a:tcPr marL="91440" marR="91440" marT="45720" marB="45720" anchor="ctr">
+                  <a:tcPr anchor="ctr">
                     <a:lnL w="12700" cap="flat" cmpd="sng" algn="ctr">
                       <a:solidFill>
                         <a:srgbClr val="B9C7DA"/>
@@ -16453,7 +16501,7 @@
                     <a:bodyPr/>
                     <a:lstStyle/>
                     <a:p>
-                      <a:pPr indent="0" marL="0">
+                      <a:pPr marL="0" indent="0">
                         <a:buNone/>
                       </a:pPr>
                       <a:r>
@@ -16467,7 +16515,7 @@
                       <a:endParaRPr lang="en-US" sz="1300" dirty="0"/>
                     </a:p>
                   </a:txBody>
-                  <a:tcPr marL="91440" marR="91440" marT="45720" marB="45720" anchor="ctr">
+                  <a:tcPr anchor="ctr">
                     <a:lnL w="12700" cap="flat" cmpd="sng" algn="ctr">
                       <a:solidFill>
                         <a:srgbClr val="B9C7DA"/>
@@ -16514,7 +16562,7 @@
                     <a:bodyPr/>
                     <a:lstStyle/>
                     <a:p>
-                      <a:pPr indent="0" marL="0">
+                      <a:pPr marL="0" indent="0">
                         <a:buNone/>
                       </a:pPr>
                       <a:r>
@@ -16528,7 +16576,7 @@
                       <a:endParaRPr lang="en-US" sz="1300" dirty="0"/>
                     </a:p>
                   </a:txBody>
-                  <a:tcPr marL="91440" marR="91440" marT="45720" marB="45720" anchor="ctr">
+                  <a:tcPr anchor="ctr">
                     <a:lnL w="12700" cap="flat" cmpd="sng" algn="ctr">
                       <a:solidFill>
                         <a:srgbClr val="B9C7DA"/>
@@ -16570,6 +16618,11 @@
                     </a:solidFill>
                   </a:tcPr>
                 </a:tc>
+                <a:extLst>
+                  <a:ext uri="{0D108BD9-81ED-4DB2-BD59-A6C34878D82A}">
+                    <a16:rowId xmlns:a16="http://schemas.microsoft.com/office/drawing/2014/main" val="10004"/>
+                  </a:ext>
+                </a:extLst>
               </a:tr>
               <a:tr h="566928">
                 <a:tc>
@@ -16577,7 +16630,7 @@
                     <a:bodyPr/>
                     <a:lstStyle/>
                     <a:p>
-                      <a:pPr indent="0" marL="0">
+                      <a:pPr marL="0" indent="0">
                         <a:buNone/>
                       </a:pPr>
                       <a:r>
@@ -16591,7 +16644,7 @@
                       <a:endParaRPr lang="en-US" sz="1300" dirty="0"/>
                     </a:p>
                   </a:txBody>
-                  <a:tcPr marL="91440" marR="91440" marT="45720" marB="45720" anchor="ctr">
+                  <a:tcPr anchor="ctr">
                     <a:lnL w="12700" cap="flat" cmpd="sng" algn="ctr">
                       <a:solidFill>
                         <a:srgbClr val="B9C7DA"/>
@@ -16638,7 +16691,7 @@
                     <a:bodyPr/>
                     <a:lstStyle/>
                     <a:p>
-                      <a:pPr indent="0" marL="0">
+                      <a:pPr marL="0" indent="0">
                         <a:buNone/>
                       </a:pPr>
                       <a:r>
@@ -16652,7 +16705,7 @@
                       <a:endParaRPr lang="en-US" sz="1300" dirty="0"/>
                     </a:p>
                   </a:txBody>
-                  <a:tcPr marL="91440" marR="91440" marT="45720" marB="45720" anchor="ctr">
+                  <a:tcPr anchor="ctr">
                     <a:lnL w="12700" cap="flat" cmpd="sng" algn="ctr">
                       <a:solidFill>
                         <a:srgbClr val="B9C7DA"/>
@@ -16699,7 +16752,7 @@
                     <a:bodyPr/>
                     <a:lstStyle/>
                     <a:p>
-                      <a:pPr indent="0" marL="0">
+                      <a:pPr marL="0" indent="0">
                         <a:buNone/>
                       </a:pPr>
                       <a:r>
@@ -16713,7 +16766,7 @@
                       <a:endParaRPr lang="en-US" sz="1300" dirty="0"/>
                     </a:p>
                   </a:txBody>
-                  <a:tcPr marL="91440" marR="91440" marT="45720" marB="45720" anchor="ctr">
+                  <a:tcPr anchor="ctr">
                     <a:lnL w="12700" cap="flat" cmpd="sng" algn="ctr">
                       <a:solidFill>
                         <a:srgbClr val="B9C7DA"/>
@@ -16755,6 +16808,11 @@
                     </a:solidFill>
                   </a:tcPr>
                 </a:tc>
+                <a:extLst>
+                  <a:ext uri="{0D108BD9-81ED-4DB2-BD59-A6C34878D82A}">
+                    <a16:rowId xmlns:a16="http://schemas.microsoft.com/office/drawing/2014/main" val="10005"/>
+                  </a:ext>
+                </a:extLst>
               </a:tr>
               <a:tr h="566928">
                 <a:tc>
@@ -16762,7 +16820,7 @@
                     <a:bodyPr/>
                     <a:lstStyle/>
                     <a:p>
-                      <a:pPr indent="0" marL="0">
+                      <a:pPr marL="0" indent="0">
                         <a:buNone/>
                       </a:pPr>
                       <a:r>
@@ -16776,7 +16834,7 @@
                       <a:endParaRPr lang="en-US" sz="1300" dirty="0"/>
                     </a:p>
                   </a:txBody>
-                  <a:tcPr marL="91440" marR="91440" marT="45720" marB="45720" anchor="ctr">
+                  <a:tcPr anchor="ctr">
                     <a:lnL w="12700" cap="flat" cmpd="sng" algn="ctr">
                       <a:solidFill>
                         <a:srgbClr val="B9C7DA"/>
@@ -16823,7 +16881,7 @@
                     <a:bodyPr/>
                     <a:lstStyle/>
                     <a:p>
-                      <a:pPr indent="0" marL="0">
+                      <a:pPr marL="0" indent="0">
                         <a:buNone/>
                       </a:pPr>
                       <a:r>
@@ -16837,7 +16895,7 @@
                       <a:endParaRPr lang="en-US" sz="1300" dirty="0"/>
                     </a:p>
                   </a:txBody>
-                  <a:tcPr marL="91440" marR="91440" marT="45720" marB="45720" anchor="ctr">
+                  <a:tcPr anchor="ctr">
                     <a:lnL w="12700" cap="flat" cmpd="sng" algn="ctr">
                       <a:solidFill>
                         <a:srgbClr val="B9C7DA"/>
@@ -16884,7 +16942,7 @@
                     <a:bodyPr/>
                     <a:lstStyle/>
                     <a:p>
-                      <a:pPr indent="0" marL="0">
+                      <a:pPr marL="0" indent="0">
                         <a:buNone/>
                       </a:pPr>
                       <a:r>
@@ -16898,7 +16956,7 @@
                       <a:endParaRPr lang="en-US" sz="1300" dirty="0"/>
                     </a:p>
                   </a:txBody>
-                  <a:tcPr marL="91440" marR="91440" marT="45720" marB="45720" anchor="ctr">
+                  <a:tcPr anchor="ctr">
                     <a:lnL w="12700" cap="flat" cmpd="sng" algn="ctr">
                       <a:solidFill>
                         <a:srgbClr val="B9C7DA"/>
@@ -16940,6 +16998,11 @@
                     </a:solidFill>
                   </a:tcPr>
                 </a:tc>
+                <a:extLst>
+                  <a:ext uri="{0D108BD9-81ED-4DB2-BD59-A6C34878D82A}">
+                    <a16:rowId xmlns:a16="http://schemas.microsoft.com/office/drawing/2014/main" val="10006"/>
+                  </a:ext>
+                </a:extLst>
               </a:tr>
               <a:tr h="566928">
                 <a:tc>
@@ -16947,7 +17010,7 @@
                     <a:bodyPr/>
                     <a:lstStyle/>
                     <a:p>
-                      <a:pPr indent="0" marL="0">
+                      <a:pPr marL="0" indent="0">
                         <a:buNone/>
                       </a:pPr>
                       <a:r>
@@ -16961,7 +17024,7 @@
                       <a:endParaRPr lang="en-US" sz="1300" dirty="0"/>
                     </a:p>
                   </a:txBody>
-                  <a:tcPr marL="91440" marR="91440" marT="45720" marB="45720" anchor="ctr">
+                  <a:tcPr anchor="ctr">
                     <a:lnL w="12700" cap="flat" cmpd="sng" algn="ctr">
                       <a:solidFill>
                         <a:srgbClr val="B9C7DA"/>
@@ -17008,7 +17071,7 @@
                     <a:bodyPr/>
                     <a:lstStyle/>
                     <a:p>
-                      <a:pPr indent="0" marL="0">
+                      <a:pPr marL="0" indent="0">
                         <a:buNone/>
                       </a:pPr>
                       <a:r>
@@ -17022,7 +17085,7 @@
                       <a:endParaRPr lang="en-US" sz="1300" dirty="0"/>
                     </a:p>
                   </a:txBody>
-                  <a:tcPr marL="91440" marR="91440" marT="45720" marB="45720" anchor="ctr">
+                  <a:tcPr anchor="ctr">
                     <a:lnL w="12700" cap="flat" cmpd="sng" algn="ctr">
                       <a:solidFill>
                         <a:srgbClr val="B9C7DA"/>
@@ -17069,7 +17132,7 @@
                     <a:bodyPr/>
                     <a:lstStyle/>
                     <a:p>
-                      <a:pPr indent="0" marL="0">
+                      <a:pPr marL="0" indent="0">
                         <a:buNone/>
                       </a:pPr>
                       <a:r>
@@ -17083,7 +17146,7 @@
                       <a:endParaRPr lang="en-US" sz="1300" dirty="0"/>
                     </a:p>
                   </a:txBody>
-                  <a:tcPr marL="91440" marR="91440" marT="45720" marB="45720" anchor="ctr">
+                  <a:tcPr anchor="ctr">
                     <a:lnL w="12700" cap="flat" cmpd="sng" algn="ctr">
                       <a:solidFill>
                         <a:srgbClr val="B9C7DA"/>
@@ -17125,6 +17188,11 @@
                     </a:solidFill>
                   </a:tcPr>
                 </a:tc>
+                <a:extLst>
+                  <a:ext uri="{0D108BD9-81ED-4DB2-BD59-A6C34878D82A}">
+                    <a16:rowId xmlns:a16="http://schemas.microsoft.com/office/drawing/2014/main" val="10007"/>
+                  </a:ext>
+                </a:extLst>
               </a:tr>
             </a:tbl>
           </a:graphicData>
@@ -17178,7 +17246,7 @@
           <a:bodyPr wrap="square" lIns="0" tIns="0" rIns="0" bIns="0" rtlCol="0" anchor="ctr"/>
           <a:lstStyle/>
           <a:p>
-            <a:pPr algn="ctr" indent="0" marL="0">
+            <a:pPr marL="0" indent="0" algn="ctr">
               <a:buNone/>
             </a:pPr>
             <a:r>
@@ -17214,7 +17282,7 @@
           <a:bodyPr wrap="square" lIns="0" tIns="0" rIns="0" bIns="0" rtlCol="0" anchor="ctr"/>
           <a:lstStyle/>
           <a:p>
-            <a:pPr algn="ctr" indent="0" marL="0">
+            <a:pPr marL="0" indent="0" algn="ctr">
               <a:buNone/>
             </a:pPr>
             <a:r>
@@ -17250,7 +17318,7 @@
           <a:bodyPr wrap="square" lIns="0" tIns="0" rIns="0" bIns="0" rtlCol="0" anchor="t"/>
           <a:lstStyle/>
           <a:p>
-            <a:pPr algn="ctr" indent="0" marL="0">
+            <a:pPr marL="0" indent="0" algn="ctr">
               <a:buNone/>
             </a:pPr>
             <a:r>
@@ -17285,7 +17353,7 @@
           </a:prstGeom>
           <a:extLst>
             <a:ext uri="{C572A759-6A51-4108-AA02-DFA0A04FC94B}">
-              <ma14:wrappingTextBoxFlag xmlns:ma14="http://schemas.microsoft.com/office/mac/drawingml/2011/main" val="0"/>
+              <ma14:wrappingTextBoxFlag xmlns:ma14="http://schemas.microsoft.com/office/mac/drawingml/2011/main" xmlns="" val="0"/>
             </a:ext>
           </a:extLst>
         </p:spPr>
@@ -17303,7 +17371,7 @@
           <a:p>
             <a:pPr algn="r"/>
             <a:fld id="{F7021451-1387-4CA6-816F-3879F97B5CBC}" type="slidenum">
-              <a:rPr b="0" lang="en-US"/>
+              <a:rPr lang="en-US" b="0"/>
               <a:t>9</a:t>
             </a:fld>
             <a:endParaRPr lang="en-US"/>
@@ -17611,4 +17679,299 @@
     </a:ext>
   </a:extLst>
 </a:theme>
+</file>
+
+<file path=ppt/theme/theme2.xml><?xml version="1.0" encoding="utf-8"?>
+<a:theme xmlns:a="http://schemas.openxmlformats.org/drawingml/2006/main" name="Office Theme">
+  <a:themeElements>
+    <a:clrScheme name="Office">
+      <a:dk1>
+        <a:sysClr val="windowText" lastClr="000000"/>
+      </a:dk1>
+      <a:lt1>
+        <a:sysClr val="window" lastClr="FFFFFF"/>
+      </a:lt1>
+      <a:dk2>
+        <a:srgbClr val="44546A"/>
+      </a:dk2>
+      <a:lt2>
+        <a:srgbClr val="E7E6E6"/>
+      </a:lt2>
+      <a:accent1>
+        <a:srgbClr val="4472C4"/>
+      </a:accent1>
+      <a:accent2>
+        <a:srgbClr val="ED7D31"/>
+      </a:accent2>
+      <a:accent3>
+        <a:srgbClr val="A5A5A5"/>
+      </a:accent3>
+      <a:accent4>
+        <a:srgbClr val="FFC000"/>
+      </a:accent4>
+      <a:accent5>
+        <a:srgbClr val="5B9BD5"/>
+      </a:accent5>
+      <a:accent6>
+        <a:srgbClr val="70AD47"/>
+      </a:accent6>
+      <a:hlink>
+        <a:srgbClr val="0563C1"/>
+      </a:hlink>
+      <a:folHlink>
+        <a:srgbClr val="954F72"/>
+      </a:folHlink>
+    </a:clrScheme>
+    <a:fontScheme name="Office">
+      <a:majorFont>
+        <a:latin typeface="Calibri Light" panose="020F0302020204030204"/>
+        <a:ea typeface=""/>
+        <a:cs typeface=""/>
+        <a:font script="Jpan" typeface="游ゴシック Light"/>
+        <a:font script="Hang" typeface="맑은 고딕"/>
+        <a:font script="Hans" typeface="等线 Light"/>
+        <a:font script="Hant" typeface="新細明體"/>
+        <a:font script="Arab" typeface="Times New Roman"/>
+        <a:font script="Hebr" typeface="Times New Roman"/>
+        <a:font script="Thai" typeface="Angsana New"/>
+        <a:font script="Ethi" typeface="Nyala"/>
+        <a:font script="Beng" typeface="Vrinda"/>
+        <a:font script="Gujr" typeface="Shruti"/>
+        <a:font script="Khmr" typeface="MoolBoran"/>
+        <a:font script="Knda" typeface="Tunga"/>
+        <a:font script="Guru" typeface="Raavi"/>
+        <a:font script="Cans" typeface="Euphemia"/>
+        <a:font script="Cher" typeface="Plantagenet Cherokee"/>
+        <a:font script="Yiii" typeface="Microsoft Yi Baiti"/>
+        <a:font script="Tibt" typeface="Microsoft Himalaya"/>
+        <a:font script="Thaa" typeface="MV Boli"/>
+        <a:font script="Deva" typeface="Mangal"/>
+        <a:font script="Telu" typeface="Gautami"/>
+        <a:font script="Taml" typeface="Latha"/>
+        <a:font script="Syrc" typeface="Estrangelo Edessa"/>
+        <a:font script="Orya" typeface="Kalinga"/>
+        <a:font script="Mlym" typeface="Kartika"/>
+        <a:font script="Laoo" typeface="DokChampa"/>
+        <a:font script="Sinh" typeface="Iskoola Pota"/>
+        <a:font script="Mong" typeface="Mongolian Baiti"/>
+        <a:font script="Viet" typeface="Times New Roman"/>
+        <a:font script="Uigh" typeface="Microsoft Uighur"/>
+        <a:font script="Geor" typeface="Sylfaen"/>
+        <a:font script="Armn" typeface="Arial"/>
+        <a:font script="Bugi" typeface="Leelawadee UI"/>
+        <a:font script="Bopo" typeface="Microsoft JhengHei"/>
+        <a:font script="Java" typeface="Javanese Text"/>
+        <a:font script="Lisu" typeface="Segoe UI"/>
+        <a:font script="Mymr" typeface="Myanmar Text"/>
+        <a:font script="Nkoo" typeface="Ebrima"/>
+        <a:font script="Olck" typeface="Nirmala UI"/>
+        <a:font script="Osma" typeface="Ebrima"/>
+        <a:font script="Phag" typeface="Phagspa"/>
+        <a:font script="Syrn" typeface="Estrangelo Edessa"/>
+        <a:font script="Syrj" typeface="Estrangelo Edessa"/>
+        <a:font script="Syre" typeface="Estrangelo Edessa"/>
+        <a:font script="Sora" typeface="Nirmala UI"/>
+        <a:font script="Tale" typeface="Microsoft Tai Le"/>
+        <a:font script="Talu" typeface="Microsoft New Tai Lue"/>
+        <a:font script="Tfng" typeface="Ebrima"/>
+      </a:majorFont>
+      <a:minorFont>
+        <a:latin typeface="Calibri" panose="020F0502020204030204"/>
+        <a:ea typeface=""/>
+        <a:cs typeface=""/>
+        <a:font script="Jpan" typeface="游ゴシック"/>
+        <a:font script="Hang" typeface="맑은 고딕"/>
+        <a:font script="Hans" typeface="等线"/>
+        <a:font script="Hant" typeface="新細明體"/>
+        <a:font script="Arab" typeface="Arial"/>
+        <a:font script="Hebr" typeface="Arial"/>
+        <a:font script="Thai" typeface="Cordia New"/>
+        <a:font script="Ethi" typeface="Nyala"/>
+        <a:font script="Beng" typeface="Vrinda"/>
+        <a:font script="Gujr" typeface="Shruti"/>
+        <a:font script="Khmr" typeface="DaunPenh"/>
+        <a:font script="Knda" typeface="Tunga"/>
+        <a:font script="Guru" typeface="Raavi"/>
+        <a:font script="Cans" typeface="Euphemia"/>
+        <a:font script="Cher" typeface="Plantagenet Cherokee"/>
+        <a:font script="Yiii" typeface="Microsoft Yi Baiti"/>
+        <a:font script="Tibt" typeface="Microsoft Himalaya"/>
+        <a:font script="Thaa" typeface="MV Boli"/>
+        <a:font script="Deva" typeface="Mangal"/>
+        <a:font script="Telu" typeface="Gautami"/>
+        <a:font script="Taml" typeface="Latha"/>
+        <a:font script="Syrc" typeface="Estrangelo Edessa"/>
+        <a:font script="Orya" typeface="Kalinga"/>
+        <a:font script="Mlym" typeface="Kartika"/>
+        <a:font script="Laoo" typeface="DokChampa"/>
+        <a:font script="Sinh" typeface="Iskoola Pota"/>
+        <a:font script="Mong" typeface="Mongolian Baiti"/>
+        <a:font script="Viet" typeface="Arial"/>
+        <a:font script="Uigh" typeface="Microsoft Uighur"/>
+        <a:font script="Geor" typeface="Sylfaen"/>
+        <a:font script="Armn" typeface="Arial"/>
+        <a:font script="Bugi" typeface="Leelawadee UI"/>
+        <a:font script="Bopo" typeface="Microsoft JhengHei"/>
+        <a:font script="Java" typeface="Javanese Text"/>
+        <a:font script="Lisu" typeface="Segoe UI"/>
+        <a:font script="Mymr" typeface="Myanmar Text"/>
+        <a:font script="Nkoo" typeface="Ebrima"/>
+        <a:font script="Olck" typeface="Nirmala UI"/>
+        <a:font script="Osma" typeface="Ebrima"/>
+        <a:font script="Phag" typeface="Phagspa"/>
+        <a:font script="Syrn" typeface="Estrangelo Edessa"/>
+        <a:font script="Syrj" typeface="Estrangelo Edessa"/>
+        <a:font script="Syre" typeface="Estrangelo Edessa"/>
+        <a:font script="Sora" typeface="Nirmala UI"/>
+        <a:font script="Tale" typeface="Microsoft Tai Le"/>
+        <a:font script="Talu" typeface="Microsoft New Tai Lue"/>
+        <a:font script="Tfng" typeface="Ebrima"/>
+      </a:minorFont>
+    </a:fontScheme>
+    <a:fmtScheme name="Office">
+      <a:fillStyleLst>
+        <a:solidFill>
+          <a:schemeClr val="phClr"/>
+        </a:solidFill>
+        <a:gradFill rotWithShape="1">
+          <a:gsLst>
+            <a:gs pos="0">
+              <a:schemeClr val="phClr">
+                <a:lumMod val="110000"/>
+                <a:satMod val="105000"/>
+                <a:tint val="67000"/>
+              </a:schemeClr>
+            </a:gs>
+            <a:gs pos="50000">
+              <a:schemeClr val="phClr">
+                <a:lumMod val="105000"/>
+                <a:satMod val="103000"/>
+                <a:tint val="73000"/>
+              </a:schemeClr>
+            </a:gs>
+            <a:gs pos="100000">
+              <a:schemeClr val="phClr">
+                <a:lumMod val="105000"/>
+                <a:satMod val="109000"/>
+                <a:tint val="81000"/>
+              </a:schemeClr>
+            </a:gs>
+          </a:gsLst>
+          <a:lin ang="5400000" scaled="0"/>
+        </a:gradFill>
+        <a:gradFill rotWithShape="1">
+          <a:gsLst>
+            <a:gs pos="0">
+              <a:schemeClr val="phClr">
+                <a:satMod val="103000"/>
+                <a:lumMod val="102000"/>
+                <a:tint val="94000"/>
+              </a:schemeClr>
+            </a:gs>
+            <a:gs pos="50000">
+              <a:schemeClr val="phClr">
+                <a:satMod val="110000"/>
+                <a:lumMod val="100000"/>
+                <a:shade val="100000"/>
+              </a:schemeClr>
+            </a:gs>
+            <a:gs pos="100000">
+              <a:schemeClr val="phClr">
+                <a:lumMod val="99000"/>
+                <a:satMod val="120000"/>
+                <a:shade val="78000"/>
+              </a:schemeClr>
+            </a:gs>
+          </a:gsLst>
+          <a:lin ang="5400000" scaled="0"/>
+        </a:gradFill>
+      </a:fillStyleLst>
+      <a:lnStyleLst>
+        <a:ln w="6350" cap="flat" cmpd="sng" algn="ctr">
+          <a:solidFill>
+            <a:schemeClr val="phClr"/>
+          </a:solidFill>
+          <a:prstDash val="solid"/>
+          <a:miter lim="800000"/>
+        </a:ln>
+        <a:ln w="12700" cap="flat" cmpd="sng" algn="ctr">
+          <a:solidFill>
+            <a:schemeClr val="phClr"/>
+          </a:solidFill>
+          <a:prstDash val="solid"/>
+          <a:miter lim="800000"/>
+        </a:ln>
+        <a:ln w="19050" cap="flat" cmpd="sng" algn="ctr">
+          <a:solidFill>
+            <a:schemeClr val="phClr"/>
+          </a:solidFill>
+          <a:prstDash val="solid"/>
+          <a:miter lim="800000"/>
+        </a:ln>
+      </a:lnStyleLst>
+      <a:effectStyleLst>
+        <a:effectStyle>
+          <a:effectLst/>
+        </a:effectStyle>
+        <a:effectStyle>
+          <a:effectLst/>
+        </a:effectStyle>
+        <a:effectStyle>
+          <a:effectLst>
+            <a:outerShdw blurRad="57150" dist="19050" dir="5400000" algn="ctr" rotWithShape="0">
+              <a:srgbClr val="000000">
+                <a:alpha val="63000"/>
+              </a:srgbClr>
+            </a:outerShdw>
+          </a:effectLst>
+        </a:effectStyle>
+      </a:effectStyleLst>
+      <a:bgFillStyleLst>
+        <a:solidFill>
+          <a:schemeClr val="phClr"/>
+        </a:solidFill>
+        <a:solidFill>
+          <a:schemeClr val="phClr">
+            <a:tint val="95000"/>
+            <a:satMod val="170000"/>
+          </a:schemeClr>
+        </a:solidFill>
+        <a:gradFill rotWithShape="1">
+          <a:gsLst>
+            <a:gs pos="0">
+              <a:schemeClr val="phClr">
+                <a:tint val="93000"/>
+                <a:satMod val="150000"/>
+                <a:shade val="98000"/>
+                <a:lumMod val="102000"/>
+              </a:schemeClr>
+            </a:gs>
+            <a:gs pos="50000">
+              <a:schemeClr val="phClr">
+                <a:tint val="98000"/>
+                <a:satMod val="130000"/>
+                <a:shade val="90000"/>
+                <a:lumMod val="103000"/>
+              </a:schemeClr>
+            </a:gs>
+            <a:gs pos="100000">
+              <a:schemeClr val="phClr">
+                <a:shade val="63000"/>
+                <a:satMod val="120000"/>
+              </a:schemeClr>
+            </a:gs>
+          </a:gsLst>
+          <a:lin ang="5400000" scaled="0"/>
+        </a:gradFill>
+      </a:bgFillStyleLst>
+    </a:fmtScheme>
+  </a:themeElements>
+  <a:objectDefaults/>
+  <a:extraClrSchemeLst/>
+  <a:extLst>
+    <a:ext uri="{05A4C25C-085E-4340-85A3-A5531E510DB2}">
+      <thm15:themeFamily xmlns:thm15="http://schemas.microsoft.com/office/thememl/2012/main" name="Office Theme" id="{62F939B6-93AF-4DB8-9C6B-D6C7DFDC589F}" vid="{4A3C46E8-61CC-4603-A589-7422A47A8E4A}"/>
+    </a:ext>
+  </a:extLst>
+</a:theme>
 </file>